--- a/docs/finals-roadshow-v0.3.0.pptx
+++ b/docs/finals-roadshow-v0.3.0.pptx
@@ -116,6 +116,1196 @@
     </a:lvl9pPr>
   </p:defaultTextStyle>
 </p:presentation>
+</file>
+
+<file path=ppt/notesMasters/notesMaster1.xml><?xml version="1.0" encoding="utf-8"?>
+<p:notesMaster xmlns:a="http://schemas.openxmlformats.org/drawingml/2006/main" xmlns:p="http://schemas.openxmlformats.org/presentationml/2006/main" xmlns:r="http://schemas.openxmlformats.org/officeDocument/2006/relationships">
+  <p:cSld>
+    <p:bg>
+      <p:bgRef idx="1001">
+        <a:schemeClr val="bg1"/>
+      </p:bgRef>
+    </p:bg>
+    <p:spTree>
+      <p:nvGrpSpPr>
+        <p:cNvPr id="1" name=""/>
+        <p:cNvGrpSpPr/>
+        <p:nvPr/>
+      </p:nvGrpSpPr>
+      <p:grpSpPr>
+        <a:xfrm>
+          <a:off x="0" y="0"/>
+          <a:ext cx="0" cy="0"/>
+          <a:chOff x="0" y="0"/>
+          <a:chExt cx="0" cy="0"/>
+        </a:xfrm>
+      </p:grpSpPr>
+      <p:sp>
+        <p:nvSpPr>
+          <p:cNvPr id="2" name="Header Placeholder 1"/>
+          <p:cNvSpPr>
+            <a:spLocks noGrp="1"/>
+          </p:cNvSpPr>
+          <p:nvPr>
+            <p:ph type="hdr" sz="quarter"/>
+          </p:nvPr>
+        </p:nvSpPr>
+        <p:spPr>
+          <a:xfrm>
+            <a:off x="0" y="0"/>
+            <a:ext cx="2971800" cy="457200"/>
+          </a:xfrm>
+          <a:prstGeom prst="rect">
+            <a:avLst/>
+          </a:prstGeom>
+        </p:spPr>
+        <p:txBody>
+          <a:bodyPr vert="horz" lIns="91440" tIns="45720" rIns="91440" bIns="45720" rtlCol="0"/>
+          <a:lstStyle>
+            <a:lvl1pPr algn="l">
+              <a:defRPr sz="1200"/>
+            </a:lvl1pPr>
+          </a:lstStyle>
+          <a:p>
+            <a:endParaRPr lang="en-US"/>
+          </a:p>
+        </p:txBody>
+      </p:sp>
+      <p:sp>
+        <p:nvSpPr>
+          <p:cNvPr id="3" name="Date Placeholder 2"/>
+          <p:cNvSpPr>
+            <a:spLocks noGrp="1"/>
+          </p:cNvSpPr>
+          <p:nvPr>
+            <p:ph type="dt" idx="1"/>
+          </p:nvPr>
+        </p:nvSpPr>
+        <p:spPr>
+          <a:xfrm>
+            <a:off x="3884613" y="0"/>
+            <a:ext cx="2971800" cy="457200"/>
+          </a:xfrm>
+          <a:prstGeom prst="rect">
+            <a:avLst/>
+          </a:prstGeom>
+        </p:spPr>
+        <p:txBody>
+          <a:bodyPr vert="horz" lIns="91440" tIns="45720" rIns="91440" bIns="45720" rtlCol="0"/>
+          <a:lstStyle>
+            <a:lvl1pPr algn="r">
+              <a:defRPr sz="1200"/>
+            </a:lvl1pPr>
+          </a:lstStyle>
+          <a:p>
+            <a:fld id="{0F89C1C7-3DCD-1040-A9CF-14679D8B5DDD}" type="datetimeFigureOut">
+              <a:rPr lang="en-US" smtClean="0"/>
+              <a:t>10/17/16</a:t>
+            </a:fld>
+            <a:endParaRPr lang="en-US"/>
+          </a:p>
+        </p:txBody>
+      </p:sp>
+      <p:sp>
+        <p:nvSpPr>
+          <p:cNvPr id="4" name="Slide Image Placeholder 3"/>
+          <p:cNvSpPr>
+            <a:spLocks noGrp="1" noRot="1" noChangeAspect="1"/>
+          </p:cNvSpPr>
+          <p:nvPr>
+            <p:ph type="sldImg" idx="2"/>
+          </p:nvPr>
+        </p:nvSpPr>
+        <p:spPr>
+          <a:xfrm>
+            <a:off x="1143000" y="685800"/>
+            <a:ext cx="4572000" cy="3429000"/>
+          </a:xfrm>
+          <a:prstGeom prst="rect">
+            <a:avLst/>
+          </a:prstGeom>
+          <a:noFill/>
+          <a:ln w="12700">
+            <a:solidFill>
+              <a:prstClr val="black"/>
+            </a:solidFill>
+          </a:ln>
+        </p:spPr>
+        <p:txBody>
+          <a:bodyPr vert="horz" lIns="91440" tIns="45720" rIns="91440" bIns="45720" rtlCol="0" anchor="ctr"/>
+          <a:lstStyle/>
+          <a:p>
+            <a:endParaRPr lang="en-US"/>
+          </a:p>
+        </p:txBody>
+      </p:sp>
+      <p:sp>
+        <p:nvSpPr>
+          <p:cNvPr id="5" name="Notes Placeholder 4"/>
+          <p:cNvSpPr>
+            <a:spLocks noGrp="1"/>
+          </p:cNvSpPr>
+          <p:nvPr>
+            <p:ph type="body" sz="quarter" idx="3"/>
+          </p:nvPr>
+        </p:nvSpPr>
+        <p:spPr>
+          <a:xfrm>
+            <a:off x="685800" y="4343400"/>
+            <a:ext cx="5486400" cy="4114800"/>
+          </a:xfrm>
+          <a:prstGeom prst="rect">
+            <a:avLst/>
+          </a:prstGeom>
+        </p:spPr>
+        <p:txBody>
+          <a:bodyPr vert="horz" lIns="91440" tIns="45720" rIns="91440" bIns="45720" rtlCol="0"/>
+          <a:lstStyle/>
+          <a:p>
+            <a:pPr lvl="0"/>
+            <a:r>
+              <a:rPr lang="en-US" smtClean="0"/>
+              <a:t>Click to edit Master text styles</a:t>
+            </a:r>
+          </a:p>
+          <a:p>
+            <a:pPr lvl="1"/>
+            <a:r>
+              <a:rPr lang="en-US" smtClean="0"/>
+              <a:t>Second level</a:t>
+            </a:r>
+          </a:p>
+          <a:p>
+            <a:pPr lvl="2"/>
+            <a:r>
+              <a:rPr lang="en-US" smtClean="0"/>
+              <a:t>Third level</a:t>
+            </a:r>
+          </a:p>
+          <a:p>
+            <a:pPr lvl="3"/>
+            <a:r>
+              <a:rPr lang="en-US" smtClean="0"/>
+              <a:t>Fourth level</a:t>
+            </a:r>
+          </a:p>
+          <a:p>
+            <a:pPr lvl="4"/>
+            <a:r>
+              <a:rPr lang="en-US" smtClean="0"/>
+              <a:t>Fifth level</a:t>
+            </a:r>
+            <a:endParaRPr lang="en-US"/>
+          </a:p>
+        </p:txBody>
+      </p:sp>
+      <p:sp>
+        <p:nvSpPr>
+          <p:cNvPr id="6" name="Footer Placeholder 5"/>
+          <p:cNvSpPr>
+            <a:spLocks noGrp="1"/>
+          </p:cNvSpPr>
+          <p:nvPr>
+            <p:ph type="ftr" sz="quarter" idx="4"/>
+          </p:nvPr>
+        </p:nvSpPr>
+        <p:spPr>
+          <a:xfrm>
+            <a:off x="0" y="8685213"/>
+            <a:ext cx="2971800" cy="457200"/>
+          </a:xfrm>
+          <a:prstGeom prst="rect">
+            <a:avLst/>
+          </a:prstGeom>
+        </p:spPr>
+        <p:txBody>
+          <a:bodyPr vert="horz" lIns="91440" tIns="45720" rIns="91440" bIns="45720" rtlCol="0" anchor="b"/>
+          <a:lstStyle>
+            <a:lvl1pPr algn="l">
+              <a:defRPr sz="1200"/>
+            </a:lvl1pPr>
+          </a:lstStyle>
+          <a:p>
+            <a:endParaRPr lang="en-US"/>
+          </a:p>
+        </p:txBody>
+      </p:sp>
+      <p:sp>
+        <p:nvSpPr>
+          <p:cNvPr id="7" name="Slide Number Placeholder 6"/>
+          <p:cNvSpPr>
+            <a:spLocks noGrp="1"/>
+          </p:cNvSpPr>
+          <p:nvPr>
+            <p:ph type="sldNum" sz="quarter" idx="5"/>
+          </p:nvPr>
+        </p:nvSpPr>
+        <p:spPr>
+          <a:xfrm>
+            <a:off x="3884613" y="8685213"/>
+            <a:ext cx="2971800" cy="457200"/>
+          </a:xfrm>
+          <a:prstGeom prst="rect">
+            <a:avLst/>
+          </a:prstGeom>
+        </p:spPr>
+        <p:txBody>
+          <a:bodyPr vert="horz" lIns="91440" tIns="45720" rIns="91440" bIns="45720" rtlCol="0" anchor="b"/>
+          <a:lstStyle>
+            <a:lvl1pPr algn="r">
+              <a:defRPr sz="1200"/>
+            </a:lvl1pPr>
+          </a:lstStyle>
+          <a:p>
+            <a:fld id="{BB5E49A5-4136-284D-997B-48E1D791AD67}" type="slidenum">
+              <a:rPr lang="en-US" smtClean="0"/>
+              <a:t>‹#›</a:t>
+            </a:fld>
+            <a:endParaRPr lang="en-US"/>
+          </a:p>
+        </p:txBody>
+      </p:sp>
+    </p:spTree>
+    <p:extLst>
+      <p:ext uri="{BB962C8B-B14F-4D97-AF65-F5344CB8AC3E}">
+        <p14:creationId xmlns:p14="http://schemas.microsoft.com/office/powerpoint/2010/main" val="2623252185"/>
+      </p:ext>
+    </p:extLst>
+  </p:cSld>
+  <p:clrMap bg1="lt1" tx1="dk1" bg2="lt2" tx2="dk2" accent1="accent1" accent2="accent2" accent3="accent3" accent4="accent4" accent5="accent5" accent6="accent6" hlink="hlink" folHlink="folHlink"/>
+  <p:notesStyle>
+    <a:lvl1pPr marL="0" algn="l" defTabSz="457200" rtl="0" eaLnBrk="1" latinLnBrk="0" hangingPunct="1">
+      <a:defRPr sz="1200" kern="1200">
+        <a:solidFill>
+          <a:schemeClr val="tx1"/>
+        </a:solidFill>
+        <a:latin typeface="+mn-lt"/>
+        <a:ea typeface="+mn-ea"/>
+        <a:cs typeface="+mn-cs"/>
+      </a:defRPr>
+    </a:lvl1pPr>
+    <a:lvl2pPr marL="457200" algn="l" defTabSz="457200" rtl="0" eaLnBrk="1" latinLnBrk="0" hangingPunct="1">
+      <a:defRPr sz="1200" kern="1200">
+        <a:solidFill>
+          <a:schemeClr val="tx1"/>
+        </a:solidFill>
+        <a:latin typeface="+mn-lt"/>
+        <a:ea typeface="+mn-ea"/>
+        <a:cs typeface="+mn-cs"/>
+      </a:defRPr>
+    </a:lvl2pPr>
+    <a:lvl3pPr marL="914400" algn="l" defTabSz="457200" rtl="0" eaLnBrk="1" latinLnBrk="0" hangingPunct="1">
+      <a:defRPr sz="1200" kern="1200">
+        <a:solidFill>
+          <a:schemeClr val="tx1"/>
+        </a:solidFill>
+        <a:latin typeface="+mn-lt"/>
+        <a:ea typeface="+mn-ea"/>
+        <a:cs typeface="+mn-cs"/>
+      </a:defRPr>
+    </a:lvl3pPr>
+    <a:lvl4pPr marL="1371600" algn="l" defTabSz="457200" rtl="0" eaLnBrk="1" latinLnBrk="0" hangingPunct="1">
+      <a:defRPr sz="1200" kern="1200">
+        <a:solidFill>
+          <a:schemeClr val="tx1"/>
+        </a:solidFill>
+        <a:latin typeface="+mn-lt"/>
+        <a:ea typeface="+mn-ea"/>
+        <a:cs typeface="+mn-cs"/>
+      </a:defRPr>
+    </a:lvl4pPr>
+    <a:lvl5pPr marL="1828800" algn="l" defTabSz="457200" rtl="0" eaLnBrk="1" latinLnBrk="0" hangingPunct="1">
+      <a:defRPr sz="1200" kern="1200">
+        <a:solidFill>
+          <a:schemeClr val="tx1"/>
+        </a:solidFill>
+        <a:latin typeface="+mn-lt"/>
+        <a:ea typeface="+mn-ea"/>
+        <a:cs typeface="+mn-cs"/>
+      </a:defRPr>
+    </a:lvl5pPr>
+    <a:lvl6pPr marL="2286000" algn="l" defTabSz="457200" rtl="0" eaLnBrk="1" latinLnBrk="0" hangingPunct="1">
+      <a:defRPr sz="1200" kern="1200">
+        <a:solidFill>
+          <a:schemeClr val="tx1"/>
+        </a:solidFill>
+        <a:latin typeface="+mn-lt"/>
+        <a:ea typeface="+mn-ea"/>
+        <a:cs typeface="+mn-cs"/>
+      </a:defRPr>
+    </a:lvl6pPr>
+    <a:lvl7pPr marL="2743200" algn="l" defTabSz="457200" rtl="0" eaLnBrk="1" latinLnBrk="0" hangingPunct="1">
+      <a:defRPr sz="1200" kern="1200">
+        <a:solidFill>
+          <a:schemeClr val="tx1"/>
+        </a:solidFill>
+        <a:latin typeface="+mn-lt"/>
+        <a:ea typeface="+mn-ea"/>
+        <a:cs typeface="+mn-cs"/>
+      </a:defRPr>
+    </a:lvl7pPr>
+    <a:lvl8pPr marL="3200400" algn="l" defTabSz="457200" rtl="0" eaLnBrk="1" latinLnBrk="0" hangingPunct="1">
+      <a:defRPr sz="1200" kern="1200">
+        <a:solidFill>
+          <a:schemeClr val="tx1"/>
+        </a:solidFill>
+        <a:latin typeface="+mn-lt"/>
+        <a:ea typeface="+mn-ea"/>
+        <a:cs typeface="+mn-cs"/>
+      </a:defRPr>
+    </a:lvl8pPr>
+    <a:lvl9pPr marL="3657600" algn="l" defTabSz="457200" rtl="0" eaLnBrk="1" latinLnBrk="0" hangingPunct="1">
+      <a:defRPr sz="1200" kern="1200">
+        <a:solidFill>
+          <a:schemeClr val="tx1"/>
+        </a:solidFill>
+        <a:latin typeface="+mn-lt"/>
+        <a:ea typeface="+mn-ea"/>
+        <a:cs typeface="+mn-cs"/>
+      </a:defRPr>
+    </a:lvl9pPr>
+  </p:notesStyle>
+</p:notesMaster>
+</file>
+
+<file path=ppt/notesSlides/notesSlide1.xml><?xml version="1.0" encoding="utf-8"?>
+<p:notes xmlns:a="http://schemas.openxmlformats.org/drawingml/2006/main" xmlns:p="http://schemas.openxmlformats.org/presentationml/2006/main" xmlns:r="http://schemas.openxmlformats.org/officeDocument/2006/relationships">
+  <p:cSld>
+    <p:spTree>
+      <p:nvGrpSpPr>
+        <p:cNvPr id="1" name=""/>
+        <p:cNvGrpSpPr/>
+        <p:nvPr/>
+      </p:nvGrpSpPr>
+      <p:grpSpPr>
+        <a:xfrm>
+          <a:off x="0" y="0"/>
+          <a:ext cx="0" cy="0"/>
+          <a:chOff x="0" y="0"/>
+          <a:chExt cx="0" cy="0"/>
+        </a:xfrm>
+      </p:grpSpPr>
+      <p:sp>
+        <p:nvSpPr>
+          <p:cNvPr id="2" name="Slide Image Placeholder 1"/>
+          <p:cNvSpPr>
+            <a:spLocks noGrp="1"/>
+          </p:cNvSpPr>
+          <p:nvPr>
+            <p:ph type="sldImg" idx="2"/>
+          </p:nvPr>
+        </p:nvSpPr>
+        <p:spPr/>
+      </p:sp>
+      <p:sp>
+        <p:nvSpPr>
+          <p:cNvPr id="3" name="Notes Placeholder 2"/>
+          <p:cNvSpPr>
+            <a:spLocks noGrp="1"/>
+          </p:cNvSpPr>
+          <p:nvPr>
+            <p:ph type="body" idx="3" sz="quarter"/>
+          </p:nvPr>
+        </p:nvSpPr>
+        <p:spPr/>
+        <p:txBody>
+          <a:bodyPr/>
+          <a:lstStyle/>
+          <a:p>
+            <a:r>
+              <a:t>【第1页 · 约 30 秒】开场：我是 XXX，作品是 cjreg —— 仓颉私有中心仓与多仓体系，技术课题。一句话：官方中心仓解决公共分发，我们解决内网/离线/预演这三件它不覆盖的事。</a:t>
+            </a:r>
+          </a:p>
+        </p:txBody>
+      </p:sp>
+      <p:sp>
+        <p:nvSpPr>
+          <p:cNvPr id="4" name="Slide Number Placeholder 3"/>
+          <p:cNvSpPr>
+            <a:spLocks noGrp="1"/>
+          </p:cNvSpPr>
+          <p:nvPr>
+            <p:ph type="sldNum" idx="5" sz="quarter"/>
+          </p:nvPr>
+        </p:nvSpPr>
+        <p:spPr/>
+      </p:sp>
+    </p:spTree>
+  </p:cSld>
+  <p:clrMapOvr>
+    <a:masterClrMapping/>
+  </p:clrMapOvr>
+</p:notes>
+</file>
+
+<file path=ppt/notesSlides/notesSlide10.xml><?xml version="1.0" encoding="utf-8"?>
+<p:notes xmlns:a="http://schemas.openxmlformats.org/drawingml/2006/main" xmlns:p="http://schemas.openxmlformats.org/presentationml/2006/main" xmlns:r="http://schemas.openxmlformats.org/officeDocument/2006/relationships">
+  <p:cSld>
+    <p:spTree>
+      <p:nvGrpSpPr>
+        <p:cNvPr id="1" name=""/>
+        <p:cNvGrpSpPr/>
+        <p:nvPr/>
+      </p:nvGrpSpPr>
+      <p:grpSpPr>
+        <a:xfrm>
+          <a:off x="0" y="0"/>
+          <a:ext cx="0" cy="0"/>
+          <a:chOff x="0" y="0"/>
+          <a:chExt cx="0" cy="0"/>
+        </a:xfrm>
+      </p:grpSpPr>
+      <p:sp>
+        <p:nvSpPr>
+          <p:cNvPr id="2" name="Slide Image Placeholder 1"/>
+          <p:cNvSpPr>
+            <a:spLocks noGrp="1"/>
+          </p:cNvSpPr>
+          <p:nvPr>
+            <p:ph type="sldImg" idx="2"/>
+          </p:nvPr>
+        </p:nvSpPr>
+        <p:spPr/>
+      </p:sp>
+      <p:sp>
+        <p:nvSpPr>
+          <p:cNvPr id="3" name="Notes Placeholder 2"/>
+          <p:cNvSpPr>
+            <a:spLocks noGrp="1"/>
+          </p:cNvSpPr>
+          <p:nvPr>
+            <p:ph type="body" idx="3" sz="quarter"/>
+          </p:nvPr>
+        </p:nvSpPr>
+        <p:spPr/>
+        <p:txBody>
+          <a:bodyPr/>
+          <a:lstStyle/>
+          <a:p>
+            <a:r>
+              <a:t>【第10页 · 约 40 秒】四个场景各一句：内网常驻、预演仓、多仓解析、CI 集成。补一句生产在跑、有真实团队与审计数据。</a:t>
+            </a:r>
+          </a:p>
+        </p:txBody>
+      </p:sp>
+      <p:sp>
+        <p:nvSpPr>
+          <p:cNvPr id="4" name="Slide Number Placeholder 3"/>
+          <p:cNvSpPr>
+            <a:spLocks noGrp="1"/>
+          </p:cNvSpPr>
+          <p:nvPr>
+            <p:ph type="sldNum" idx="5" sz="quarter"/>
+          </p:nvPr>
+        </p:nvSpPr>
+        <p:spPr/>
+      </p:sp>
+    </p:spTree>
+  </p:cSld>
+  <p:clrMapOvr>
+    <a:masterClrMapping/>
+  </p:clrMapOvr>
+</p:notes>
+</file>
+
+<file path=ppt/notesSlides/notesSlide11.xml><?xml version="1.0" encoding="utf-8"?>
+<p:notes xmlns:a="http://schemas.openxmlformats.org/drawingml/2006/main" xmlns:p="http://schemas.openxmlformats.org/presentationml/2006/main" xmlns:r="http://schemas.openxmlformats.org/officeDocument/2006/relationships">
+  <p:cSld>
+    <p:spTree>
+      <p:nvGrpSpPr>
+        <p:cNvPr id="1" name=""/>
+        <p:cNvGrpSpPr/>
+        <p:nvPr/>
+      </p:nvGrpSpPr>
+      <p:grpSpPr>
+        <a:xfrm>
+          <a:off x="0" y="0"/>
+          <a:ext cx="0" cy="0"/>
+          <a:chOff x="0" y="0"/>
+          <a:chExt cx="0" cy="0"/>
+        </a:xfrm>
+      </p:grpSpPr>
+      <p:sp>
+        <p:nvSpPr>
+          <p:cNvPr id="2" name="Slide Image Placeholder 1"/>
+          <p:cNvSpPr>
+            <a:spLocks noGrp="1"/>
+          </p:cNvSpPr>
+          <p:nvPr>
+            <p:ph type="sldImg" idx="2"/>
+          </p:nvPr>
+        </p:nvSpPr>
+        <p:spPr/>
+      </p:sp>
+      <p:sp>
+        <p:nvSpPr>
+          <p:cNvPr id="3" name="Notes Placeholder 2"/>
+          <p:cNvSpPr>
+            <a:spLocks noGrp="1"/>
+          </p:cNvSpPr>
+          <p:nvPr>
+            <p:ph type="body" idx="3" sz="quarter"/>
+          </p:nvPr>
+        </p:nvSpPr>
+        <p:spPr/>
+        <p:txBody>
+          <a:bodyPr/>
+          <a:lstStyle/>
+          <a:p>
+            <a:r>
+              <a:t>【第11页 · 约 40 秒】主动说没做的三件（arm64、瘦身、预热），再给取舍原则——先主链路正确性，再交付形态。主动交代比被问出来得分高。</a:t>
+            </a:r>
+          </a:p>
+        </p:txBody>
+      </p:sp>
+      <p:sp>
+        <p:nvSpPr>
+          <p:cNvPr id="4" name="Slide Number Placeholder 3"/>
+          <p:cNvSpPr>
+            <a:spLocks noGrp="1"/>
+          </p:cNvSpPr>
+          <p:nvPr>
+            <p:ph type="sldNum" idx="5" sz="quarter"/>
+          </p:nvPr>
+        </p:nvSpPr>
+        <p:spPr/>
+      </p:sp>
+    </p:spTree>
+  </p:cSld>
+  <p:clrMapOvr>
+    <a:masterClrMapping/>
+  </p:clrMapOvr>
+</p:notes>
+</file>
+
+<file path=ppt/notesSlides/notesSlide12.xml><?xml version="1.0" encoding="utf-8"?>
+<p:notes xmlns:a="http://schemas.openxmlformats.org/drawingml/2006/main" xmlns:p="http://schemas.openxmlformats.org/presentationml/2006/main" xmlns:r="http://schemas.openxmlformats.org/officeDocument/2006/relationships">
+  <p:cSld>
+    <p:spTree>
+      <p:nvGrpSpPr>
+        <p:cNvPr id="1" name=""/>
+        <p:cNvGrpSpPr/>
+        <p:nvPr/>
+      </p:nvGrpSpPr>
+      <p:grpSpPr>
+        <a:xfrm>
+          <a:off x="0" y="0"/>
+          <a:ext cx="0" cy="0"/>
+          <a:chOff x="0" y="0"/>
+          <a:chExt cx="0" cy="0"/>
+        </a:xfrm>
+      </p:grpSpPr>
+      <p:sp>
+        <p:nvSpPr>
+          <p:cNvPr id="2" name="Slide Image Placeholder 1"/>
+          <p:cNvSpPr>
+            <a:spLocks noGrp="1"/>
+          </p:cNvSpPr>
+          <p:nvPr>
+            <p:ph type="sldImg" idx="2"/>
+          </p:nvPr>
+        </p:nvSpPr>
+        <p:spPr/>
+      </p:sp>
+      <p:sp>
+        <p:nvSpPr>
+          <p:cNvPr id="3" name="Notes Placeholder 2"/>
+          <p:cNvSpPr>
+            <a:spLocks noGrp="1"/>
+          </p:cNvSpPr>
+          <p:nvPr>
+            <p:ph type="body" idx="3" sz="quarter"/>
+          </p:nvPr>
+        </p:nvSpPr>
+        <p:spPr/>
+        <p:txBody>
+          <a:bodyPr/>
+          <a:lstStyle/>
+          <a:p>
+            <a:r>
+              <a:t>【第12页 · 约 50 秒】谢谢 + 给链接（仓库 tag v0.3.0 / 镜像 / 文档站）。留一句钩子：『发布链路的流式改造和测试体系是这次迭代最重的两块，评委老师想先听哪块？』</a:t>
+            </a:r>
+          </a:p>
+        </p:txBody>
+      </p:sp>
+      <p:sp>
+        <p:nvSpPr>
+          <p:cNvPr id="4" name="Slide Number Placeholder 3"/>
+          <p:cNvSpPr>
+            <a:spLocks noGrp="1"/>
+          </p:cNvSpPr>
+          <p:nvPr>
+            <p:ph type="sldNum" idx="5" sz="quarter"/>
+          </p:nvPr>
+        </p:nvSpPr>
+        <p:spPr/>
+      </p:sp>
+    </p:spTree>
+  </p:cSld>
+  <p:clrMapOvr>
+    <a:masterClrMapping/>
+  </p:clrMapOvr>
+</p:notes>
+</file>
+
+<file path=ppt/notesSlides/notesSlide2.xml><?xml version="1.0" encoding="utf-8"?>
+<p:notes xmlns:a="http://schemas.openxmlformats.org/drawingml/2006/main" xmlns:p="http://schemas.openxmlformats.org/presentationml/2006/main" xmlns:r="http://schemas.openxmlformats.org/officeDocument/2006/relationships">
+  <p:cSld>
+    <p:spTree>
+      <p:nvGrpSpPr>
+        <p:cNvPr id="1" name=""/>
+        <p:cNvGrpSpPr/>
+        <p:nvPr/>
+      </p:nvGrpSpPr>
+      <p:grpSpPr>
+        <a:xfrm>
+          <a:off x="0" y="0"/>
+          <a:ext cx="0" cy="0"/>
+          <a:chOff x="0" y="0"/>
+          <a:chExt cx="0" cy="0"/>
+        </a:xfrm>
+      </p:grpSpPr>
+      <p:sp>
+        <p:nvSpPr>
+          <p:cNvPr id="2" name="Slide Image Placeholder 1"/>
+          <p:cNvSpPr>
+            <a:spLocks noGrp="1"/>
+          </p:cNvSpPr>
+          <p:nvPr>
+            <p:ph type="sldImg" idx="2"/>
+          </p:nvPr>
+        </p:nvSpPr>
+        <p:spPr/>
+      </p:sp>
+      <p:sp>
+        <p:nvSpPr>
+          <p:cNvPr id="3" name="Notes Placeholder 2"/>
+          <p:cNvSpPr>
+            <a:spLocks noGrp="1"/>
+          </p:cNvSpPr>
+          <p:nvPr>
+            <p:ph type="body" idx="3" sz="quarter"/>
+          </p:nvPr>
+        </p:nvSpPr>
+        <p:spPr/>
+        <p:txBody>
+          <a:bodyPr/>
+          <a:lstStyle/>
+          <a:p>
+            <a:r>
+              <a:t>【第2页 · 约 60 秒】三条各说一句就够：内网没仓、发布不可逆+同步不可控、团队要自己的预演位。落点：不是替代官方仓，是补位，协议完全互通。</a:t>
+            </a:r>
+          </a:p>
+        </p:txBody>
+      </p:sp>
+      <p:sp>
+        <p:nvSpPr>
+          <p:cNvPr id="4" name="Slide Number Placeholder 3"/>
+          <p:cNvSpPr>
+            <a:spLocks noGrp="1"/>
+          </p:cNvSpPr>
+          <p:nvPr>
+            <p:ph type="sldNum" idx="5" sz="quarter"/>
+          </p:nvPr>
+        </p:nvSpPr>
+        <p:spPr/>
+      </p:sp>
+    </p:spTree>
+  </p:cSld>
+  <p:clrMapOvr>
+    <a:masterClrMapping/>
+  </p:clrMapOvr>
+</p:notes>
+</file>
+
+<file path=ppt/notesSlides/notesSlide3.xml><?xml version="1.0" encoding="utf-8"?>
+<p:notes xmlns:a="http://schemas.openxmlformats.org/drawingml/2006/main" xmlns:p="http://schemas.openxmlformats.org/presentationml/2006/main" xmlns:r="http://schemas.openxmlformats.org/officeDocument/2006/relationships">
+  <p:cSld>
+    <p:spTree>
+      <p:nvGrpSpPr>
+        <p:cNvPr id="1" name=""/>
+        <p:cNvGrpSpPr/>
+        <p:nvPr/>
+      </p:nvGrpSpPr>
+      <p:grpSpPr>
+        <a:xfrm>
+          <a:off x="0" y="0"/>
+          <a:ext cx="0" cy="0"/>
+          <a:chOff x="0" y="0"/>
+          <a:chExt cx="0" cy="0"/>
+        </a:xfrm>
+      </p:grpSpPr>
+      <p:sp>
+        <p:nvSpPr>
+          <p:cNvPr id="2" name="Slide Image Placeholder 1"/>
+          <p:cNvSpPr>
+            <a:spLocks noGrp="1"/>
+          </p:cNvSpPr>
+          <p:nvPr>
+            <p:ph type="sldImg" idx="2"/>
+          </p:nvPr>
+        </p:nvSpPr>
+        <p:spPr/>
+      </p:sp>
+      <p:sp>
+        <p:nvSpPr>
+          <p:cNvPr id="3" name="Notes Placeholder 2"/>
+          <p:cNvSpPr>
+            <a:spLocks noGrp="1"/>
+          </p:cNvSpPr>
+          <p:nvPr>
+            <p:ph type="body" idx="3" sz="quarter"/>
+          </p:nvPr>
+        </p:nvSpPr>
+        <p:spPr/>
+        <p:txBody>
+          <a:bodyPr/>
+          <a:lstStyle/>
+          <a:p>
+            <a:r>
+              <a:t>【第3页 · 约 60 秒】不要逐行念表格。挑三件讲：发布（协议互通+流式）、多仓（回源+解析诊断）、发布计划（拓扑推送+实时进度）。其余一句『都在同一个仓里』带过。</a:t>
+            </a:r>
+          </a:p>
+        </p:txBody>
+      </p:sp>
+      <p:sp>
+        <p:nvSpPr>
+          <p:cNvPr id="4" name="Slide Number Placeholder 3"/>
+          <p:cNvSpPr>
+            <a:spLocks noGrp="1"/>
+          </p:cNvSpPr>
+          <p:nvPr>
+            <p:ph type="sldNum" idx="5" sz="quarter"/>
+          </p:nvPr>
+        </p:nvSpPr>
+        <p:spPr/>
+      </p:sp>
+    </p:spTree>
+  </p:cSld>
+  <p:clrMapOvr>
+    <a:masterClrMapping/>
+  </p:clrMapOvr>
+</p:notes>
+</file>
+
+<file path=ppt/notesSlides/notesSlide4.xml><?xml version="1.0" encoding="utf-8"?>
+<p:notes xmlns:a="http://schemas.openxmlformats.org/drawingml/2006/main" xmlns:p="http://schemas.openxmlformats.org/presentationml/2006/main" xmlns:r="http://schemas.openxmlformats.org/officeDocument/2006/relationships">
+  <p:cSld>
+    <p:spTree>
+      <p:nvGrpSpPr>
+        <p:cNvPr id="1" name=""/>
+        <p:cNvGrpSpPr/>
+        <p:nvPr/>
+      </p:nvGrpSpPr>
+      <p:grpSpPr>
+        <a:xfrm>
+          <a:off x="0" y="0"/>
+          <a:ext cx="0" cy="0"/>
+          <a:chOff x="0" y="0"/>
+          <a:chExt cx="0" cy="0"/>
+        </a:xfrm>
+      </p:grpSpPr>
+      <p:sp>
+        <p:nvSpPr>
+          <p:cNvPr id="2" name="Slide Image Placeholder 1"/>
+          <p:cNvSpPr>
+            <a:spLocks noGrp="1"/>
+          </p:cNvSpPr>
+          <p:nvPr>
+            <p:ph type="sldImg" idx="2"/>
+          </p:nvPr>
+        </p:nvSpPr>
+        <p:spPr/>
+      </p:sp>
+      <p:sp>
+        <p:nvSpPr>
+          <p:cNvPr id="3" name="Notes Placeholder 2"/>
+          <p:cNvSpPr>
+            <a:spLocks noGrp="1"/>
+          </p:cNvSpPr>
+          <p:nvPr>
+            <p:ph type="body" idx="3" sz="quarter"/>
+          </p:nvPr>
+        </p:nvSpPr>
+        <p:spPr/>
+        <p:txBody>
+          <a:bodyPr/>
+          <a:lstStyle/>
+          <a:p>
+            <a:r>
+              <a:t>【第4页 · 约 50 秒】分两列讲：左边是分层（protocol/index/store/server/ui），右边是取舍。必讲的一句：『发布链路全程流式，这是决赛最大的改造』。</a:t>
+            </a:r>
+          </a:p>
+        </p:txBody>
+      </p:sp>
+      <p:sp>
+        <p:nvSpPr>
+          <p:cNvPr id="4" name="Slide Number Placeholder 3"/>
+          <p:cNvSpPr>
+            <a:spLocks noGrp="1"/>
+          </p:cNvSpPr>
+          <p:nvPr>
+            <p:ph type="sldNum" idx="5" sz="quarter"/>
+          </p:nvPr>
+        </p:nvSpPr>
+        <p:spPr/>
+      </p:sp>
+    </p:spTree>
+  </p:cSld>
+  <p:clrMapOvr>
+    <a:masterClrMapping/>
+  </p:clrMapOvr>
+</p:notes>
+</file>
+
+<file path=ppt/notesSlides/notesSlide5.xml><?xml version="1.0" encoding="utf-8"?>
+<p:notes xmlns:a="http://schemas.openxmlformats.org/drawingml/2006/main" xmlns:p="http://schemas.openxmlformats.org/presentationml/2006/main" xmlns:r="http://schemas.openxmlformats.org/officeDocument/2006/relationships">
+  <p:cSld>
+    <p:spTree>
+      <p:nvGrpSpPr>
+        <p:cNvPr id="1" name=""/>
+        <p:cNvGrpSpPr/>
+        <p:nvPr/>
+      </p:nvGrpSpPr>
+      <p:grpSpPr>
+        <a:xfrm>
+          <a:off x="0" y="0"/>
+          <a:ext cx="0" cy="0"/>
+          <a:chOff x="0" y="0"/>
+          <a:chExt cx="0" cy="0"/>
+        </a:xfrm>
+      </p:grpSpPr>
+      <p:sp>
+        <p:nvSpPr>
+          <p:cNvPr id="2" name="Slide Image Placeholder 1"/>
+          <p:cNvSpPr>
+            <a:spLocks noGrp="1"/>
+          </p:cNvSpPr>
+          <p:nvPr>
+            <p:ph type="sldImg" idx="2"/>
+          </p:nvPr>
+        </p:nvSpPr>
+        <p:spPr/>
+      </p:sp>
+      <p:sp>
+        <p:nvSpPr>
+          <p:cNvPr id="3" name="Notes Placeholder 2"/>
+          <p:cNvSpPr>
+            <a:spLocks noGrp="1"/>
+          </p:cNvSpPr>
+          <p:nvPr>
+            <p:ph type="body" idx="3" sz="quarter"/>
+          </p:nvPr>
+        </p:nvSpPr>
+        <p:spPr/>
+        <p:txBody>
+          <a:bodyPr/>
+          <a:lstStyle/>
+          <a:p>
+            <a:r>
+              <a:t>【第5页 · 约 70 秒】先给对比表里最刺眼的一行：200 MiB 从失败到 0.618 秒、内存恒定 291 MiB。再用三句话说做法：边读边算 sha256、写临时文件、rename 原子落盘。最后说复现方式（bench.sh）。</a:t>
+            </a:r>
+          </a:p>
+        </p:txBody>
+      </p:sp>
+      <p:sp>
+        <p:nvSpPr>
+          <p:cNvPr id="4" name="Slide Number Placeholder 3"/>
+          <p:cNvSpPr>
+            <a:spLocks noGrp="1"/>
+          </p:cNvSpPr>
+          <p:nvPr>
+            <p:ph type="sldNum" idx="5" sz="quarter"/>
+          </p:nvPr>
+        </p:nvSpPr>
+        <p:spPr/>
+      </p:sp>
+    </p:spTree>
+  </p:cSld>
+  <p:clrMapOvr>
+    <a:masterClrMapping/>
+  </p:clrMapOvr>
+</p:notes>
+</file>
+
+<file path=ppt/notesSlides/notesSlide6.xml><?xml version="1.0" encoding="utf-8"?>
+<p:notes xmlns:a="http://schemas.openxmlformats.org/drawingml/2006/main" xmlns:p="http://schemas.openxmlformats.org/presentationml/2006/main" xmlns:r="http://schemas.openxmlformats.org/officeDocument/2006/relationships">
+  <p:cSld>
+    <p:spTree>
+      <p:nvGrpSpPr>
+        <p:cNvPr id="1" name=""/>
+        <p:cNvGrpSpPr/>
+        <p:nvPr/>
+      </p:nvGrpSpPr>
+      <p:grpSpPr>
+        <a:xfrm>
+          <a:off x="0" y="0"/>
+          <a:ext cx="0" cy="0"/>
+          <a:chOff x="0" y="0"/>
+          <a:chExt cx="0" cy="0"/>
+        </a:xfrm>
+      </p:grpSpPr>
+      <p:sp>
+        <p:nvSpPr>
+          <p:cNvPr id="2" name="Slide Image Placeholder 1"/>
+          <p:cNvSpPr>
+            <a:spLocks noGrp="1"/>
+          </p:cNvSpPr>
+          <p:nvPr>
+            <p:ph type="sldImg" idx="2"/>
+          </p:nvPr>
+        </p:nvSpPr>
+        <p:spPr/>
+      </p:sp>
+      <p:sp>
+        <p:nvSpPr>
+          <p:cNvPr id="3" name="Notes Placeholder 2"/>
+          <p:cNvSpPr>
+            <a:spLocks noGrp="1"/>
+          </p:cNvSpPr>
+          <p:nvPr>
+            <p:ph type="body" idx="3" sz="quarter"/>
+          </p:nvPr>
+        </p:nvSpPr>
+        <p:spPr/>
+        <p:txBody>
+          <a:bodyPr/>
+          <a:lstStyle/>
+          <a:p>
+            <a:r>
+              <a:t>【第6页 · 约 40 秒】讲矩阵的两端：owner 能发新版本但不能覆盖；管理员直通 overwrite（预演必需）。退出团队即不可见是**有意的产品决策**，不是缺陷。</a:t>
+            </a:r>
+          </a:p>
+        </p:txBody>
+      </p:sp>
+      <p:sp>
+        <p:nvSpPr>
+          <p:cNvPr id="4" name="Slide Number Placeholder 3"/>
+          <p:cNvSpPr>
+            <a:spLocks noGrp="1"/>
+          </p:cNvSpPr>
+          <p:nvPr>
+            <p:ph type="sldNum" idx="5" sz="quarter"/>
+          </p:nvPr>
+        </p:nvSpPr>
+        <p:spPr/>
+      </p:sp>
+    </p:spTree>
+  </p:cSld>
+  <p:clrMapOvr>
+    <a:masterClrMapping/>
+  </p:clrMapOvr>
+</p:notes>
+</file>
+
+<file path=ppt/notesSlides/notesSlide7.xml><?xml version="1.0" encoding="utf-8"?>
+<p:notes xmlns:a="http://schemas.openxmlformats.org/drawingml/2006/main" xmlns:p="http://schemas.openxmlformats.org/presentationml/2006/main" xmlns:r="http://schemas.openxmlformats.org/officeDocument/2006/relationships">
+  <p:cSld>
+    <p:spTree>
+      <p:nvGrpSpPr>
+        <p:cNvPr id="1" name=""/>
+        <p:cNvGrpSpPr/>
+        <p:nvPr/>
+      </p:nvGrpSpPr>
+      <p:grpSpPr>
+        <a:xfrm>
+          <a:off x="0" y="0"/>
+          <a:ext cx="0" cy="0"/>
+          <a:chOff x="0" y="0"/>
+          <a:chExt cx="0" cy="0"/>
+        </a:xfrm>
+      </p:grpSpPr>
+      <p:sp>
+        <p:nvSpPr>
+          <p:cNvPr id="2" name="Slide Image Placeholder 1"/>
+          <p:cNvSpPr>
+            <a:spLocks noGrp="1"/>
+          </p:cNvSpPr>
+          <p:nvPr>
+            <p:ph type="sldImg" idx="2"/>
+          </p:nvPr>
+        </p:nvSpPr>
+        <p:spPr/>
+      </p:sp>
+      <p:sp>
+        <p:nvSpPr>
+          <p:cNvPr id="3" name="Notes Placeholder 2"/>
+          <p:cNvSpPr>
+            <a:spLocks noGrp="1"/>
+          </p:cNvSpPr>
+          <p:nvPr>
+            <p:ph type="body" idx="3" sz="quarter"/>
+          </p:nvPr>
+        </p:nvSpPr>
+        <p:spPr/>
+        <p:txBody>
+          <a:bodyPr/>
+          <a:lstStyle/>
+          <a:p>
+            <a:r>
+              <a:t>【第7页 · 约 50 秒】一句话说为什么需要：发布不可逆，所以『发没发成功』必须可见可核验。判据要点：版本出现且 sha256 一致才算完成，避免索引先到的假完成。</a:t>
+            </a:r>
+          </a:p>
+        </p:txBody>
+      </p:sp>
+      <p:sp>
+        <p:nvSpPr>
+          <p:cNvPr id="4" name="Slide Number Placeholder 3"/>
+          <p:cNvSpPr>
+            <a:spLocks noGrp="1"/>
+          </p:cNvSpPr>
+          <p:nvPr>
+            <p:ph type="sldNum" idx="5" sz="quarter"/>
+          </p:nvPr>
+        </p:nvSpPr>
+        <p:spPr/>
+      </p:sp>
+    </p:spTree>
+  </p:cSld>
+  <p:clrMapOvr>
+    <a:masterClrMapping/>
+  </p:clrMapOvr>
+</p:notes>
+</file>
+
+<file path=ppt/notesSlides/notesSlide8.xml><?xml version="1.0" encoding="utf-8"?>
+<p:notes xmlns:a="http://schemas.openxmlformats.org/drawingml/2006/main" xmlns:p="http://schemas.openxmlformats.org/presentationml/2006/main" xmlns:r="http://schemas.openxmlformats.org/officeDocument/2006/relationships">
+  <p:cSld>
+    <p:spTree>
+      <p:nvGrpSpPr>
+        <p:cNvPr id="1" name=""/>
+        <p:cNvGrpSpPr/>
+        <p:nvPr/>
+      </p:nvGrpSpPr>
+      <p:grpSpPr>
+        <a:xfrm>
+          <a:off x="0" y="0"/>
+          <a:ext cx="0" cy="0"/>
+          <a:chOff x="0" y="0"/>
+          <a:chExt cx="0" cy="0"/>
+        </a:xfrm>
+      </p:grpSpPr>
+      <p:sp>
+        <p:nvSpPr>
+          <p:cNvPr id="2" name="Slide Image Placeholder 1"/>
+          <p:cNvSpPr>
+            <a:spLocks noGrp="1"/>
+          </p:cNvSpPr>
+          <p:nvPr>
+            <p:ph type="sldImg" idx="2"/>
+          </p:nvPr>
+        </p:nvSpPr>
+        <p:spPr/>
+      </p:sp>
+      <p:sp>
+        <p:nvSpPr>
+          <p:cNvPr id="3" name="Notes Placeholder 2"/>
+          <p:cNvSpPr>
+            <a:spLocks noGrp="1"/>
+          </p:cNvSpPr>
+          <p:nvPr>
+            <p:ph type="body" idx="3" sz="quarter"/>
+          </p:nvPr>
+        </p:nvSpPr>
+        <p:spPr/>
+        <p:txBody>
+          <a:bodyPr/>
+          <a:lstStyle/>
+          <a:p>
+            <a:r>
+              <a:t>【第8页 · 约 60 秒】只念五个数字：154→1002、39.3%→91.3%、六态+SSE、owner 自助、自包含构建。每个数字都能在仓库里找到脚本和报告。</a:t>
+            </a:r>
+          </a:p>
+        </p:txBody>
+      </p:sp>
+      <p:sp>
+        <p:nvSpPr>
+          <p:cNvPr id="4" name="Slide Number Placeholder 3"/>
+          <p:cNvSpPr>
+            <a:spLocks noGrp="1"/>
+          </p:cNvSpPr>
+          <p:nvPr>
+            <p:ph type="sldNum" idx="5" sz="quarter"/>
+          </p:nvPr>
+        </p:nvSpPr>
+        <p:spPr/>
+      </p:sp>
+    </p:spTree>
+  </p:cSld>
+  <p:clrMapOvr>
+    <a:masterClrMapping/>
+  </p:clrMapOvr>
+</p:notes>
+</file>
+
+<file path=ppt/notesSlides/notesSlide9.xml><?xml version="1.0" encoding="utf-8"?>
+<p:notes xmlns:a="http://schemas.openxmlformats.org/drawingml/2006/main" xmlns:p="http://schemas.openxmlformats.org/presentationml/2006/main" xmlns:r="http://schemas.openxmlformats.org/officeDocument/2006/relationships">
+  <p:cSld>
+    <p:spTree>
+      <p:nvGrpSpPr>
+        <p:cNvPr id="1" name=""/>
+        <p:cNvGrpSpPr/>
+        <p:nvPr/>
+      </p:nvGrpSpPr>
+      <p:grpSpPr>
+        <a:xfrm>
+          <a:off x="0" y="0"/>
+          <a:ext cx="0" cy="0"/>
+          <a:chOff x="0" y="0"/>
+          <a:chExt cx="0" cy="0"/>
+        </a:xfrm>
+      </p:grpSpPr>
+      <p:sp>
+        <p:nvSpPr>
+          <p:cNvPr id="2" name="Slide Image Placeholder 1"/>
+          <p:cNvSpPr>
+            <a:spLocks noGrp="1"/>
+          </p:cNvSpPr>
+          <p:nvPr>
+            <p:ph type="sldImg" idx="2"/>
+          </p:nvPr>
+        </p:nvSpPr>
+        <p:spPr/>
+      </p:sp>
+      <p:sp>
+        <p:nvSpPr>
+          <p:cNvPr id="3" name="Notes Placeholder 2"/>
+          <p:cNvSpPr>
+            <a:spLocks noGrp="1"/>
+          </p:cNvSpPr>
+          <p:nvPr>
+            <p:ph type="body" idx="3" sz="quarter"/>
+          </p:nvPr>
+        </p:nvSpPr>
+        <p:spPr/>
+        <p:txBody>
+          <a:bodyPr/>
+          <a:lstStyle/>
+          <a:p>
+            <a:r>
+              <a:t>【第9页 · 约 40 秒】左列说『测试怎么组织』（逻辑单测 + 进程内 HTTP 夹具 + 页面渲染），右列只念两个数字：索引 5.9×、并发拐点 16 VU / 414 req/s。</a:t>
+            </a:r>
+          </a:p>
+        </p:txBody>
+      </p:sp>
+      <p:sp>
+        <p:nvSpPr>
+          <p:cNvPr id="4" name="Slide Number Placeholder 3"/>
+          <p:cNvSpPr>
+            <a:spLocks noGrp="1"/>
+          </p:cNvSpPr>
+          <p:nvPr>
+            <p:ph type="sldNum" idx="5" sz="quarter"/>
+          </p:nvPr>
+        </p:nvSpPr>
+        <p:spPr/>
+      </p:sp>
+    </p:spTree>
+  </p:cSld>
+  <p:clrMapOvr>
+    <a:masterClrMapping/>
+  </p:clrMapOvr>
+</p:notes>
 </file>
 
 <file path=ppt/slideLayouts/slideLayout1.xml><?xml version="1.0" encoding="utf-8"?>
@@ -7890,4 +9080,324 @@
   </a:objectDefaults>
   <a:extraClrSchemeLst/>
 </a:theme>
+</file>
+
+<file path=ppt/theme/theme2.xml><?xml version="1.0" encoding="utf-8"?>
+<a:theme xmlns:a="http://schemas.openxmlformats.org/drawingml/2006/main" name="Office Theme">
+  <a:themeElements>
+    <a:clrScheme name="Office">
+      <a:dk1>
+        <a:sysClr val="windowText" lastClr="000000"/>
+      </a:dk1>
+      <a:lt1>
+        <a:sysClr val="window" lastClr="FFFFFF"/>
+      </a:lt1>
+      <a:dk2>
+        <a:srgbClr val="1F497D"/>
+      </a:dk2>
+      <a:lt2>
+        <a:srgbClr val="EEECE1"/>
+      </a:lt2>
+      <a:accent1>
+        <a:srgbClr val="4F81BD"/>
+      </a:accent1>
+      <a:accent2>
+        <a:srgbClr val="C0504D"/>
+      </a:accent2>
+      <a:accent3>
+        <a:srgbClr val="9BBB59"/>
+      </a:accent3>
+      <a:accent4>
+        <a:srgbClr val="8064A2"/>
+      </a:accent4>
+      <a:accent5>
+        <a:srgbClr val="4BACC6"/>
+      </a:accent5>
+      <a:accent6>
+        <a:srgbClr val="F79646"/>
+      </a:accent6>
+      <a:hlink>
+        <a:srgbClr val="0000FF"/>
+      </a:hlink>
+      <a:folHlink>
+        <a:srgbClr val="800080"/>
+      </a:folHlink>
+    </a:clrScheme>
+    <a:fontScheme name="Office">
+      <a:majorFont>
+        <a:latin typeface="Calibri"/>
+        <a:ea typeface=""/>
+        <a:cs typeface=""/>
+        <a:font script="Jpan" typeface="ＭＳ Ｐゴシック"/>
+        <a:font script="Hang" typeface="맑은 고딕"/>
+        <a:font script="Hans" typeface="宋体"/>
+        <a:font script="Hant" typeface="新細明體"/>
+        <a:font script="Arab" typeface="Times New Roman"/>
+        <a:font script="Hebr" typeface="Times New Roman"/>
+        <a:font script="Thai" typeface="Angsana New"/>
+        <a:font script="Ethi" typeface="Nyala"/>
+        <a:font script="Beng" typeface="Vrinda"/>
+        <a:font script="Gujr" typeface="Shruti"/>
+        <a:font script="Khmr" typeface="MoolBoran"/>
+        <a:font script="Knda" typeface="Tunga"/>
+        <a:font script="Guru" typeface="Raavi"/>
+        <a:font script="Cans" typeface="Euphemia"/>
+        <a:font script="Cher" typeface="Plantagenet Cherokee"/>
+        <a:font script="Yiii" typeface="Microsoft Yi Baiti"/>
+        <a:font script="Tibt" typeface="Microsoft Himalaya"/>
+        <a:font script="Thaa" typeface="MV Boli"/>
+        <a:font script="Deva" typeface="Mangal"/>
+        <a:font script="Telu" typeface="Gautami"/>
+        <a:font script="Taml" typeface="Latha"/>
+        <a:font script="Syrc" typeface="Estrangelo Edessa"/>
+        <a:font script="Orya" typeface="Kalinga"/>
+        <a:font script="Mlym" typeface="Kartika"/>
+        <a:font script="Laoo" typeface="DokChampa"/>
+        <a:font script="Sinh" typeface="Iskoola Pota"/>
+        <a:font script="Mong" typeface="Mongolian Baiti"/>
+        <a:font script="Viet" typeface="Times New Roman"/>
+        <a:font script="Uigh" typeface="Microsoft Uighur"/>
+        <a:font script="Geor" typeface="Sylfaen"/>
+      </a:majorFont>
+      <a:minorFont>
+        <a:latin typeface="Calibri"/>
+        <a:ea typeface=""/>
+        <a:cs typeface=""/>
+        <a:font script="Jpan" typeface="ＭＳ Ｐゴシック"/>
+        <a:font script="Hang" typeface="맑은 고딕"/>
+        <a:font script="Hans" typeface="宋体"/>
+        <a:font script="Hant" typeface="新細明體"/>
+        <a:font script="Arab" typeface="Arial"/>
+        <a:font script="Hebr" typeface="Arial"/>
+        <a:font script="Thai" typeface="Cordia New"/>
+        <a:font script="Ethi" typeface="Nyala"/>
+        <a:font script="Beng" typeface="Vrinda"/>
+        <a:font script="Gujr" typeface="Shruti"/>
+        <a:font script="Khmr" typeface="DaunPenh"/>
+        <a:font script="Knda" typeface="Tunga"/>
+        <a:font script="Guru" typeface="Raavi"/>
+        <a:font script="Cans" typeface="Euphemia"/>
+        <a:font script="Cher" typeface="Plantagenet Cherokee"/>
+        <a:font script="Yiii" typeface="Microsoft Yi Baiti"/>
+        <a:font script="Tibt" typeface="Microsoft Himalaya"/>
+        <a:font script="Thaa" typeface="MV Boli"/>
+        <a:font script="Deva" typeface="Mangal"/>
+        <a:font script="Telu" typeface="Gautami"/>
+        <a:font script="Taml" typeface="Latha"/>
+        <a:font script="Syrc" typeface="Estrangelo Edessa"/>
+        <a:font script="Orya" typeface="Kalinga"/>
+        <a:font script="Mlym" typeface="Kartika"/>
+        <a:font script="Laoo" typeface="DokChampa"/>
+        <a:font script="Sinh" typeface="Iskoola Pota"/>
+        <a:font script="Mong" typeface="Mongolian Baiti"/>
+        <a:font script="Viet" typeface="Arial"/>
+        <a:font script="Uigh" typeface="Microsoft Uighur"/>
+        <a:font script="Geor" typeface="Sylfaen"/>
+      </a:minorFont>
+    </a:fontScheme>
+    <a:fmtScheme name="Office">
+      <a:fillStyleLst>
+        <a:solidFill>
+          <a:schemeClr val="phClr"/>
+        </a:solidFill>
+        <a:gradFill rotWithShape="1">
+          <a:gsLst>
+            <a:gs pos="0">
+              <a:schemeClr val="phClr">
+                <a:tint val="50000"/>
+                <a:satMod val="300000"/>
+              </a:schemeClr>
+            </a:gs>
+            <a:gs pos="35000">
+              <a:schemeClr val="phClr">
+                <a:tint val="37000"/>
+                <a:satMod val="300000"/>
+              </a:schemeClr>
+            </a:gs>
+            <a:gs pos="100000">
+              <a:schemeClr val="phClr">
+                <a:tint val="15000"/>
+                <a:satMod val="350000"/>
+              </a:schemeClr>
+            </a:gs>
+          </a:gsLst>
+          <a:lin ang="16200000" scaled="1"/>
+        </a:gradFill>
+        <a:gradFill rotWithShape="1">
+          <a:gsLst>
+            <a:gs pos="0">
+              <a:schemeClr val="phClr">
+                <a:tint val="100000"/>
+                <a:shade val="100000"/>
+                <a:satMod val="130000"/>
+              </a:schemeClr>
+            </a:gs>
+            <a:gs pos="100000">
+              <a:schemeClr val="phClr">
+                <a:tint val="50000"/>
+                <a:shade val="100000"/>
+                <a:satMod val="350000"/>
+              </a:schemeClr>
+            </a:gs>
+          </a:gsLst>
+          <a:lin ang="16200000" scaled="0"/>
+        </a:gradFill>
+      </a:fillStyleLst>
+      <a:lnStyleLst>
+        <a:ln w="9525" cap="flat" cmpd="sng" algn="ctr">
+          <a:solidFill>
+            <a:schemeClr val="phClr">
+              <a:shade val="95000"/>
+              <a:satMod val="105000"/>
+            </a:schemeClr>
+          </a:solidFill>
+          <a:prstDash val="solid"/>
+        </a:ln>
+        <a:ln w="25400" cap="flat" cmpd="sng" algn="ctr">
+          <a:solidFill>
+            <a:schemeClr val="phClr"/>
+          </a:solidFill>
+          <a:prstDash val="solid"/>
+        </a:ln>
+        <a:ln w="38100" cap="flat" cmpd="sng" algn="ctr">
+          <a:solidFill>
+            <a:schemeClr val="phClr"/>
+          </a:solidFill>
+          <a:prstDash val="solid"/>
+        </a:ln>
+      </a:lnStyleLst>
+      <a:effectStyleLst>
+        <a:effectStyle>
+          <a:effectLst>
+            <a:outerShdw blurRad="40000" dist="20000" dir="5400000" rotWithShape="0">
+              <a:srgbClr val="000000">
+                <a:alpha val="38000"/>
+              </a:srgbClr>
+            </a:outerShdw>
+          </a:effectLst>
+        </a:effectStyle>
+        <a:effectStyle>
+          <a:effectLst>
+            <a:outerShdw blurRad="40000" dist="23000" dir="5400000" rotWithShape="0">
+              <a:srgbClr val="000000">
+                <a:alpha val="35000"/>
+              </a:srgbClr>
+            </a:outerShdw>
+          </a:effectLst>
+        </a:effectStyle>
+        <a:effectStyle>
+          <a:effectLst>
+            <a:outerShdw blurRad="40000" dist="23000" dir="5400000" rotWithShape="0">
+              <a:srgbClr val="000000">
+                <a:alpha val="35000"/>
+              </a:srgbClr>
+            </a:outerShdw>
+          </a:effectLst>
+          <a:scene3d>
+            <a:camera prst="orthographicFront">
+              <a:rot lat="0" lon="0" rev="0"/>
+            </a:camera>
+            <a:lightRig rig="threePt" dir="t">
+              <a:rot lat="0" lon="0" rev="1200000"/>
+            </a:lightRig>
+          </a:scene3d>
+          <a:sp3d>
+            <a:bevelT w="63500" h="25400"/>
+          </a:sp3d>
+        </a:effectStyle>
+      </a:effectStyleLst>
+      <a:bgFillStyleLst>
+        <a:solidFill>
+          <a:schemeClr val="phClr"/>
+        </a:solidFill>
+        <a:gradFill rotWithShape="1">
+          <a:gsLst>
+            <a:gs pos="0">
+              <a:schemeClr val="phClr">
+                <a:tint val="40000"/>
+                <a:satMod val="350000"/>
+              </a:schemeClr>
+            </a:gs>
+            <a:gs pos="40000">
+              <a:schemeClr val="phClr">
+                <a:tint val="45000"/>
+                <a:shade val="99000"/>
+                <a:satMod val="350000"/>
+              </a:schemeClr>
+            </a:gs>
+            <a:gs pos="100000">
+              <a:schemeClr val="phClr">
+                <a:shade val="20000"/>
+                <a:satMod val="255000"/>
+              </a:schemeClr>
+            </a:gs>
+          </a:gsLst>
+          <a:path path="circle">
+            <a:fillToRect l="50000" t="-80000" r="50000" b="180000"/>
+          </a:path>
+        </a:gradFill>
+        <a:gradFill rotWithShape="1">
+          <a:gsLst>
+            <a:gs pos="0">
+              <a:schemeClr val="phClr">
+                <a:tint val="80000"/>
+                <a:satMod val="300000"/>
+              </a:schemeClr>
+            </a:gs>
+            <a:gs pos="100000">
+              <a:schemeClr val="phClr">
+                <a:shade val="30000"/>
+                <a:satMod val="200000"/>
+              </a:schemeClr>
+            </a:gs>
+          </a:gsLst>
+          <a:path path="circle">
+            <a:fillToRect l="50000" t="50000" r="50000" b="50000"/>
+          </a:path>
+        </a:gradFill>
+      </a:bgFillStyleLst>
+    </a:fmtScheme>
+  </a:themeElements>
+  <a:objectDefaults>
+    <a:spDef>
+      <a:spPr/>
+      <a:bodyPr/>
+      <a:lstStyle/>
+      <a:style>
+        <a:lnRef idx="1">
+          <a:schemeClr val="accent1"/>
+        </a:lnRef>
+        <a:fillRef idx="3">
+          <a:schemeClr val="accent1"/>
+        </a:fillRef>
+        <a:effectRef idx="2">
+          <a:schemeClr val="accent1"/>
+        </a:effectRef>
+        <a:fontRef idx="minor">
+          <a:schemeClr val="lt1"/>
+        </a:fontRef>
+      </a:style>
+    </a:spDef>
+    <a:lnDef>
+      <a:spPr/>
+      <a:bodyPr/>
+      <a:lstStyle/>
+      <a:style>
+        <a:lnRef idx="2">
+          <a:schemeClr val="accent1"/>
+        </a:lnRef>
+        <a:fillRef idx="0">
+          <a:schemeClr val="accent1"/>
+        </a:fillRef>
+        <a:effectRef idx="1">
+          <a:schemeClr val="accent1"/>
+        </a:effectRef>
+        <a:fontRef idx="minor">
+          <a:schemeClr val="tx1"/>
+        </a:fontRef>
+      </a:style>
+    </a:lnDef>
+  </a:objectDefaults>
+  <a:extraClrSchemeLst/>
+</a:theme>
 </file>
--- a/docs/finals-roadshow-v0.3.0.pptx
+++ b/docs/finals-roadshow-v0.3.0.pptx
@@ -6266,7 +6266,7 @@
                   <a:srgbClr val="5A6370"/>
                 </a:solidFill>
               </a:rPr>
-              <a:t>纯仓颉实现，静态单二进制；依赖 bstorm（KV）、cjxt（UI/WS）、tang（HTTP）</a:t>
+              <a:t>纯仓颉实现 · 静态单二进制 · 依赖 bstorm（KV）/ cjxt（UI+WS）/ tang（HTTP）</a:t>
             </a:r>
           </a:p>
         </p:txBody>
@@ -6279,8 +6279,8 @@
         </p:nvSpPr>
         <p:spPr>
           <a:xfrm>
-            <a:off x="640080" y="1600200"/>
-            <a:ext cx="5486400" cy="4389120"/>
+            <a:off x="502920" y="1417320"/>
+            <a:ext cx="6766560" cy="310896"/>
           </a:xfrm>
           <a:prstGeom prst="rect">
             <a:avLst/>
@@ -6293,107 +6293,130 @@
           </a:bodyPr>
           <a:lstStyle/>
           <a:p>
-            <a:pPr>
-              <a:spcAft>
-                <a:spcPts val="1000"/>
-              </a:spcAft>
-            </a:pPr>
-            <a:r>
-              <a:rPr sz="1600">
+            <a:pPr algn="l"/>
+            <a:r>
+              <a:rPr sz="1300" b="1">
                 <a:solidFill>
-                  <a:srgbClr val="1A202C"/>
+                  <a:srgbClr val="5A6370"/>
                 </a:solidFill>
               </a:rPr>
-              <a:t>protocol —— 官方发布/下载二进制协议、URL 分片</a:t>
-            </a:r>
-          </a:p>
-          <a:p>
-            <a:pPr>
-              <a:spcAft>
-                <a:spcPts val="1000"/>
-              </a:spcAft>
-            </a:pPr>
-            <a:r>
-              <a:rPr sz="1600">
+              <a:t>分层（自顶向下）</a:t>
+            </a:r>
+          </a:p>
+        </p:txBody>
+      </p:sp>
+      <p:sp>
+        <p:nvSpPr>
+          <p:cNvPr id="6" name="Rounded Rectangle 5"/>
+          <p:cNvSpPr/>
+          <p:nvPr/>
+        </p:nvSpPr>
+        <p:spPr>
+          <a:xfrm>
+            <a:off x="502920" y="1783080"/>
+            <a:ext cx="6766560" cy="676656"/>
+          </a:xfrm>
+          <a:prstGeom prst="roundRect">
+            <a:avLst>
+              <a:gd name="adj" fmla="val 8000"/>
+            </a:avLst>
+          </a:prstGeom>
+          <a:solidFill>
+            <a:srgbClr val="F2F5F9"/>
+          </a:solidFill>
+          <a:ln w="9525">
+            <a:solidFill>
+              <a:srgbClr val="D5DEE8"/>
+            </a:solidFill>
+          </a:ln>
+          <a:effectLst/>
+        </p:spPr>
+        <p:style>
+          <a:lnRef idx="1">
+            <a:schemeClr val="accent1"/>
+          </a:lnRef>
+          <a:fillRef idx="3">
+            <a:schemeClr val="accent1"/>
+          </a:fillRef>
+          <a:effectRef idx="2">
+            <a:schemeClr val="accent1"/>
+          </a:effectRef>
+          <a:fontRef idx="minor">
+            <a:schemeClr val="lt1"/>
+          </a:fontRef>
+        </p:style>
+        <p:txBody>
+          <a:bodyPr rtlCol="0" anchor="ctr"/>
+          <a:lstStyle/>
+          <a:p>
+            <a:pPr algn="ctr"/>
+          </a:p>
+        </p:txBody>
+      </p:sp>
+      <p:sp>
+        <p:nvSpPr>
+          <p:cNvPr id="7" name="Rounded Rectangle 6"/>
+          <p:cNvSpPr/>
+          <p:nvPr/>
+        </p:nvSpPr>
+        <p:spPr>
+          <a:xfrm>
+            <a:off x="566928" y="1901952"/>
+            <a:ext cx="1051560" cy="438912"/>
+          </a:xfrm>
+          <a:prstGeom prst="roundRect">
+            <a:avLst>
+              <a:gd name="adj" fmla="val 8000"/>
+            </a:avLst>
+          </a:prstGeom>
+          <a:solidFill>
+            <a:srgbClr val="2B6CB0"/>
+          </a:solidFill>
+          <a:ln>
+            <a:noFill/>
+          </a:ln>
+          <a:effectLst/>
+        </p:spPr>
+        <p:style>
+          <a:lnRef idx="1">
+            <a:schemeClr val="accent1"/>
+          </a:lnRef>
+          <a:fillRef idx="3">
+            <a:schemeClr val="accent1"/>
+          </a:fillRef>
+          <a:effectRef idx="2">
+            <a:schemeClr val="accent1"/>
+          </a:effectRef>
+          <a:fontRef idx="minor">
+            <a:schemeClr val="lt1"/>
+          </a:fontRef>
+        </p:style>
+        <p:txBody>
+          <a:bodyPr rtlCol="0" anchor="ctr" wrap="square" lIns="109728" tIns="36576" bIns="36576"/>
+          <a:lstStyle/>
+          <a:p>
+            <a:pPr algn="ctr"/>
+            <a:r>
+              <a:rPr sz="1300" b="1">
                 <a:solidFill>
-                  <a:srgbClr val="1A202C"/>
+                  <a:srgbClr val="FFFFFF"/>
                 </a:solidFill>
               </a:rPr>
-              <a:t>index —— NDJSON 生成与兼容解析</a:t>
-            </a:r>
-          </a:p>
-          <a:p>
-            <a:pPr>
-              <a:spcAft>
-                <a:spcPts val="1000"/>
-              </a:spcAft>
-            </a:pPr>
-            <a:r>
-              <a:rPr sz="1600">
-                <a:solidFill>
-                  <a:srgbClr val="1A202C"/>
-                </a:solidFill>
-              </a:rPr>
-              <a:t>store —— bstorm 文档层（包/用户/上游/团队/审计）</a:t>
-            </a:r>
-          </a:p>
-          <a:p>
-            <a:pPr>
-              <a:spcAft>
-                <a:spcPts val="1000"/>
-              </a:spcAft>
-            </a:pPr>
-            <a:r>
-              <a:rPr sz="1600">
-                <a:solidFill>
-                  <a:srgbClr val="1A202C"/>
-                </a:solidFill>
-              </a:rPr>
-              <a:t>server —— 发布裁决、代理回源、计划执行、handler</a:t>
-            </a:r>
-          </a:p>
-          <a:p>
-            <a:pPr>
-              <a:spcAft>
-                <a:spcPts val="1000"/>
-              </a:spcAft>
-            </a:pPr>
-            <a:r>
-              <a:rPr sz="1600">
-                <a:solidFill>
-                  <a:srgbClr val="1A202C"/>
-                </a:solidFill>
-              </a:rPr>
-              <a:t>ui —— cjxt 页面（公共面 / 管理面分包子包）</a:t>
-            </a:r>
-          </a:p>
-          <a:p>
-            <a:pPr>
-              <a:spcAft>
-                <a:spcPts val="1000"/>
-              </a:spcAft>
-            </a:pPr>
-            <a:r>
-              <a:rPr sz="1600">
-                <a:solidFill>
-                  <a:srgbClr val="1A202C"/>
-                </a:solidFill>
-              </a:rPr>
-              <a:t>protocol 与 handler 之间全部走 DTO 序列化</a:t>
-            </a:r>
-          </a:p>
-        </p:txBody>
-      </p:sp>
-      <p:sp>
-        <p:nvSpPr>
-          <p:cNvPr id="6" name="TextBox 5"/>
+              <a:t>ui</a:t>
+            </a:r>
+          </a:p>
+        </p:txBody>
+      </p:sp>
+      <p:sp>
+        <p:nvSpPr>
+          <p:cNvPr id="8" name="TextBox 7"/>
           <p:cNvSpPr txBox="1"/>
           <p:nvPr/>
         </p:nvSpPr>
         <p:spPr>
           <a:xfrm>
-            <a:off x="6400800" y="1600200"/>
-            <a:ext cx="5120640" cy="4389120"/>
+            <a:off x="1737360" y="1929384"/>
+            <a:ext cx="5394960" cy="402336"/>
           </a:xfrm>
           <a:prstGeom prst="rect">
             <a:avLst/>
@@ -6406,63 +6429,892 @@
           </a:bodyPr>
           <a:lstStyle/>
           <a:p>
-            <a:pPr>
-              <a:spcAft>
-                <a:spcPts val="1000"/>
-              </a:spcAft>
-            </a:pPr>
-            <a:r>
-              <a:rPr sz="1600">
+            <a:pPr algn="l"/>
+            <a:r>
+              <a:rPr sz="1300" b="0">
+                <a:solidFill>
+                  <a:srgbClr val="1A202C"/>
+                </a:solidFill>
+              </a:rPr>
+              <a:t>cjxt 页面层 —— 公共面 / 管理面分子包</a:t>
+            </a:r>
+          </a:p>
+        </p:txBody>
+      </p:sp>
+      <p:sp>
+        <p:nvSpPr>
+          <p:cNvPr id="9" name="Rounded Rectangle 8"/>
+          <p:cNvSpPr/>
+          <p:nvPr/>
+        </p:nvSpPr>
+        <p:spPr>
+          <a:xfrm>
+            <a:off x="502920" y="2569464"/>
+            <a:ext cx="6766560" cy="676656"/>
+          </a:xfrm>
+          <a:prstGeom prst="roundRect">
+            <a:avLst>
+              <a:gd name="adj" fmla="val 8000"/>
+            </a:avLst>
+          </a:prstGeom>
+          <a:solidFill>
+            <a:srgbClr val="F2F5F9"/>
+          </a:solidFill>
+          <a:ln w="9525">
+            <a:solidFill>
+              <a:srgbClr val="D5DEE8"/>
+            </a:solidFill>
+          </a:ln>
+          <a:effectLst/>
+        </p:spPr>
+        <p:style>
+          <a:lnRef idx="1">
+            <a:schemeClr val="accent1"/>
+          </a:lnRef>
+          <a:fillRef idx="3">
+            <a:schemeClr val="accent1"/>
+          </a:fillRef>
+          <a:effectRef idx="2">
+            <a:schemeClr val="accent1"/>
+          </a:effectRef>
+          <a:fontRef idx="minor">
+            <a:schemeClr val="lt1"/>
+          </a:fontRef>
+        </p:style>
+        <p:txBody>
+          <a:bodyPr rtlCol="0" anchor="ctr"/>
+          <a:lstStyle/>
+          <a:p>
+            <a:pPr algn="ctr"/>
+          </a:p>
+        </p:txBody>
+      </p:sp>
+      <p:sp>
+        <p:nvSpPr>
+          <p:cNvPr id="10" name="Rounded Rectangle 9"/>
+          <p:cNvSpPr/>
+          <p:nvPr/>
+        </p:nvSpPr>
+        <p:spPr>
+          <a:xfrm>
+            <a:off x="566928" y="2688336"/>
+            <a:ext cx="1051560" cy="438912"/>
+          </a:xfrm>
+          <a:prstGeom prst="roundRect">
+            <a:avLst>
+              <a:gd name="adj" fmla="val 8000"/>
+            </a:avLst>
+          </a:prstGeom>
+          <a:solidFill>
+            <a:srgbClr val="2B6CB0"/>
+          </a:solidFill>
+          <a:ln>
+            <a:noFill/>
+          </a:ln>
+          <a:effectLst/>
+        </p:spPr>
+        <p:style>
+          <a:lnRef idx="1">
+            <a:schemeClr val="accent1"/>
+          </a:lnRef>
+          <a:fillRef idx="3">
+            <a:schemeClr val="accent1"/>
+          </a:fillRef>
+          <a:effectRef idx="2">
+            <a:schemeClr val="accent1"/>
+          </a:effectRef>
+          <a:fontRef idx="minor">
+            <a:schemeClr val="lt1"/>
+          </a:fontRef>
+        </p:style>
+        <p:txBody>
+          <a:bodyPr rtlCol="0" anchor="ctr" wrap="square" lIns="109728" tIns="36576" bIns="36576"/>
+          <a:lstStyle/>
+          <a:p>
+            <a:pPr algn="ctr"/>
+            <a:r>
+              <a:rPr sz="1300" b="1">
+                <a:solidFill>
+                  <a:srgbClr val="FFFFFF"/>
+                </a:solidFill>
+              </a:rPr>
+              <a:t>server</a:t>
+            </a:r>
+          </a:p>
+        </p:txBody>
+      </p:sp>
+      <p:sp>
+        <p:nvSpPr>
+          <p:cNvPr id="11" name="TextBox 10"/>
+          <p:cNvSpPr txBox="1"/>
+          <p:nvPr/>
+        </p:nvSpPr>
+        <p:spPr>
+          <a:xfrm>
+            <a:off x="1737360" y="2715768"/>
+            <a:ext cx="5394960" cy="402336"/>
+          </a:xfrm>
+          <a:prstGeom prst="rect">
+            <a:avLst/>
+          </a:prstGeom>
+          <a:noFill/>
+        </p:spPr>
+        <p:txBody>
+          <a:bodyPr wrap="square">
+            <a:spAutoFit/>
+          </a:bodyPr>
+          <a:lstStyle/>
+          <a:p>
+            <a:pPr algn="l"/>
+            <a:r>
+              <a:rPr sz="1300" b="0">
+                <a:solidFill>
+                  <a:srgbClr val="1A202C"/>
+                </a:solidFill>
+              </a:rPr>
+              <a:t>发布裁决 · 代理回源 · 计划执行 · handler</a:t>
+            </a:r>
+          </a:p>
+        </p:txBody>
+      </p:sp>
+      <p:sp>
+        <p:nvSpPr>
+          <p:cNvPr id="12" name="Rounded Rectangle 11"/>
+          <p:cNvSpPr/>
+          <p:nvPr/>
+        </p:nvSpPr>
+        <p:spPr>
+          <a:xfrm>
+            <a:off x="502920" y="3355848"/>
+            <a:ext cx="6766560" cy="676656"/>
+          </a:xfrm>
+          <a:prstGeom prst="roundRect">
+            <a:avLst>
+              <a:gd name="adj" fmla="val 8000"/>
+            </a:avLst>
+          </a:prstGeom>
+          <a:solidFill>
+            <a:srgbClr val="F2F5F9"/>
+          </a:solidFill>
+          <a:ln w="9525">
+            <a:solidFill>
+              <a:srgbClr val="D5DEE8"/>
+            </a:solidFill>
+          </a:ln>
+          <a:effectLst/>
+        </p:spPr>
+        <p:style>
+          <a:lnRef idx="1">
+            <a:schemeClr val="accent1"/>
+          </a:lnRef>
+          <a:fillRef idx="3">
+            <a:schemeClr val="accent1"/>
+          </a:fillRef>
+          <a:effectRef idx="2">
+            <a:schemeClr val="accent1"/>
+          </a:effectRef>
+          <a:fontRef idx="minor">
+            <a:schemeClr val="lt1"/>
+          </a:fontRef>
+        </p:style>
+        <p:txBody>
+          <a:bodyPr rtlCol="0" anchor="ctr"/>
+          <a:lstStyle/>
+          <a:p>
+            <a:pPr algn="ctr"/>
+          </a:p>
+        </p:txBody>
+      </p:sp>
+      <p:sp>
+        <p:nvSpPr>
+          <p:cNvPr id="13" name="Rounded Rectangle 12"/>
+          <p:cNvSpPr/>
+          <p:nvPr/>
+        </p:nvSpPr>
+        <p:spPr>
+          <a:xfrm>
+            <a:off x="566928" y="3474720"/>
+            <a:ext cx="1051560" cy="438912"/>
+          </a:xfrm>
+          <a:prstGeom prst="roundRect">
+            <a:avLst>
+              <a:gd name="adj" fmla="val 8000"/>
+            </a:avLst>
+          </a:prstGeom>
+          <a:solidFill>
+            <a:srgbClr val="2B6CB0"/>
+          </a:solidFill>
+          <a:ln>
+            <a:noFill/>
+          </a:ln>
+          <a:effectLst/>
+        </p:spPr>
+        <p:style>
+          <a:lnRef idx="1">
+            <a:schemeClr val="accent1"/>
+          </a:lnRef>
+          <a:fillRef idx="3">
+            <a:schemeClr val="accent1"/>
+          </a:fillRef>
+          <a:effectRef idx="2">
+            <a:schemeClr val="accent1"/>
+          </a:effectRef>
+          <a:fontRef idx="minor">
+            <a:schemeClr val="lt1"/>
+          </a:fontRef>
+        </p:style>
+        <p:txBody>
+          <a:bodyPr rtlCol="0" anchor="ctr" wrap="square" lIns="109728" tIns="36576" bIns="36576"/>
+          <a:lstStyle/>
+          <a:p>
+            <a:pPr algn="ctr"/>
+            <a:r>
+              <a:rPr sz="1300" b="1">
+                <a:solidFill>
+                  <a:srgbClr val="FFFFFF"/>
+                </a:solidFill>
+              </a:rPr>
+              <a:t>store</a:t>
+            </a:r>
+          </a:p>
+        </p:txBody>
+      </p:sp>
+      <p:sp>
+        <p:nvSpPr>
+          <p:cNvPr id="14" name="TextBox 13"/>
+          <p:cNvSpPr txBox="1"/>
+          <p:nvPr/>
+        </p:nvSpPr>
+        <p:spPr>
+          <a:xfrm>
+            <a:off x="1737360" y="3502152"/>
+            <a:ext cx="5394960" cy="402336"/>
+          </a:xfrm>
+          <a:prstGeom prst="rect">
+            <a:avLst/>
+          </a:prstGeom>
+          <a:noFill/>
+        </p:spPr>
+        <p:txBody>
+          <a:bodyPr wrap="square">
+            <a:spAutoFit/>
+          </a:bodyPr>
+          <a:lstStyle/>
+          <a:p>
+            <a:pPr algn="l"/>
+            <a:r>
+              <a:rPr sz="1300" b="0">
+                <a:solidFill>
+                  <a:srgbClr val="1A202C"/>
+                </a:solidFill>
+              </a:rPr>
+              <a:t>bstorm 文档层 —— 包 / 用户 / 上游 / 团队 / 审计</a:t>
+            </a:r>
+          </a:p>
+        </p:txBody>
+      </p:sp>
+      <p:sp>
+        <p:nvSpPr>
+          <p:cNvPr id="15" name="Rounded Rectangle 14"/>
+          <p:cNvSpPr/>
+          <p:nvPr/>
+        </p:nvSpPr>
+        <p:spPr>
+          <a:xfrm>
+            <a:off x="502920" y="4142232"/>
+            <a:ext cx="6766560" cy="676656"/>
+          </a:xfrm>
+          <a:prstGeom prst="roundRect">
+            <a:avLst>
+              <a:gd name="adj" fmla="val 8000"/>
+            </a:avLst>
+          </a:prstGeom>
+          <a:solidFill>
+            <a:srgbClr val="F2F5F9"/>
+          </a:solidFill>
+          <a:ln w="9525">
+            <a:solidFill>
+              <a:srgbClr val="D5DEE8"/>
+            </a:solidFill>
+          </a:ln>
+          <a:effectLst/>
+        </p:spPr>
+        <p:style>
+          <a:lnRef idx="1">
+            <a:schemeClr val="accent1"/>
+          </a:lnRef>
+          <a:fillRef idx="3">
+            <a:schemeClr val="accent1"/>
+          </a:fillRef>
+          <a:effectRef idx="2">
+            <a:schemeClr val="accent1"/>
+          </a:effectRef>
+          <a:fontRef idx="minor">
+            <a:schemeClr val="lt1"/>
+          </a:fontRef>
+        </p:style>
+        <p:txBody>
+          <a:bodyPr rtlCol="0" anchor="ctr"/>
+          <a:lstStyle/>
+          <a:p>
+            <a:pPr algn="ctr"/>
+          </a:p>
+        </p:txBody>
+      </p:sp>
+      <p:sp>
+        <p:nvSpPr>
+          <p:cNvPr id="16" name="Rounded Rectangle 15"/>
+          <p:cNvSpPr/>
+          <p:nvPr/>
+        </p:nvSpPr>
+        <p:spPr>
+          <a:xfrm>
+            <a:off x="566928" y="4261104"/>
+            <a:ext cx="1051560" cy="438912"/>
+          </a:xfrm>
+          <a:prstGeom prst="roundRect">
+            <a:avLst>
+              <a:gd name="adj" fmla="val 8000"/>
+            </a:avLst>
+          </a:prstGeom>
+          <a:solidFill>
+            <a:srgbClr val="2B6CB0"/>
+          </a:solidFill>
+          <a:ln>
+            <a:noFill/>
+          </a:ln>
+          <a:effectLst/>
+        </p:spPr>
+        <p:style>
+          <a:lnRef idx="1">
+            <a:schemeClr val="accent1"/>
+          </a:lnRef>
+          <a:fillRef idx="3">
+            <a:schemeClr val="accent1"/>
+          </a:fillRef>
+          <a:effectRef idx="2">
+            <a:schemeClr val="accent1"/>
+          </a:effectRef>
+          <a:fontRef idx="minor">
+            <a:schemeClr val="lt1"/>
+          </a:fontRef>
+        </p:style>
+        <p:txBody>
+          <a:bodyPr rtlCol="0" anchor="ctr" wrap="square" lIns="109728" tIns="36576" bIns="36576"/>
+          <a:lstStyle/>
+          <a:p>
+            <a:pPr algn="ctr"/>
+            <a:r>
+              <a:rPr sz="1300" b="1">
+                <a:solidFill>
+                  <a:srgbClr val="FFFFFF"/>
+                </a:solidFill>
+              </a:rPr>
+              <a:t>index</a:t>
+            </a:r>
+          </a:p>
+        </p:txBody>
+      </p:sp>
+      <p:sp>
+        <p:nvSpPr>
+          <p:cNvPr id="17" name="TextBox 16"/>
+          <p:cNvSpPr txBox="1"/>
+          <p:nvPr/>
+        </p:nvSpPr>
+        <p:spPr>
+          <a:xfrm>
+            <a:off x="1737360" y="4288536"/>
+            <a:ext cx="5394960" cy="402336"/>
+          </a:xfrm>
+          <a:prstGeom prst="rect">
+            <a:avLst/>
+          </a:prstGeom>
+          <a:noFill/>
+        </p:spPr>
+        <p:txBody>
+          <a:bodyPr wrap="square">
+            <a:spAutoFit/>
+          </a:bodyPr>
+          <a:lstStyle/>
+          <a:p>
+            <a:pPr algn="l"/>
+            <a:r>
+              <a:rPr sz="1300" b="0">
+                <a:solidFill>
+                  <a:srgbClr val="1A202C"/>
+                </a:solidFill>
+              </a:rPr>
+              <a:t>NDJSON 生成与兼容解析</a:t>
+            </a:r>
+          </a:p>
+        </p:txBody>
+      </p:sp>
+      <p:sp>
+        <p:nvSpPr>
+          <p:cNvPr id="18" name="Rounded Rectangle 17"/>
+          <p:cNvSpPr/>
+          <p:nvPr/>
+        </p:nvSpPr>
+        <p:spPr>
+          <a:xfrm>
+            <a:off x="502920" y="4928616"/>
+            <a:ext cx="6766560" cy="676656"/>
+          </a:xfrm>
+          <a:prstGeom prst="roundRect">
+            <a:avLst>
+              <a:gd name="adj" fmla="val 8000"/>
+            </a:avLst>
+          </a:prstGeom>
+          <a:solidFill>
+            <a:srgbClr val="F2F5F9"/>
+          </a:solidFill>
+          <a:ln w="9525">
+            <a:solidFill>
+              <a:srgbClr val="D5DEE8"/>
+            </a:solidFill>
+          </a:ln>
+          <a:effectLst/>
+        </p:spPr>
+        <p:style>
+          <a:lnRef idx="1">
+            <a:schemeClr val="accent1"/>
+          </a:lnRef>
+          <a:fillRef idx="3">
+            <a:schemeClr val="accent1"/>
+          </a:fillRef>
+          <a:effectRef idx="2">
+            <a:schemeClr val="accent1"/>
+          </a:effectRef>
+          <a:fontRef idx="minor">
+            <a:schemeClr val="lt1"/>
+          </a:fontRef>
+        </p:style>
+        <p:txBody>
+          <a:bodyPr rtlCol="0" anchor="ctr"/>
+          <a:lstStyle/>
+          <a:p>
+            <a:pPr algn="ctr"/>
+          </a:p>
+        </p:txBody>
+      </p:sp>
+      <p:sp>
+        <p:nvSpPr>
+          <p:cNvPr id="19" name="Rounded Rectangle 18"/>
+          <p:cNvSpPr/>
+          <p:nvPr/>
+        </p:nvSpPr>
+        <p:spPr>
+          <a:xfrm>
+            <a:off x="566928" y="5047488"/>
+            <a:ext cx="1051560" cy="438912"/>
+          </a:xfrm>
+          <a:prstGeom prst="roundRect">
+            <a:avLst>
+              <a:gd name="adj" fmla="val 8000"/>
+            </a:avLst>
+          </a:prstGeom>
+          <a:solidFill>
+            <a:srgbClr val="2B6CB0"/>
+          </a:solidFill>
+          <a:ln>
+            <a:noFill/>
+          </a:ln>
+          <a:effectLst/>
+        </p:spPr>
+        <p:style>
+          <a:lnRef idx="1">
+            <a:schemeClr val="accent1"/>
+          </a:lnRef>
+          <a:fillRef idx="3">
+            <a:schemeClr val="accent1"/>
+          </a:fillRef>
+          <a:effectRef idx="2">
+            <a:schemeClr val="accent1"/>
+          </a:effectRef>
+          <a:fontRef idx="minor">
+            <a:schemeClr val="lt1"/>
+          </a:fontRef>
+        </p:style>
+        <p:txBody>
+          <a:bodyPr rtlCol="0" anchor="ctr" wrap="square" lIns="109728" tIns="36576" bIns="36576"/>
+          <a:lstStyle/>
+          <a:p>
+            <a:pPr algn="ctr"/>
+            <a:r>
+              <a:rPr sz="1300" b="1">
+                <a:solidFill>
+                  <a:srgbClr val="FFFFFF"/>
+                </a:solidFill>
+              </a:rPr>
+              <a:t>protocol</a:t>
+            </a:r>
+          </a:p>
+        </p:txBody>
+      </p:sp>
+      <p:sp>
+        <p:nvSpPr>
+          <p:cNvPr id="20" name="TextBox 19"/>
+          <p:cNvSpPr txBox="1"/>
+          <p:nvPr/>
+        </p:nvSpPr>
+        <p:spPr>
+          <a:xfrm>
+            <a:off x="1737360" y="5074920"/>
+            <a:ext cx="5394960" cy="402336"/>
+          </a:xfrm>
+          <a:prstGeom prst="rect">
+            <a:avLst/>
+          </a:prstGeom>
+          <a:noFill/>
+        </p:spPr>
+        <p:txBody>
+          <a:bodyPr wrap="square">
+            <a:spAutoFit/>
+          </a:bodyPr>
+          <a:lstStyle/>
+          <a:p>
+            <a:pPr algn="l"/>
+            <a:r>
+              <a:rPr sz="1300" b="0">
+                <a:solidFill>
+                  <a:srgbClr val="1A202C"/>
+                </a:solidFill>
+              </a:rPr>
+              <a:t>官方发布 / 下载二进制协议、URL 分片</a:t>
+            </a:r>
+          </a:p>
+        </p:txBody>
+      </p:sp>
+      <p:sp>
+        <p:nvSpPr>
+          <p:cNvPr id="21" name="TextBox 20"/>
+          <p:cNvSpPr txBox="1"/>
+          <p:nvPr/>
+        </p:nvSpPr>
+        <p:spPr>
+          <a:xfrm>
+            <a:off x="548640" y="5696712"/>
+            <a:ext cx="6675120" cy="310896"/>
+          </a:xfrm>
+          <a:prstGeom prst="rect">
+            <a:avLst/>
+          </a:prstGeom>
+          <a:noFill/>
+        </p:spPr>
+        <p:txBody>
+          <a:bodyPr wrap="square">
+            <a:spAutoFit/>
+          </a:bodyPr>
+          <a:lstStyle/>
+          <a:p>
+            <a:pPr algn="l"/>
+            <a:r>
+              <a:rPr sz="1200" b="0">
                 <a:solidFill>
                   <a:srgbClr val="5A6370"/>
                 </a:solidFill>
               </a:rPr>
-              <a:t>为什么不用 SQLite：LSM + 纯仓颉、无 C 依赖，单二进制</a:t>
-            </a:r>
-          </a:p>
-          <a:p>
-            <a:pPr>
-              <a:spcAft>
-                <a:spcPts val="1000"/>
-              </a:spcAft>
-            </a:pPr>
-            <a:r>
-              <a:rPr sz="1600">
+              <a:t>层间数据一律 DTO 序列化（公开面 + 管理面）</a:t>
+            </a:r>
+          </a:p>
+        </p:txBody>
+      </p:sp>
+      <p:sp>
+        <p:nvSpPr>
+          <p:cNvPr id="22" name="TextBox 21"/>
+          <p:cNvSpPr txBox="1"/>
+          <p:nvPr/>
+        </p:nvSpPr>
+        <p:spPr>
+          <a:xfrm>
+            <a:off x="7543800" y="1417320"/>
+            <a:ext cx="4160520" cy="310896"/>
+          </a:xfrm>
+          <a:prstGeom prst="rect">
+            <a:avLst/>
+          </a:prstGeom>
+          <a:noFill/>
+        </p:spPr>
+        <p:txBody>
+          <a:bodyPr wrap="square">
+            <a:spAutoFit/>
+          </a:bodyPr>
+          <a:lstStyle/>
+          <a:p>
+            <a:pPr algn="l"/>
+            <a:r>
+              <a:rPr sz="1300" b="1">
                 <a:solidFill>
                   <a:srgbClr val="5A6370"/>
                 </a:solidFill>
               </a:rPr>
-              <a:t>为什么自研 tar/gzip 解压：发布/回源要提取 README 与 cjpm.toml</a:t>
-            </a:r>
-          </a:p>
-          <a:p>
-            <a:pPr>
-              <a:spcAft>
-                <a:spcPts val="1000"/>
-              </a:spcAft>
-            </a:pPr>
-            <a:r>
-              <a:rPr sz="1600">
+              <a:t>关键取舍</a:t>
+            </a:r>
+          </a:p>
+        </p:txBody>
+      </p:sp>
+      <p:sp>
+        <p:nvSpPr>
+          <p:cNvPr id="23" name="Rounded Rectangle 22"/>
+          <p:cNvSpPr/>
+          <p:nvPr/>
+        </p:nvSpPr>
+        <p:spPr>
+          <a:xfrm>
+            <a:off x="7543800" y="1783080"/>
+            <a:ext cx="4160520" cy="932688"/>
+          </a:xfrm>
+          <a:prstGeom prst="roundRect">
+            <a:avLst>
+              <a:gd name="adj" fmla="val 8000"/>
+            </a:avLst>
+          </a:prstGeom>
+          <a:solidFill>
+            <a:srgbClr val="F2F5F9"/>
+          </a:solidFill>
+          <a:ln w="9525">
+            <a:solidFill>
+              <a:srgbClr val="D5DEE8"/>
+            </a:solidFill>
+          </a:ln>
+          <a:effectLst/>
+        </p:spPr>
+        <p:style>
+          <a:lnRef idx="1">
+            <a:schemeClr val="accent1"/>
+          </a:lnRef>
+          <a:fillRef idx="3">
+            <a:schemeClr val="accent1"/>
+          </a:fillRef>
+          <a:effectRef idx="2">
+            <a:schemeClr val="accent1"/>
+          </a:effectRef>
+          <a:fontRef idx="minor">
+            <a:schemeClr val="lt1"/>
+          </a:fontRef>
+        </p:style>
+        <p:txBody>
+          <a:bodyPr rtlCol="0" anchor="ctr" wrap="square" lIns="109728" tIns="36576" bIns="36576"/>
+          <a:lstStyle/>
+          <a:p>
+            <a:pPr algn="l"/>
+            <a:r>
+              <a:rPr sz="1300" b="1">
                 <a:solidFill>
-                  <a:srgbClr val="5A6370"/>
+                  <a:srgbClr val="2B6CB0"/>
                 </a:solidFill>
               </a:rPr>
-              <a:t>为什么 UI 用 WS 补丁：声明式信号派生，前端零手写 DOM</a:t>
-            </a:r>
-          </a:p>
-          <a:p>
-            <a:pPr>
-              <a:spcAft>
-                <a:spcPts val="1000"/>
-              </a:spcAft>
-            </a:pPr>
-            <a:r>
-              <a:rPr sz="1600">
+              <a:t>为什么不用 SQLite？</a:t>
+            </a:r>
+          </a:p>
+          <a:p>
+            <a:pPr algn="l"/>
+            <a:r>
+              <a:rPr sz="1200" b="0">
                 <a:solidFill>
-                  <a:srgbClr val="5A6370"/>
+                  <a:srgbClr val="1A202C"/>
                 </a:solidFill>
               </a:rPr>
-              <a:t>发布链路全程流式：内存与包体解耦（决赛核心改造）</a:t>
+              <a:t>LSM + 纯仓颉、无 C 依赖，静态单二进制</a:t>
+            </a:r>
+          </a:p>
+        </p:txBody>
+      </p:sp>
+      <p:sp>
+        <p:nvSpPr>
+          <p:cNvPr id="24" name="Rounded Rectangle 23"/>
+          <p:cNvSpPr/>
+          <p:nvPr/>
+        </p:nvSpPr>
+        <p:spPr>
+          <a:xfrm>
+            <a:off x="7543800" y="2843784"/>
+            <a:ext cx="4160520" cy="932688"/>
+          </a:xfrm>
+          <a:prstGeom prst="roundRect">
+            <a:avLst>
+              <a:gd name="adj" fmla="val 8000"/>
+            </a:avLst>
+          </a:prstGeom>
+          <a:solidFill>
+            <a:srgbClr val="F2F5F9"/>
+          </a:solidFill>
+          <a:ln w="9525">
+            <a:solidFill>
+              <a:srgbClr val="D5DEE8"/>
+            </a:solidFill>
+          </a:ln>
+          <a:effectLst/>
+        </p:spPr>
+        <p:style>
+          <a:lnRef idx="1">
+            <a:schemeClr val="accent1"/>
+          </a:lnRef>
+          <a:fillRef idx="3">
+            <a:schemeClr val="accent1"/>
+          </a:fillRef>
+          <a:effectRef idx="2">
+            <a:schemeClr val="accent1"/>
+          </a:effectRef>
+          <a:fontRef idx="minor">
+            <a:schemeClr val="lt1"/>
+          </a:fontRef>
+        </p:style>
+        <p:txBody>
+          <a:bodyPr rtlCol="0" anchor="ctr" wrap="square" lIns="109728" tIns="36576" bIns="36576"/>
+          <a:lstStyle/>
+          <a:p>
+            <a:pPr algn="l"/>
+            <a:r>
+              <a:rPr sz="1300" b="1">
+                <a:solidFill>
+                  <a:srgbClr val="2B6CB0"/>
+                </a:solidFill>
+              </a:rPr>
+              <a:t>为什么自研 tar / gzip？</a:t>
+            </a:r>
+          </a:p>
+          <a:p>
+            <a:pPr algn="l"/>
+            <a:r>
+              <a:rPr sz="1200" b="0">
+                <a:solidFill>
+                  <a:srgbClr val="1A202C"/>
+                </a:solidFill>
+              </a:rPr>
+              <a:t>发布与回源要从制品里取 README、cjpm.toml</a:t>
+            </a:r>
+          </a:p>
+        </p:txBody>
+      </p:sp>
+      <p:sp>
+        <p:nvSpPr>
+          <p:cNvPr id="25" name="Rounded Rectangle 24"/>
+          <p:cNvSpPr/>
+          <p:nvPr/>
+        </p:nvSpPr>
+        <p:spPr>
+          <a:xfrm>
+            <a:off x="7543800" y="3904488"/>
+            <a:ext cx="4160520" cy="932688"/>
+          </a:xfrm>
+          <a:prstGeom prst="roundRect">
+            <a:avLst>
+              <a:gd name="adj" fmla="val 8000"/>
+            </a:avLst>
+          </a:prstGeom>
+          <a:solidFill>
+            <a:srgbClr val="F2F5F9"/>
+          </a:solidFill>
+          <a:ln w="9525">
+            <a:solidFill>
+              <a:srgbClr val="D5DEE8"/>
+            </a:solidFill>
+          </a:ln>
+          <a:effectLst/>
+        </p:spPr>
+        <p:style>
+          <a:lnRef idx="1">
+            <a:schemeClr val="accent1"/>
+          </a:lnRef>
+          <a:fillRef idx="3">
+            <a:schemeClr val="accent1"/>
+          </a:fillRef>
+          <a:effectRef idx="2">
+            <a:schemeClr val="accent1"/>
+          </a:effectRef>
+          <a:fontRef idx="minor">
+            <a:schemeClr val="lt1"/>
+          </a:fontRef>
+        </p:style>
+        <p:txBody>
+          <a:bodyPr rtlCol="0" anchor="ctr" wrap="square" lIns="109728" tIns="36576" bIns="36576"/>
+          <a:lstStyle/>
+          <a:p>
+            <a:pPr algn="l"/>
+            <a:r>
+              <a:rPr sz="1300" b="1">
+                <a:solidFill>
+                  <a:srgbClr val="2B6CB0"/>
+                </a:solidFill>
+              </a:rPr>
+              <a:t>为什么 UI 走 WS 补丁？</a:t>
+            </a:r>
+          </a:p>
+          <a:p>
+            <a:pPr algn="l"/>
+            <a:r>
+              <a:rPr sz="1200" b="0">
+                <a:solidFill>
+                  <a:srgbClr val="1A202C"/>
+                </a:solidFill>
+              </a:rPr>
+              <a:t>信号派生，前端零手写 DOM</a:t>
+            </a:r>
+          </a:p>
+        </p:txBody>
+      </p:sp>
+      <p:sp>
+        <p:nvSpPr>
+          <p:cNvPr id="26" name="Rounded Rectangle 25"/>
+          <p:cNvSpPr/>
+          <p:nvPr/>
+        </p:nvSpPr>
+        <p:spPr>
+          <a:xfrm>
+            <a:off x="7543800" y="5020056"/>
+            <a:ext cx="4160520" cy="896112"/>
+          </a:xfrm>
+          <a:prstGeom prst="roundRect">
+            <a:avLst>
+              <a:gd name="adj" fmla="val 8000"/>
+            </a:avLst>
+          </a:prstGeom>
+          <a:solidFill>
+            <a:srgbClr val="2B6CB0"/>
+          </a:solidFill>
+          <a:ln>
+            <a:noFill/>
+          </a:ln>
+          <a:effectLst/>
+        </p:spPr>
+        <p:style>
+          <a:lnRef idx="1">
+            <a:schemeClr val="accent1"/>
+          </a:lnRef>
+          <a:fillRef idx="3">
+            <a:schemeClr val="accent1"/>
+          </a:fillRef>
+          <a:effectRef idx="2">
+            <a:schemeClr val="accent1"/>
+          </a:effectRef>
+          <a:fontRef idx="minor">
+            <a:schemeClr val="lt1"/>
+          </a:fontRef>
+        </p:style>
+        <p:txBody>
+          <a:bodyPr rtlCol="0" anchor="ctr" wrap="square" lIns="109728" tIns="36576" bIns="36576"/>
+          <a:lstStyle/>
+          <a:p>
+            <a:pPr algn="l"/>
+            <a:r>
+              <a:rPr sz="1300" b="1">
+                <a:solidFill>
+                  <a:srgbClr val="FFFFFF"/>
+                </a:solidFill>
+              </a:rPr>
+              <a:t>决赛核心改造：发布链路全程流式</a:t>
+            </a:r>
+          </a:p>
+          <a:p>
+            <a:pPr algn="l"/>
+            <a:r>
+              <a:rPr sz="1200" b="0">
+                <a:solidFill>
+                  <a:srgbClr val="FFFFFF"/>
+                </a:solidFill>
+              </a:rPr>
+              <a:t>内存与包体解耦（详见下页数字）</a:t>
             </a:r>
           </a:p>
         </p:txBody>

--- a/docs/finals-roadshow-v0.3.0.pptx
+++ b/docs/finals-roadshow-v0.3.0.pptx
@@ -7115,7 +7115,7 @@
                   <a:srgbClr val="1A202C"/>
                 </a:solidFill>
               </a:rPr>
-              <a:t>LSM + 纯仓颉、无 C 依赖，静态单二进制</a:t>
+              <a:t>当时仓颉生态还没有完整可用的 SQLite 驱动</a:t>
             </a:r>
           </a:p>
         </p:txBody>

--- a/docs/finals-roadshow-v0.3.0.pptx
+++ b/docs/finals-roadshow-v0.3.0.pptx
@@ -5370,14 +5370,280 @@
       </p:sp>
       <p:sp>
         <p:nvSpPr>
-          <p:cNvPr id="4" name="TextBox 3"/>
+          <p:cNvPr id="4" name="Rounded Rectangle 3"/>
+          <p:cNvSpPr/>
+          <p:nvPr/>
+        </p:nvSpPr>
+        <p:spPr>
+          <a:xfrm>
+            <a:off x="502920" y="1600200"/>
+            <a:ext cx="3611880" cy="1828800"/>
+          </a:xfrm>
+          <a:prstGeom prst="roundRect">
+            <a:avLst>
+              <a:gd name="adj" fmla="val 8000"/>
+            </a:avLst>
+          </a:prstGeom>
+          <a:solidFill>
+            <a:srgbClr val="F2F5F9"/>
+          </a:solidFill>
+          <a:ln w="9525">
+            <a:solidFill>
+              <a:srgbClr val="D5DEE8"/>
+            </a:solidFill>
+          </a:ln>
+          <a:effectLst/>
+        </p:spPr>
+        <p:style>
+          <a:lnRef idx="1">
+            <a:schemeClr val="accent1"/>
+          </a:lnRef>
+          <a:fillRef idx="3">
+            <a:schemeClr val="accent1"/>
+          </a:fillRef>
+          <a:effectRef idx="2">
+            <a:schemeClr val="accent1"/>
+          </a:effectRef>
+          <a:fontRef idx="minor">
+            <a:schemeClr val="lt1"/>
+          </a:fontRef>
+        </p:style>
+        <p:txBody>
+          <a:bodyPr rtlCol="0" anchor="ctr" wrap="square" lIns="109728" tIns="36576" bIns="36576"/>
+          <a:lstStyle/>
+          <a:p>
+            <a:pPr algn="l"/>
+            <a:r>
+              <a:rPr sz="1600" b="1">
+                <a:solidFill>
+                  <a:srgbClr val="2B6CB0"/>
+                </a:solidFill>
+              </a:rPr>
+              <a:t>① 内网 / 离线没有仓</a:t>
+            </a:r>
+          </a:p>
+          <a:p>
+            <a:pPr algn="l"/>
+            <a:r>
+              <a:rPr sz="1300" b="0">
+                <a:solidFill>
+                  <a:srgbClr val="1A202C"/>
+                </a:solidFill>
+              </a:rPr>
+              <a:t>中心仓在公网；流水线与机器在内网，离线时要带着依赖跑</a:t>
+            </a:r>
+          </a:p>
+        </p:txBody>
+      </p:sp>
+      <p:sp>
+        <p:nvSpPr>
+          <p:cNvPr id="5" name="Rounded Rectangle 4"/>
+          <p:cNvSpPr/>
+          <p:nvPr/>
+        </p:nvSpPr>
+        <p:spPr>
+          <a:xfrm>
+            <a:off x="4315968" y="1600200"/>
+            <a:ext cx="3611880" cy="1828800"/>
+          </a:xfrm>
+          <a:prstGeom prst="roundRect">
+            <a:avLst>
+              <a:gd name="adj" fmla="val 8000"/>
+            </a:avLst>
+          </a:prstGeom>
+          <a:solidFill>
+            <a:srgbClr val="F2F5F9"/>
+          </a:solidFill>
+          <a:ln w="9525">
+            <a:solidFill>
+              <a:srgbClr val="D5DEE8"/>
+            </a:solidFill>
+          </a:ln>
+          <a:effectLst/>
+        </p:spPr>
+        <p:style>
+          <a:lnRef idx="1">
+            <a:schemeClr val="accent1"/>
+          </a:lnRef>
+          <a:fillRef idx="3">
+            <a:schemeClr val="accent1"/>
+          </a:fillRef>
+          <a:effectRef idx="2">
+            <a:schemeClr val="accent1"/>
+          </a:effectRef>
+          <a:fontRef idx="minor">
+            <a:schemeClr val="lt1"/>
+          </a:fontRef>
+        </p:style>
+        <p:txBody>
+          <a:bodyPr rtlCol="0" anchor="ctr" wrap="square" lIns="109728" tIns="36576" bIns="36576"/>
+          <a:lstStyle/>
+          <a:p>
+            <a:pPr algn="l"/>
+            <a:r>
+              <a:rPr sz="1600" b="1">
+                <a:solidFill>
+                  <a:srgbClr val="2B6CB0"/>
+                </a:solidFill>
+              </a:rPr>
+              <a:t>② 发布不可逆、同步不可控</a:t>
+            </a:r>
+          </a:p>
+          <a:p>
+            <a:pPr algn="l"/>
+            <a:r>
+              <a:rPr sz="1300" b="0">
+                <a:solidFill>
+                  <a:srgbClr val="1A202C"/>
+                </a:solidFill>
+              </a:rPr>
+              <a:t>版本不能删除、不能覆盖；索引同步几十分钟到几天，失败要等</a:t>
+            </a:r>
+          </a:p>
+        </p:txBody>
+      </p:sp>
+      <p:sp>
+        <p:nvSpPr>
+          <p:cNvPr id="6" name="Rounded Rectangle 5"/>
+          <p:cNvSpPr/>
+          <p:nvPr/>
+        </p:nvSpPr>
+        <p:spPr>
+          <a:xfrm>
+            <a:off x="8129016" y="1600200"/>
+            <a:ext cx="3611880" cy="1828800"/>
+          </a:xfrm>
+          <a:prstGeom prst="roundRect">
+            <a:avLst>
+              <a:gd name="adj" fmla="val 8000"/>
+            </a:avLst>
+          </a:prstGeom>
+          <a:solidFill>
+            <a:srgbClr val="F2F5F9"/>
+          </a:solidFill>
+          <a:ln w="9525">
+            <a:solidFill>
+              <a:srgbClr val="D5DEE8"/>
+            </a:solidFill>
+          </a:ln>
+          <a:effectLst/>
+        </p:spPr>
+        <p:style>
+          <a:lnRef idx="1">
+            <a:schemeClr val="accent1"/>
+          </a:lnRef>
+          <a:fillRef idx="3">
+            <a:schemeClr val="accent1"/>
+          </a:fillRef>
+          <a:effectRef idx="2">
+            <a:schemeClr val="accent1"/>
+          </a:effectRef>
+          <a:fontRef idx="minor">
+            <a:schemeClr val="lt1"/>
+          </a:fontRef>
+        </p:style>
+        <p:txBody>
+          <a:bodyPr rtlCol="0" anchor="ctr" wrap="square" lIns="109728" tIns="36576" bIns="36576"/>
+          <a:lstStyle/>
+          <a:p>
+            <a:pPr algn="l"/>
+            <a:r>
+              <a:rPr sz="1600" b="1">
+                <a:solidFill>
+                  <a:srgbClr val="2B6CB0"/>
+                </a:solidFill>
+              </a:rPr>
+              <a:t>③ 团队需要自己的仓与预演位</a:t>
+            </a:r>
+          </a:p>
+          <a:p>
+            <a:pPr algn="l"/>
+            <a:r>
+              <a:rPr sz="1300" b="0">
+                <a:solidFill>
+                  <a:srgbClr val="1A202C"/>
+                </a:solidFill>
+              </a:rPr>
+              <a:t>预发布、内部包、灰度版本不该进公共仓</a:t>
+            </a:r>
+          </a:p>
+        </p:txBody>
+      </p:sp>
+      <p:sp>
+        <p:nvSpPr>
+          <p:cNvPr id="7" name="Rounded Rectangle 6"/>
+          <p:cNvSpPr/>
+          <p:nvPr/>
+        </p:nvSpPr>
+        <p:spPr>
+          <a:xfrm>
+            <a:off x="502920" y="3794760"/>
+            <a:ext cx="11183112" cy="1097280"/>
+          </a:xfrm>
+          <a:prstGeom prst="roundRect">
+            <a:avLst>
+              <a:gd name="adj" fmla="val 8000"/>
+            </a:avLst>
+          </a:prstGeom>
+          <a:solidFill>
+            <a:srgbClr val="2B6CB0"/>
+          </a:solidFill>
+          <a:ln>
+            <a:noFill/>
+          </a:ln>
+          <a:effectLst/>
+        </p:spPr>
+        <p:style>
+          <a:lnRef idx="1">
+            <a:schemeClr val="accent1"/>
+          </a:lnRef>
+          <a:fillRef idx="3">
+            <a:schemeClr val="accent1"/>
+          </a:fillRef>
+          <a:effectRef idx="2">
+            <a:schemeClr val="accent1"/>
+          </a:effectRef>
+          <a:fontRef idx="minor">
+            <a:schemeClr val="lt1"/>
+          </a:fontRef>
+        </p:style>
+        <p:txBody>
+          <a:bodyPr rtlCol="0" anchor="ctr" wrap="square" lIns="109728" tIns="36576" bIns="36576"/>
+          <a:lstStyle/>
+          <a:p>
+            <a:pPr algn="l"/>
+            <a:r>
+              <a:rPr sz="2000" b="1">
+                <a:solidFill>
+                  <a:srgbClr val="FFFFFF"/>
+                </a:solidFill>
+              </a:rPr>
+              <a:t>cjreg 的定位：与官方协议互通的私有中心仓 + 多仓体系</a:t>
+            </a:r>
+          </a:p>
+          <a:p>
+            <a:pPr algn="l"/>
+            <a:r>
+              <a:rPr sz="1400" b="0">
+                <a:solidFill>
+                  <a:srgbClr val="FFFFFF"/>
+                </a:solidFill>
+              </a:rPr>
+              <a:t>不是替代，是补位 —— 官方仓照常用，缺的那一半由私有仓承接</a:t>
+            </a:r>
+          </a:p>
+        </p:txBody>
+      </p:sp>
+      <p:sp>
+        <p:nvSpPr>
+          <p:cNvPr id="8" name="TextBox 7"/>
           <p:cNvSpPr txBox="1"/>
           <p:nvPr/>
         </p:nvSpPr>
         <p:spPr>
           <a:xfrm>
-            <a:off x="731520" y="1554480"/>
-            <a:ext cx="10789920" cy="4206240"/>
+            <a:off x="548640" y="5257800"/>
+            <a:ext cx="11064240" cy="548640"/>
           </a:xfrm>
           <a:prstGeom prst="rect">
             <a:avLst/>
@@ -5390,112 +5656,14 @@
           </a:bodyPr>
           <a:lstStyle/>
           <a:p>
-            <a:pPr>
-              <a:spcAft>
-                <a:spcPts val="800"/>
-              </a:spcAft>
-            </a:pPr>
-            <a:r>
-              <a:rPr sz="1900">
-                <a:solidFill>
-                  <a:srgbClr val="1A202C"/>
-                </a:solidFill>
-              </a:rPr>
-              <a:t>① 内网 / 离线环境没有可用仓 —— 中心仓在公网，流水线与机器在内网</a:t>
-            </a:r>
-          </a:p>
-          <a:p>
-            <a:pPr>
-              <a:spcAft>
-                <a:spcPts val="800"/>
-              </a:spcAft>
-            </a:pPr>
-            <a:r>
-              <a:rPr sz="1900">
-                <a:solidFill>
-                  <a:srgbClr val="1A202C"/>
-                </a:solidFill>
-              </a:rPr>
-              <a:t>② 发布不可逆，同步不可控 —— 版本不能删除、不能覆盖；索引同步从几十分钟到几天，失败要等</a:t>
-            </a:r>
-          </a:p>
-          <a:p>
-            <a:pPr>
-              <a:spcAft>
-                <a:spcPts val="800"/>
-              </a:spcAft>
-            </a:pPr>
-            <a:r>
-              <a:rPr sz="1900">
-                <a:solidFill>
-                  <a:srgbClr val="1A202C"/>
-                </a:solidFill>
-              </a:rPr>
-              <a:t>③ 团队需要自己的仓与预演位 —— 预发布、内部包、灰度版本不该进公共仓</a:t>
-            </a:r>
-          </a:p>
-          <a:p>
-            <a:pPr>
-              <a:spcAft>
-                <a:spcPts val="800"/>
-              </a:spcAft>
-            </a:pPr>
-            <a:r>
-              <a:rPr sz="1900">
-                <a:solidFill>
-                  <a:srgbClr val="1A202C"/>
-                </a:solidFill>
-              </a:rPr>
-              <a:t/>
-            </a:r>
-          </a:p>
-          <a:p>
-            <a:pPr>
-              <a:spcAft>
-                <a:spcPts val="800"/>
-              </a:spcAft>
-            </a:pPr>
-            <a:r>
-              <a:rPr sz="1900">
-                <a:solidFill>
-                  <a:srgbClr val="1A202C"/>
-                </a:solidFill>
-              </a:rPr>
-              <a:t>cjreg 的定位：与官方协议互通的私有中心仓 + 多仓体系（不是替代，是补位）</a:t>
-            </a:r>
-          </a:p>
-        </p:txBody>
-      </p:sp>
-      <p:sp>
-        <p:nvSpPr>
-          <p:cNvPr id="5" name="TextBox 4"/>
-          <p:cNvSpPr txBox="1"/>
-          <p:nvPr/>
-        </p:nvSpPr>
-        <p:spPr>
-          <a:xfrm>
-            <a:off x="731520" y="5577840"/>
-            <a:ext cx="10789920" cy="822960"/>
-          </a:xfrm>
-          <a:prstGeom prst="rect">
-            <a:avLst/>
-          </a:prstGeom>
-          <a:noFill/>
-        </p:spPr>
-        <p:txBody>
-          <a:bodyPr wrap="square">
-            <a:spAutoFit/>
-          </a:bodyPr>
-          <a:lstStyle/>
-          <a:p>
             <a:pPr algn="l"/>
             <a:r>
-              <a:rPr sz="1500" b="0">
+              <a:rPr sz="1400" b="0">
                 <a:solidFill>
                   <a:srgbClr val="5A6370"/>
                 </a:solidFill>
               </a:rPr>
-              <a:t>生产实例已在内网常驻运行，承载团队日常发布、门户与审计</a:t>
+              <a:t>生产实例已在内网常驻：团队日常发布、门户取 Token、审计留痕；本机也能一条 compose 起一套</a:t>
             </a:r>
           </a:p>
         </p:txBody>
@@ -7424,7 +7592,7 @@
         </p:nvGraphicFramePr>
         <p:xfrm>
           <a:off x="502920" y="1371600"/>
-          <a:ext cx="11155680" cy="1920240"/>
+          <a:ext cx="6675119" cy="1920240"/>
         </p:xfrm>
         <a:graphic>
           <a:graphicData uri="http://schemas.openxmlformats.org/drawingml/2006/table">
@@ -7433,9 +7601,9 @@
                 <a:tableStyleId>{5C22544A-7EE6-4342-B048-85BDC9FD1C3A}</a:tableStyleId>
               </a:tblPr>
               <a:tblGrid>
-                <a:gridCol w="3108960"/>
-                <a:gridCol w="4023360"/>
-                <a:gridCol w="4023360"/>
+                <a:gridCol w="1874519"/>
+                <a:gridCol w="2468880"/>
+                <a:gridCol w="2331720"/>
               </a:tblGrid>
               <a:tr h="384048">
                 <a:tc>
@@ -7444,7 +7612,7 @@
                     <a:lstStyle/>
                     <a:p>
                       <a:r>
-                        <a:rPr sz="1400" b="1">
+                        <a:rPr sz="1300" b="1">
                           <a:solidFill>
                             <a:srgbClr val="FFFFFF"/>
                           </a:solidFill>
@@ -7465,7 +7633,7 @@
                     <a:lstStyle/>
                     <a:p>
                       <a:r>
-                        <a:rPr sz="1400" b="1">
+                        <a:rPr sz="1300" b="1">
                           <a:solidFill>
                             <a:srgbClr val="FFFFFF"/>
                           </a:solidFill>
@@ -7486,7 +7654,7 @@
                     <a:lstStyle/>
                     <a:p>
                       <a:r>
-                        <a:rPr sz="1400" b="1">
+                        <a:rPr sz="1300" b="1">
                           <a:solidFill>
                             <a:srgbClr val="FFFFFF"/>
                           </a:solidFill>
@@ -7509,7 +7677,7 @@
                     <a:lstStyle/>
                     <a:p>
                       <a:r>
-                        <a:rPr sz="1400">
+                        <a:rPr sz="1300">
                           <a:solidFill>
                             <a:srgbClr val="1A202C"/>
                           </a:solidFill>
@@ -7530,12 +7698,12 @@
                     <a:lstStyle/>
                     <a:p>
                       <a:r>
-                        <a:rPr sz="1400">
+                        <a:rPr sz="1300">
                           <a:solidFill>
                             <a:srgbClr val="1A202C"/>
                           </a:solidFill>
                         </a:rPr>
-                        <a:t>≤32 MiB 稳定，48–50 MiB 偶发 OOM</a:t>
+                        <a:t>≤32 MiB；48–50 MiB 偶发 OOM</a:t>
                       </a:r>
                     </a:p>
                   </a:txBody>
@@ -7551,12 +7719,12 @@
                     <a:lstStyle/>
                     <a:p>
                       <a:r>
-                        <a:rPr sz="1400">
+                        <a:rPr sz="1300">
                           <a:solidFill>
                             <a:srgbClr val="1A202C"/>
                           </a:solidFill>
                         </a:rPr>
-                        <a:t>200 MiB 稳定（上限 500 MiB 可配）</a:t>
+                        <a:t>200 MiB 稳定</a:t>
                       </a:r>
                     </a:p>
                   </a:txBody>
@@ -7574,12 +7742,12 @@
                     <a:lstStyle/>
                     <a:p>
                       <a:r>
-                        <a:rPr sz="1400">
+                        <a:rPr sz="1300">
                           <a:solidFill>
                             <a:srgbClr val="1A202C"/>
                           </a:solidFill>
                         </a:rPr>
-                        <a:t>200 MiB 发布耗时</a:t>
+                        <a:t>200 MiB 发布</a:t>
                       </a:r>
                     </a:p>
                   </a:txBody>
@@ -7595,7 +7763,7 @@
                     <a:lstStyle/>
                     <a:p>
                       <a:r>
-                        <a:rPr sz="1400">
+                        <a:rPr sz="1300">
                           <a:solidFill>
                             <a:srgbClr val="1A202C"/>
                           </a:solidFill>
@@ -7616,7 +7784,7 @@
                     <a:lstStyle/>
                     <a:p>
                       <a:r>
-                        <a:rPr sz="1400">
+                        <a:rPr sz="1300">
                           <a:solidFill>
                             <a:srgbClr val="1A202C"/>
                           </a:solidFill>
@@ -7639,12 +7807,12 @@
                     <a:lstStyle/>
                     <a:p>
                       <a:r>
-                        <a:rPr sz="1400">
+                        <a:rPr sz="1300">
                           <a:solidFill>
                             <a:srgbClr val="1A202C"/>
                           </a:solidFill>
                         </a:rPr>
-                        <a:t>发布峰值内存 VmHWM</a:t>
+                        <a:t>发布峰值内存</a:t>
                       </a:r>
                     </a:p>
                   </a:txBody>
@@ -7660,7 +7828,7 @@
                     <a:lstStyle/>
                     <a:p>
                       <a:r>
-                        <a:rPr sz="1400">
+                        <a:rPr sz="1300">
                           <a:solidFill>
                             <a:srgbClr val="1A202C"/>
                           </a:solidFill>
@@ -7681,12 +7849,12 @@
                     <a:lstStyle/>
                     <a:p>
                       <a:r>
-                        <a:rPr sz="1400">
+                        <a:rPr sz="1300">
                           <a:solidFill>
                             <a:srgbClr val="1A202C"/>
                           </a:solidFill>
                         </a:rPr>
-                        <a:t>恒定 291 MiB（2 / 32 / 200 MiB 一致）</a:t>
+                        <a:t>恒定 291 MiB</a:t>
                       </a:r>
                     </a:p>
                   </a:txBody>
@@ -7704,7 +7872,7 @@
                     <a:lstStyle/>
                     <a:p>
                       <a:r>
-                        <a:rPr sz="1400">
+                        <a:rPr sz="1300">
                           <a:solidFill>
                             <a:srgbClr val="1A202C"/>
                           </a:solidFill>
@@ -7725,7 +7893,7 @@
                     <a:lstStyle/>
                     <a:p>
                       <a:r>
-                        <a:rPr sz="1400">
+                        <a:rPr sz="1300">
                           <a:solidFill>
                             <a:srgbClr val="1A202C"/>
                           </a:solidFill>
@@ -7746,7 +7914,7 @@
                     <a:lstStyle/>
                     <a:p>
                       <a:r>
-                        <a:rPr sz="1400">
+                        <a:rPr sz="1300">
                           <a:solidFill>
                             <a:srgbClr val="1A202C"/>
                           </a:solidFill>
@@ -7768,14 +7936,81 @@
       </p:graphicFrame>
       <p:sp>
         <p:nvSpPr>
-          <p:cNvPr id="5" name="TextBox 4"/>
+          <p:cNvPr id="5" name="Rounded Rectangle 4"/>
+          <p:cNvSpPr/>
+          <p:nvPr/>
+        </p:nvSpPr>
+        <p:spPr>
+          <a:xfrm>
+            <a:off x="502920" y="3611880"/>
+            <a:ext cx="6675120" cy="1371600"/>
+          </a:xfrm>
+          <a:prstGeom prst="roundRect">
+            <a:avLst>
+              <a:gd name="adj" fmla="val 8000"/>
+            </a:avLst>
+          </a:prstGeom>
+          <a:solidFill>
+            <a:srgbClr val="F2F5F9"/>
+          </a:solidFill>
+          <a:ln w="9525">
+            <a:solidFill>
+              <a:srgbClr val="D5DEE8"/>
+            </a:solidFill>
+          </a:ln>
+          <a:effectLst/>
+        </p:spPr>
+        <p:style>
+          <a:lnRef idx="1">
+            <a:schemeClr val="accent1"/>
+          </a:lnRef>
+          <a:fillRef idx="3">
+            <a:schemeClr val="accent1"/>
+          </a:fillRef>
+          <a:effectRef idx="2">
+            <a:schemeClr val="accent1"/>
+          </a:effectRef>
+          <a:fontRef idx="minor">
+            <a:schemeClr val="lt1"/>
+          </a:fontRef>
+        </p:style>
+        <p:txBody>
+          <a:bodyPr rtlCol="0" anchor="ctr" wrap="square" lIns="109728" tIns="36576" bIns="36576"/>
+          <a:lstStyle/>
+          <a:p>
+            <a:pPr algn="l"/>
+            <a:r>
+              <a:rPr sz="1400" b="1">
+                <a:solidFill>
+                  <a:srgbClr val="2B6CB0"/>
+                </a:solidFill>
+              </a:rPr>
+              <a:t>为什么重要</a:t>
+            </a:r>
+          </a:p>
+          <a:p>
+            <a:pPr algn="l"/>
+            <a:r>
+              <a:rPr sz="1200" b="0">
+                <a:solidFill>
+                  <a:srgbClr val="1A202C"/>
+                </a:solidFill>
+              </a:rPr>
+              <a:t>整包驻留时峰值 ≈ 包体的 2–3 倍，撞上默认 256 MB 堆上限就失败；现在内存与包体解耦，发大包不再需要调 cjHeapSize</a:t>
+            </a:r>
+          </a:p>
+        </p:txBody>
+      </p:sp>
+      <p:sp>
+        <p:nvSpPr>
+          <p:cNvPr id="6" name="TextBox 5"/>
           <p:cNvSpPr txBox="1"/>
           <p:nvPr/>
         </p:nvSpPr>
         <p:spPr>
           <a:xfrm>
-            <a:off x="548640" y="3977639"/>
-            <a:ext cx="10972800" cy="2011680"/>
+            <a:off x="548640" y="5943600"/>
+            <a:ext cx="11064240" cy="457200"/>
           </a:xfrm>
           <a:prstGeom prst="rect">
             <a:avLst/>
@@ -7790,14 +8025,279 @@
           <a:p>
             <a:pPr algn="l"/>
             <a:r>
-              <a:rPr sz="1500" b="0">
+              <a:rPr sz="1300" b="0">
+                <a:solidFill>
+                  <a:srgbClr val="5A6370"/>
+                </a:solidFill>
+              </a:rPr>
+              <a:t>复现：bash scripts/bench.sh（桩上游 + k6；内存取 /proc/&lt;pid&gt;/status 的 VmHWM）</a:t>
+            </a:r>
+          </a:p>
+        </p:txBody>
+      </p:sp>
+      <p:sp>
+        <p:nvSpPr>
+          <p:cNvPr id="7" name="TextBox 6"/>
+          <p:cNvSpPr txBox="1"/>
+          <p:nvPr/>
+        </p:nvSpPr>
+        <p:spPr>
+          <a:xfrm>
+            <a:off x="7498079" y="1371600"/>
+            <a:ext cx="4206240" cy="310896"/>
+          </a:xfrm>
+          <a:prstGeom prst="rect">
+            <a:avLst/>
+          </a:prstGeom>
+          <a:noFill/>
+        </p:spPr>
+        <p:txBody>
+          <a:bodyPr wrap="square">
+            <a:spAutoFit/>
+          </a:bodyPr>
+          <a:lstStyle/>
+          <a:p>
+            <a:pPr algn="l"/>
+            <a:r>
+              <a:rPr sz="1300" b="1">
+                <a:solidFill>
+                  <a:srgbClr val="5A6370"/>
+                </a:solidFill>
+              </a:rPr>
+              <a:t>做法（发布链路）</a:t>
+            </a:r>
+          </a:p>
+        </p:txBody>
+      </p:sp>
+      <p:sp>
+        <p:nvSpPr>
+          <p:cNvPr id="8" name="Rounded Rectangle 7"/>
+          <p:cNvSpPr/>
+          <p:nvPr/>
+        </p:nvSpPr>
+        <p:spPr>
+          <a:xfrm>
+            <a:off x="7498079" y="1737360"/>
+            <a:ext cx="4206240" cy="713232"/>
+          </a:xfrm>
+          <a:prstGeom prst="roundRect">
+            <a:avLst>
+              <a:gd name="adj" fmla="val 8000"/>
+            </a:avLst>
+          </a:prstGeom>
+          <a:solidFill>
+            <a:srgbClr val="F2F5F9"/>
+          </a:solidFill>
+          <a:ln w="9525">
+            <a:solidFill>
+              <a:srgbClr val="D5DEE8"/>
+            </a:solidFill>
+          </a:ln>
+          <a:effectLst/>
+        </p:spPr>
+        <p:style>
+          <a:lnRef idx="1">
+            <a:schemeClr val="accent1"/>
+          </a:lnRef>
+          <a:fillRef idx="3">
+            <a:schemeClr val="accent1"/>
+          </a:fillRef>
+          <a:effectRef idx="2">
+            <a:schemeClr val="accent1"/>
+          </a:effectRef>
+          <a:fontRef idx="minor">
+            <a:schemeClr val="lt1"/>
+          </a:fontRef>
+        </p:style>
+        <p:txBody>
+          <a:bodyPr rtlCol="0" anchor="ctr" wrap="square" lIns="109728" tIns="36576" bIns="36576"/>
+          <a:lstStyle/>
+          <a:p>
+            <a:pPr algn="l"/>
+            <a:r>
+              <a:rPr sz="1300" b="0">
                 <a:solidFill>
                   <a:srgbClr val="1A202C"/>
                 </a:solidFill>
               </a:rPr>
-              <a:t>做法：按段解析头 → 边读边算 sha256 → 直接写临时文件 → 校验后 rename 原子落盘；
-下载侧 BlobStream → handler 直接 body(stream)；回源同样流式落盘。
-复现：bash scripts/bench.sh（桩上游 + k6，VmHWM 取 /proc/&lt;pid&gt;/status）</a:t>
+              <a:t>①  按段解析头，拿到长度与校验</a:t>
+            </a:r>
+          </a:p>
+        </p:txBody>
+      </p:sp>
+      <p:sp>
+        <p:nvSpPr>
+          <p:cNvPr id="9" name="Rounded Rectangle 8"/>
+          <p:cNvSpPr/>
+          <p:nvPr/>
+        </p:nvSpPr>
+        <p:spPr>
+          <a:xfrm>
+            <a:off x="7498079" y="2560320"/>
+            <a:ext cx="4206240" cy="713232"/>
+          </a:xfrm>
+          <a:prstGeom prst="roundRect">
+            <a:avLst>
+              <a:gd name="adj" fmla="val 8000"/>
+            </a:avLst>
+          </a:prstGeom>
+          <a:solidFill>
+            <a:srgbClr val="F2F5F9"/>
+          </a:solidFill>
+          <a:ln w="9525">
+            <a:solidFill>
+              <a:srgbClr val="D5DEE8"/>
+            </a:solidFill>
+          </a:ln>
+          <a:effectLst/>
+        </p:spPr>
+        <p:style>
+          <a:lnRef idx="1">
+            <a:schemeClr val="accent1"/>
+          </a:lnRef>
+          <a:fillRef idx="3">
+            <a:schemeClr val="accent1"/>
+          </a:fillRef>
+          <a:effectRef idx="2">
+            <a:schemeClr val="accent1"/>
+          </a:effectRef>
+          <a:fontRef idx="minor">
+            <a:schemeClr val="lt1"/>
+          </a:fontRef>
+        </p:style>
+        <p:txBody>
+          <a:bodyPr rtlCol="0" anchor="ctr" wrap="square" lIns="109728" tIns="36576" bIns="36576"/>
+          <a:lstStyle/>
+          <a:p>
+            <a:pPr algn="l"/>
+            <a:r>
+              <a:rPr sz="1300" b="0">
+                <a:solidFill>
+                  <a:srgbClr val="1A202C"/>
+                </a:solidFill>
+              </a:rPr>
+              <a:t>②  边读边算 sha256，不缓存整包</a:t>
+            </a:r>
+          </a:p>
+        </p:txBody>
+      </p:sp>
+      <p:sp>
+        <p:nvSpPr>
+          <p:cNvPr id="10" name="Rounded Rectangle 9"/>
+          <p:cNvSpPr/>
+          <p:nvPr/>
+        </p:nvSpPr>
+        <p:spPr>
+          <a:xfrm>
+            <a:off x="7498079" y="3383280"/>
+            <a:ext cx="4206240" cy="713232"/>
+          </a:xfrm>
+          <a:prstGeom prst="roundRect">
+            <a:avLst>
+              <a:gd name="adj" fmla="val 8000"/>
+            </a:avLst>
+          </a:prstGeom>
+          <a:solidFill>
+            <a:srgbClr val="F2F5F9"/>
+          </a:solidFill>
+          <a:ln w="9525">
+            <a:solidFill>
+              <a:srgbClr val="D5DEE8"/>
+            </a:solidFill>
+          </a:ln>
+          <a:effectLst/>
+        </p:spPr>
+        <p:style>
+          <a:lnRef idx="1">
+            <a:schemeClr val="accent1"/>
+          </a:lnRef>
+          <a:fillRef idx="3">
+            <a:schemeClr val="accent1"/>
+          </a:fillRef>
+          <a:effectRef idx="2">
+            <a:schemeClr val="accent1"/>
+          </a:effectRef>
+          <a:fontRef idx="minor">
+            <a:schemeClr val="lt1"/>
+          </a:fontRef>
+        </p:style>
+        <p:txBody>
+          <a:bodyPr rtlCol="0" anchor="ctr" wrap="square" lIns="109728" tIns="36576" bIns="36576"/>
+          <a:lstStyle/>
+          <a:p>
+            <a:pPr algn="l"/>
+            <a:r>
+              <a:rPr sz="1300" b="0">
+                <a:solidFill>
+                  <a:srgbClr val="1A202C"/>
+                </a:solidFill>
+              </a:rPr>
+              <a:t>③  写临时文件 → 校验 → rename 原子落盘</a:t>
+            </a:r>
+          </a:p>
+        </p:txBody>
+      </p:sp>
+      <p:sp>
+        <p:nvSpPr>
+          <p:cNvPr id="11" name="Rounded Rectangle 10"/>
+          <p:cNvSpPr/>
+          <p:nvPr/>
+        </p:nvSpPr>
+        <p:spPr>
+          <a:xfrm>
+            <a:off x="7498079" y="4251960"/>
+            <a:ext cx="4206240" cy="914400"/>
+          </a:xfrm>
+          <a:prstGeom prst="roundRect">
+            <a:avLst>
+              <a:gd name="adj" fmla="val 8000"/>
+            </a:avLst>
+          </a:prstGeom>
+          <a:solidFill>
+            <a:srgbClr val="2B6CB0"/>
+          </a:solidFill>
+          <a:ln>
+            <a:noFill/>
+          </a:ln>
+          <a:effectLst/>
+        </p:spPr>
+        <p:style>
+          <a:lnRef idx="1">
+            <a:schemeClr val="accent1"/>
+          </a:lnRef>
+          <a:fillRef idx="3">
+            <a:schemeClr val="accent1"/>
+          </a:fillRef>
+          <a:effectRef idx="2">
+            <a:schemeClr val="accent1"/>
+          </a:effectRef>
+          <a:fontRef idx="minor">
+            <a:schemeClr val="lt1"/>
+          </a:fontRef>
+        </p:style>
+        <p:txBody>
+          <a:bodyPr rtlCol="0" anchor="ctr" wrap="square" lIns="109728" tIns="36576" bIns="36576"/>
+          <a:lstStyle/>
+          <a:p>
+            <a:pPr algn="l"/>
+            <a:r>
+              <a:rPr sz="1400" b="1">
+                <a:solidFill>
+                  <a:srgbClr val="FFFFFF"/>
+                </a:solidFill>
+              </a:rPr>
+              <a:t>下载 / 回源同样流式</a:t>
+            </a:r>
+          </a:p>
+          <a:p>
+            <a:pPr algn="l"/>
+            <a:r>
+              <a:rPr sz="1200" b="0">
+                <a:solidFill>
+                  <a:srgbClr val="FFFFFF"/>
+                </a:solidFill>
+              </a:rPr>
+              <a:t>handler 直接 body(stream)；回源边收边落盘</a:t>
             </a:r>
           </a:p>
         </p:txBody>

--- a/docs/finals-roadshow-v0.3.0.pptx
+++ b/docs/finals-roadshow-v0.3.0.pptx
@@ -9215,636 +9215,614 @@
           </a:p>
         </p:txBody>
       </p:sp>
-      <p:graphicFrame>
-        <p:nvGraphicFramePr>
-          <p:cNvPr id="4" name="Table 3"/>
-          <p:cNvGraphicFramePr>
-            <a:graphicFrameLocks noGrp="1"/>
-          </p:cNvGraphicFramePr>
+      <p:sp>
+        <p:nvSpPr>
+          <p:cNvPr id="4" name="Rounded Rectangle 3"/>
+          <p:cNvSpPr/>
           <p:nvPr/>
-        </p:nvGraphicFramePr>
-        <p:xfrm>
-          <a:off x="502920" y="1325880"/>
-          <a:ext cx="11155680" cy="2688336"/>
-        </p:xfrm>
-        <a:graphic>
-          <a:graphicData uri="http://schemas.openxmlformats.org/drawingml/2006/table">
-            <a:tbl>
-              <a:tblPr firstRow="1" bandRow="1">
-                <a:tableStyleId>{5C22544A-7EE6-4342-B048-85BDC9FD1C3A}</a:tableStyleId>
-              </a:tblPr>
-              <a:tblGrid>
-                <a:gridCol w="2377440"/>
-                <a:gridCol w="3108960"/>
-                <a:gridCol w="4023360"/>
-                <a:gridCol w="1645920"/>
-              </a:tblGrid>
-              <a:tr h="384048">
-                <a:tc>
-                  <a:txBody>
-                    <a:bodyPr/>
-                    <a:lstStyle/>
-                    <a:p>
-                      <a:r>
-                        <a:rPr sz="1300" b="1">
-                          <a:solidFill>
-                            <a:srgbClr val="FFFFFF"/>
-                          </a:solidFill>
-                        </a:rPr>
-                        <a:t>维度</a:t>
-                      </a:r>
-                    </a:p>
-                  </a:txBody>
-                  <a:tcPr>
-                    <a:solidFill>
-                      <a:srgbClr val="2B6CB0"/>
-                    </a:solidFill>
-                  </a:tcPr>
-                </a:tc>
-                <a:tc>
-                  <a:txBody>
-                    <a:bodyPr/>
-                    <a:lstStyle/>
-                    <a:p>
-                      <a:r>
-                        <a:rPr sz="1300" b="1">
-                          <a:solidFill>
-                            <a:srgbClr val="FFFFFF"/>
-                          </a:solidFill>
-                        </a:rPr>
-                        <a:t>初赛 v0.2.0</a:t>
-                      </a:r>
-                    </a:p>
-                  </a:txBody>
-                  <a:tcPr>
-                    <a:solidFill>
-                      <a:srgbClr val="2B6CB0"/>
-                    </a:solidFill>
-                  </a:tcPr>
-                </a:tc>
-                <a:tc>
-                  <a:txBody>
-                    <a:bodyPr/>
-                    <a:lstStyle/>
-                    <a:p>
-                      <a:r>
-                        <a:rPr sz="1300" b="1">
-                          <a:solidFill>
-                            <a:srgbClr val="FFFFFF"/>
-                          </a:solidFill>
-                        </a:rPr>
-                        <a:t>决赛 v0.3.0</a:t>
-                      </a:r>
-                    </a:p>
-                  </a:txBody>
-                  <a:tcPr>
-                    <a:solidFill>
-                      <a:srgbClr val="2B6CB0"/>
-                    </a:solidFill>
-                  </a:tcPr>
-                </a:tc>
-                <a:tc>
-                  <a:txBody>
-                    <a:bodyPr/>
-                    <a:lstStyle/>
-                    <a:p>
-                      <a:r>
-                        <a:rPr sz="1300" b="1">
-                          <a:solidFill>
-                            <a:srgbClr val="FFFFFF"/>
-                          </a:solidFill>
-                        </a:rPr>
-                        <a:t>变化</a:t>
-                      </a:r>
-                    </a:p>
-                  </a:txBody>
-                  <a:tcPr>
-                    <a:solidFill>
-                      <a:srgbClr val="2B6CB0"/>
-                    </a:solidFill>
-                  </a:tcPr>
-                </a:tc>
-              </a:tr>
-              <a:tr h="384048">
-                <a:tc>
-                  <a:txBody>
-                    <a:bodyPr/>
-                    <a:lstStyle/>
-                    <a:p>
-                      <a:r>
-                        <a:rPr sz="1300">
-                          <a:solidFill>
-                            <a:srgbClr val="1A202C"/>
-                          </a:solidFill>
-                        </a:rPr>
-                        <a:t>单测用例</a:t>
-                      </a:r>
-                    </a:p>
-                  </a:txBody>
-                  <a:tcPr>
-                    <a:solidFill>
-                      <a:srgbClr val="F2F5F9"/>
-                    </a:solidFill>
-                  </a:tcPr>
-                </a:tc>
-                <a:tc>
-                  <a:txBody>
-                    <a:bodyPr/>
-                    <a:lstStyle/>
-                    <a:p>
-                      <a:r>
-                        <a:rPr sz="1300">
-                          <a:solidFill>
-                            <a:srgbClr val="1A202C"/>
-                          </a:solidFill>
-                        </a:rPr>
-                        <a:t>154</a:t>
-                      </a:r>
-                    </a:p>
-                  </a:txBody>
-                  <a:tcPr>
-                    <a:solidFill>
-                      <a:srgbClr val="F2F5F9"/>
-                    </a:solidFill>
-                  </a:tcPr>
-                </a:tc>
-                <a:tc>
-                  <a:txBody>
-                    <a:bodyPr/>
-                    <a:lstStyle/>
-                    <a:p>
-                      <a:r>
-                        <a:rPr sz="1300">
-                          <a:solidFill>
-                            <a:srgbClr val="1A202C"/>
-                          </a:solidFill>
-                        </a:rPr>
-                        <a:t>1002</a:t>
-                      </a:r>
-                    </a:p>
-                  </a:txBody>
-                  <a:tcPr>
-                    <a:solidFill>
-                      <a:srgbClr val="F2F5F9"/>
-                    </a:solidFill>
-                  </a:tcPr>
-                </a:tc>
-                <a:tc>
-                  <a:txBody>
-                    <a:bodyPr/>
-                    <a:lstStyle/>
-                    <a:p>
-                      <a:r>
-                        <a:rPr sz="1300">
-                          <a:solidFill>
-                            <a:srgbClr val="1A202C"/>
-                          </a:solidFill>
-                        </a:rPr>
-                        <a:t>×6.5</a:t>
-                      </a:r>
-                    </a:p>
-                  </a:txBody>
-                  <a:tcPr>
-                    <a:solidFill>
-                      <a:srgbClr val="F2F5F9"/>
-                    </a:solidFill>
-                  </a:tcPr>
-                </a:tc>
-              </a:tr>
-              <a:tr h="384048">
-                <a:tc>
-                  <a:txBody>
-                    <a:bodyPr/>
-                    <a:lstStyle/>
-                    <a:p>
-                      <a:r>
-                        <a:rPr sz="1300">
-                          <a:solidFill>
-                            <a:srgbClr val="1A202C"/>
-                          </a:solidFill>
-                        </a:rPr>
-                        <a:t>行覆盖率</a:t>
-                      </a:r>
-                    </a:p>
-                  </a:txBody>
-                  <a:tcPr>
-                    <a:solidFill>
-                      <a:srgbClr val="FFFFFF"/>
-                    </a:solidFill>
-                  </a:tcPr>
-                </a:tc>
-                <a:tc>
-                  <a:txBody>
-                    <a:bodyPr/>
-                    <a:lstStyle/>
-                    <a:p>
-                      <a:r>
-                        <a:rPr sz="1300">
-                          <a:solidFill>
-                            <a:srgbClr val="1A202C"/>
-                          </a:solidFill>
-                        </a:rPr>
-                        <a:t>39.3%</a:t>
-                      </a:r>
-                    </a:p>
-                  </a:txBody>
-                  <a:tcPr>
-                    <a:solidFill>
-                      <a:srgbClr val="FFFFFF"/>
-                    </a:solidFill>
-                  </a:tcPr>
-                </a:tc>
-                <a:tc>
-                  <a:txBody>
-                    <a:bodyPr/>
-                    <a:lstStyle/>
-                    <a:p>
-                      <a:r>
-                        <a:rPr sz="1300">
-                          <a:solidFill>
-                            <a:srgbClr val="1A202C"/>
-                          </a:solidFill>
-                        </a:rPr>
-                        <a:t>91.3%</a:t>
-                      </a:r>
-                    </a:p>
-                  </a:txBody>
-                  <a:tcPr>
-                    <a:solidFill>
-                      <a:srgbClr val="FFFFFF"/>
-                    </a:solidFill>
-                  </a:tcPr>
-                </a:tc>
-                <a:tc>
-                  <a:txBody>
-                    <a:bodyPr/>
-                    <a:lstStyle/>
-                    <a:p>
-                      <a:r>
-                        <a:rPr sz="1300">
-                          <a:solidFill>
-                            <a:srgbClr val="1A202C"/>
-                          </a:solidFill>
-                        </a:rPr>
-                        <a:t>+52.0pp</a:t>
-                      </a:r>
-                    </a:p>
-                  </a:txBody>
-                  <a:tcPr>
-                    <a:solidFill>
-                      <a:srgbClr val="FFFFFF"/>
-                    </a:solidFill>
-                  </a:tcPr>
-                </a:tc>
-              </a:tr>
-              <a:tr h="384048">
-                <a:tc>
-                  <a:txBody>
-                    <a:bodyPr/>
-                    <a:lstStyle/>
-                    <a:p>
-                      <a:r>
-                        <a:rPr sz="1300">
-                          <a:solidFill>
-                            <a:srgbClr val="1A202C"/>
-                          </a:solidFill>
-                        </a:rPr>
-                        <a:t>发布计划</a:t>
-                      </a:r>
-                    </a:p>
-                  </a:txBody>
-                  <a:tcPr>
-                    <a:solidFill>
-                      <a:srgbClr val="F2F5F9"/>
-                    </a:solidFill>
-                  </a:tcPr>
-                </a:tc>
-                <a:tc>
-                  <a:txBody>
-                    <a:bodyPr/>
-                    <a:lstStyle/>
-                    <a:p>
-                      <a:r>
-                        <a:rPr sz="1300">
-                          <a:solidFill>
-                            <a:srgbClr val="1A202C"/>
-                          </a:solidFill>
-                        </a:rPr>
-                        <a:t>四态 + 轮询</a:t>
-                      </a:r>
-                    </a:p>
-                  </a:txBody>
-                  <a:tcPr>
-                    <a:solidFill>
-                      <a:srgbClr val="F2F5F9"/>
-                    </a:solidFill>
-                  </a:tcPr>
-                </a:tc>
-                <a:tc>
-                  <a:txBody>
-                    <a:bodyPr/>
-                    <a:lstStyle/>
-                    <a:p>
-                      <a:r>
-                        <a:rPr sz="1300">
-                          <a:solidFill>
-                            <a:srgbClr val="1A202C"/>
-                          </a:solidFill>
-                        </a:rPr>
-                        <a:t>六态 + SSE + 跳过</a:t>
-                      </a:r>
-                    </a:p>
-                  </a:txBody>
-                  <a:tcPr>
-                    <a:solidFill>
-                      <a:srgbClr val="F2F5F9"/>
-                    </a:solidFill>
-                  </a:tcPr>
-                </a:tc>
-                <a:tc>
-                  <a:txBody>
-                    <a:bodyPr/>
-                    <a:lstStyle/>
-                    <a:p>
-                      <a:r>
-                        <a:rPr sz="1300">
-                          <a:solidFill>
-                            <a:srgbClr val="1A202C"/>
-                          </a:solidFill>
-                        </a:rPr>
-                        <a:t>新能力</a:t>
-                      </a:r>
-                    </a:p>
-                  </a:txBody>
-                  <a:tcPr>
-                    <a:solidFill>
-                      <a:srgbClr val="F2F5F9"/>
-                    </a:solidFill>
-                  </a:tcPr>
-                </a:tc>
-              </a:tr>
-              <a:tr h="384048">
-                <a:tc>
-                  <a:txBody>
-                    <a:bodyPr/>
-                    <a:lstStyle/>
-                    <a:p>
-                      <a:r>
-                        <a:rPr sz="1300">
-                          <a:solidFill>
-                            <a:srgbClr val="1A202C"/>
-                          </a:solidFill>
-                        </a:rPr>
-                        <a:t>团队管理</a:t>
-                      </a:r>
-                    </a:p>
-                  </a:txBody>
-                  <a:tcPr>
-                    <a:solidFill>
-                      <a:srgbClr val="FFFFFF"/>
-                    </a:solidFill>
-                  </a:tcPr>
-                </a:tc>
-                <a:tc>
-                  <a:txBody>
-                    <a:bodyPr/>
-                    <a:lstStyle/>
-                    <a:p>
-                      <a:r>
-                        <a:rPr sz="1300">
-                          <a:solidFill>
-                            <a:srgbClr val="1A202C"/>
-                          </a:solidFill>
-                        </a:rPr>
-                        <a:t>仅管理员</a:t>
-                      </a:r>
-                    </a:p>
-                  </a:txBody>
-                  <a:tcPr>
-                    <a:solidFill>
-                      <a:srgbClr val="FFFFFF"/>
-                    </a:solidFill>
-                  </a:tcPr>
-                </a:tc>
-                <a:tc>
-                  <a:txBody>
-                    <a:bodyPr/>
-                    <a:lstStyle/>
-                    <a:p>
-                      <a:r>
-                        <a:rPr sz="1300">
-                          <a:solidFill>
-                            <a:srgbClr val="1A202C"/>
-                          </a:solidFill>
-                        </a:rPr>
-                        <a:t>owner 自助（成员/转移/关联）</a:t>
-                      </a:r>
-                    </a:p>
-                  </a:txBody>
-                  <a:tcPr>
-                    <a:solidFill>
-                      <a:srgbClr val="FFFFFF"/>
-                    </a:solidFill>
-                  </a:tcPr>
-                </a:tc>
-                <a:tc>
-                  <a:txBody>
-                    <a:bodyPr/>
-                    <a:lstStyle/>
-                    <a:p>
-                      <a:r>
-                        <a:rPr sz="1300">
-                          <a:solidFill>
-                            <a:srgbClr val="1A202C"/>
-                          </a:solidFill>
-                        </a:rPr>
-                        <a:t>新能力</a:t>
-                      </a:r>
-                    </a:p>
-                  </a:txBody>
-                  <a:tcPr>
-                    <a:solidFill>
-                      <a:srgbClr val="FFFFFF"/>
-                    </a:solidFill>
-                  </a:tcPr>
-                </a:tc>
-              </a:tr>
-              <a:tr h="384048">
-                <a:tc>
-                  <a:txBody>
-                    <a:bodyPr/>
-                    <a:lstStyle/>
-                    <a:p>
-                      <a:r>
-                        <a:rPr sz="1300">
-                          <a:solidFill>
-                            <a:srgbClr val="1A202C"/>
-                          </a:solidFill>
-                        </a:rPr>
-                        <a:t>交付</a:t>
-                      </a:r>
-                    </a:p>
-                  </a:txBody>
-                  <a:tcPr>
-                    <a:solidFill>
-                      <a:srgbClr val="F2F5F9"/>
-                    </a:solidFill>
-                  </a:tcPr>
-                </a:tc>
-                <a:tc>
-                  <a:txBody>
-                    <a:bodyPr/>
-                    <a:lstStyle/>
-                    <a:p>
-                      <a:r>
-                        <a:rPr sz="1300">
-                          <a:solidFill>
-                            <a:srgbClr val="1A202C"/>
-                          </a:solidFill>
-                        </a:rPr>
-                        <a:t>宿主构建</a:t>
-                      </a:r>
-                    </a:p>
-                  </a:txBody>
-                  <a:tcPr>
-                    <a:solidFill>
-                      <a:srgbClr val="F2F5F9"/>
-                    </a:solidFill>
-                  </a:tcPr>
-                </a:tc>
-                <a:tc>
-                  <a:txBody>
-                    <a:bodyPr/>
-                    <a:lstStyle/>
-                    <a:p>
-                      <a:r>
-                        <a:rPr sz="1300">
-                          <a:solidFill>
-                            <a:srgbClr val="1A202C"/>
-                          </a:solidFill>
-                        </a:rPr>
-                        <a:t>自包含多阶段镜像 Dockerfile.build</a:t>
-                      </a:r>
-                    </a:p>
-                  </a:txBody>
-                  <a:tcPr>
-                    <a:solidFill>
-                      <a:srgbClr val="F2F5F9"/>
-                    </a:solidFill>
-                  </a:tcPr>
-                </a:tc>
-                <a:tc>
-                  <a:txBody>
-                    <a:bodyPr/>
-                    <a:lstStyle/>
-                    <a:p>
-                      <a:r>
-                        <a:rPr sz="1300">
-                          <a:solidFill>
-                            <a:srgbClr val="1A202C"/>
-                          </a:solidFill>
-                        </a:rPr>
-                        <a:t>新能力</a:t>
-                      </a:r>
-                    </a:p>
-                  </a:txBody>
-                  <a:tcPr>
-                    <a:solidFill>
-                      <a:srgbClr val="F2F5F9"/>
-                    </a:solidFill>
-                  </a:tcPr>
-                </a:tc>
-              </a:tr>
-              <a:tr h="384048">
-                <a:tc>
-                  <a:txBody>
-                    <a:bodyPr/>
-                    <a:lstStyle/>
-                    <a:p>
-                      <a:r>
-                        <a:rPr sz="1300">
-                          <a:solidFill>
-                            <a:srgbClr val="1A202C"/>
-                          </a:solidFill>
-                        </a:rPr>
-                        <a:t>工程结构</a:t>
-                      </a:r>
-                    </a:p>
-                  </a:txBody>
-                  <a:tcPr>
-                    <a:solidFill>
-                      <a:srgbClr val="FFFFFF"/>
-                    </a:solidFill>
-                  </a:tcPr>
-                </a:tc>
-                <a:tc>
-                  <a:txBody>
-                    <a:bodyPr/>
-                    <a:lstStyle/>
-                    <a:p>
-                      <a:r>
-                        <a:rPr sz="1300">
-                          <a:solidFill>
-                            <a:srgbClr val="1A202C"/>
-                          </a:solidFill>
-                        </a:rPr>
-                        <a:t>admin_handler 1358 行</a:t>
-                      </a:r>
-                    </a:p>
-                  </a:txBody>
-                  <a:tcPr>
-                    <a:solidFill>
-                      <a:srgbClr val="FFFFFF"/>
-                    </a:solidFill>
-                  </a:tcPr>
-                </a:tc>
-                <a:tc>
-                  <a:txBody>
-                    <a:bodyPr/>
-                    <a:lstStyle/>
-                    <a:p>
-                      <a:r>
-                        <a:rPr sz="1300">
-                          <a:solidFill>
-                            <a:srgbClr val="1A202C"/>
-                          </a:solidFill>
-                        </a:rPr>
-                        <a:t>122 行；UI 分子包、一页一文件；DTO 化</a:t>
-                      </a:r>
-                    </a:p>
-                  </a:txBody>
-                  <a:tcPr>
-                    <a:solidFill>
-                      <a:srgbClr val="FFFFFF"/>
-                    </a:solidFill>
-                  </a:tcPr>
-                </a:tc>
-                <a:tc>
-                  <a:txBody>
-                    <a:bodyPr/>
-                    <a:lstStyle/>
-                    <a:p>
-                      <a:r>
-                        <a:rPr sz="1300">
-                          <a:solidFill>
-                            <a:srgbClr val="1A202C"/>
-                          </a:solidFill>
-                        </a:rPr>
-                        <a:t>可维护性</a:t>
-                      </a:r>
-                    </a:p>
-                  </a:txBody>
-                  <a:tcPr>
-                    <a:solidFill>
-                      <a:srgbClr val="FFFFFF"/>
-                    </a:solidFill>
-                  </a:tcPr>
-                </a:tc>
-              </a:tr>
-            </a:tbl>
-          </a:graphicData>
-        </a:graphic>
-      </p:graphicFrame>
+        </p:nvSpPr>
+        <p:spPr>
+          <a:xfrm>
+            <a:off x="502920" y="1463040"/>
+            <a:ext cx="2679192" cy="1783080"/>
+          </a:xfrm>
+          <a:prstGeom prst="roundRect">
+            <a:avLst>
+              <a:gd name="adj" fmla="val 8000"/>
+            </a:avLst>
+          </a:prstGeom>
+          <a:solidFill>
+            <a:srgbClr val="F2F5F9"/>
+          </a:solidFill>
+          <a:ln w="9525">
+            <a:solidFill>
+              <a:srgbClr val="D5DEE8"/>
+            </a:solidFill>
+          </a:ln>
+          <a:effectLst/>
+        </p:spPr>
+        <p:style>
+          <a:lnRef idx="1">
+            <a:schemeClr val="accent1"/>
+          </a:lnRef>
+          <a:fillRef idx="3">
+            <a:schemeClr val="accent1"/>
+          </a:fillRef>
+          <a:effectRef idx="2">
+            <a:schemeClr val="accent1"/>
+          </a:effectRef>
+          <a:fontRef idx="minor">
+            <a:schemeClr val="lt1"/>
+          </a:fontRef>
+        </p:style>
+        <p:txBody>
+          <a:bodyPr rtlCol="0" anchor="ctr" wrap="square" lIns="109728" tIns="36576" bIns="36576"/>
+          <a:lstStyle/>
+          <a:p>
+            <a:pPr algn="ctr"/>
+            <a:r>
+              <a:rPr sz="1300" b="0">
+                <a:solidFill>
+                  <a:srgbClr val="5A6370"/>
+                </a:solidFill>
+              </a:rPr>
+              <a:t>单测用例</a:t>
+            </a:r>
+          </a:p>
+          <a:p>
+            <a:pPr algn="ctr"/>
+            <a:r>
+              <a:rPr sz="2200" b="1">
+                <a:solidFill>
+                  <a:srgbClr val="2B6CB0"/>
+                </a:solidFill>
+              </a:rPr>
+              <a:t>154 → 1002</a:t>
+            </a:r>
+          </a:p>
+          <a:p>
+            <a:pPr algn="ctr"/>
+            <a:r>
+              <a:rPr sz="1300" b="0">
+                <a:solidFill>
+                  <a:srgbClr val="1A202C"/>
+                </a:solidFill>
+              </a:rPr>
+              <a:t>×6.5</a:t>
+            </a:r>
+          </a:p>
+        </p:txBody>
+      </p:sp>
+      <p:sp>
+        <p:nvSpPr>
+          <p:cNvPr id="5" name="Rounded Rectangle 4"/>
+          <p:cNvSpPr/>
+          <p:nvPr/>
+        </p:nvSpPr>
+        <p:spPr>
+          <a:xfrm>
+            <a:off x="3346704" y="1463040"/>
+            <a:ext cx="2679192" cy="1783080"/>
+          </a:xfrm>
+          <a:prstGeom prst="roundRect">
+            <a:avLst>
+              <a:gd name="adj" fmla="val 8000"/>
+            </a:avLst>
+          </a:prstGeom>
+          <a:solidFill>
+            <a:srgbClr val="F2F5F9"/>
+          </a:solidFill>
+          <a:ln w="9525">
+            <a:solidFill>
+              <a:srgbClr val="D5DEE8"/>
+            </a:solidFill>
+          </a:ln>
+          <a:effectLst/>
+        </p:spPr>
+        <p:style>
+          <a:lnRef idx="1">
+            <a:schemeClr val="accent1"/>
+          </a:lnRef>
+          <a:fillRef idx="3">
+            <a:schemeClr val="accent1"/>
+          </a:fillRef>
+          <a:effectRef idx="2">
+            <a:schemeClr val="accent1"/>
+          </a:effectRef>
+          <a:fontRef idx="minor">
+            <a:schemeClr val="lt1"/>
+          </a:fontRef>
+        </p:style>
+        <p:txBody>
+          <a:bodyPr rtlCol="0" anchor="ctr" wrap="square" lIns="109728" tIns="36576" bIns="36576"/>
+          <a:lstStyle/>
+          <a:p>
+            <a:pPr algn="ctr"/>
+            <a:r>
+              <a:rPr sz="1300" b="0">
+                <a:solidFill>
+                  <a:srgbClr val="5A6370"/>
+                </a:solidFill>
+              </a:rPr>
+              <a:t>行覆盖率</a:t>
+            </a:r>
+          </a:p>
+          <a:p>
+            <a:pPr algn="ctr"/>
+            <a:r>
+              <a:rPr sz="2200" b="1">
+                <a:solidFill>
+                  <a:srgbClr val="2B6CB0"/>
+                </a:solidFill>
+              </a:rPr>
+              <a:t>39.3% → 91.3%</a:t>
+            </a:r>
+          </a:p>
+          <a:p>
+            <a:pPr algn="ctr"/>
+            <a:r>
+              <a:rPr sz="1300" b="0">
+                <a:solidFill>
+                  <a:srgbClr val="1A202C"/>
+                </a:solidFill>
+              </a:rPr>
+              <a:t>+52.0pp</a:t>
+            </a:r>
+          </a:p>
+        </p:txBody>
+      </p:sp>
+      <p:sp>
+        <p:nvSpPr>
+          <p:cNvPr id="6" name="Rounded Rectangle 5"/>
+          <p:cNvSpPr/>
+          <p:nvPr/>
+        </p:nvSpPr>
+        <p:spPr>
+          <a:xfrm>
+            <a:off x="6190488" y="1463040"/>
+            <a:ext cx="2679192" cy="1783080"/>
+          </a:xfrm>
+          <a:prstGeom prst="roundRect">
+            <a:avLst>
+              <a:gd name="adj" fmla="val 8000"/>
+            </a:avLst>
+          </a:prstGeom>
+          <a:solidFill>
+            <a:srgbClr val="F2F5F9"/>
+          </a:solidFill>
+          <a:ln w="9525">
+            <a:solidFill>
+              <a:srgbClr val="D5DEE8"/>
+            </a:solidFill>
+          </a:ln>
+          <a:effectLst/>
+        </p:spPr>
+        <p:style>
+          <a:lnRef idx="1">
+            <a:schemeClr val="accent1"/>
+          </a:lnRef>
+          <a:fillRef idx="3">
+            <a:schemeClr val="accent1"/>
+          </a:fillRef>
+          <a:effectRef idx="2">
+            <a:schemeClr val="accent1"/>
+          </a:effectRef>
+          <a:fontRef idx="minor">
+            <a:schemeClr val="lt1"/>
+          </a:fontRef>
+        </p:style>
+        <p:txBody>
+          <a:bodyPr rtlCol="0" anchor="ctr" wrap="square" lIns="109728" tIns="36576" bIns="36576"/>
+          <a:lstStyle/>
+          <a:p>
+            <a:pPr algn="ctr"/>
+            <a:r>
+              <a:rPr sz="1300" b="0">
+                <a:solidFill>
+                  <a:srgbClr val="5A6370"/>
+                </a:solidFill>
+              </a:rPr>
+              <a:t>最大可发布包体</a:t>
+            </a:r>
+          </a:p>
+          <a:p>
+            <a:pPr algn="ctr"/>
+            <a:r>
+              <a:rPr sz="2200" b="1">
+                <a:solidFill>
+                  <a:srgbClr val="2B6CB0"/>
+                </a:solidFill>
+              </a:rPr>
+              <a:t>32 MiB → 200 MiB</a:t>
+            </a:r>
+          </a:p>
+          <a:p>
+            <a:pPr algn="ctr"/>
+            <a:r>
+              <a:rPr sz="1300" b="0">
+                <a:solidFill>
+                  <a:srgbClr val="1A202C"/>
+                </a:solidFill>
+              </a:rPr>
+              <a:t>×6 以上</a:t>
+            </a:r>
+          </a:p>
+        </p:txBody>
+      </p:sp>
+      <p:sp>
+        <p:nvSpPr>
+          <p:cNvPr id="7" name="Rounded Rectangle 6"/>
+          <p:cNvSpPr/>
+          <p:nvPr/>
+        </p:nvSpPr>
+        <p:spPr>
+          <a:xfrm>
+            <a:off x="9034272" y="1463040"/>
+            <a:ext cx="2679192" cy="1783080"/>
+          </a:xfrm>
+          <a:prstGeom prst="roundRect">
+            <a:avLst>
+              <a:gd name="adj" fmla="val 8000"/>
+            </a:avLst>
+          </a:prstGeom>
+          <a:solidFill>
+            <a:srgbClr val="F2F5F9"/>
+          </a:solidFill>
+          <a:ln w="9525">
+            <a:solidFill>
+              <a:srgbClr val="D5DEE8"/>
+            </a:solidFill>
+          </a:ln>
+          <a:effectLst/>
+        </p:spPr>
+        <p:style>
+          <a:lnRef idx="1">
+            <a:schemeClr val="accent1"/>
+          </a:lnRef>
+          <a:fillRef idx="3">
+            <a:schemeClr val="accent1"/>
+          </a:fillRef>
+          <a:effectRef idx="2">
+            <a:schemeClr val="accent1"/>
+          </a:effectRef>
+          <a:fontRef idx="minor">
+            <a:schemeClr val="lt1"/>
+          </a:fontRef>
+        </p:style>
+        <p:txBody>
+          <a:bodyPr rtlCol="0" anchor="ctr" wrap="square" lIns="109728" tIns="36576" bIns="36576"/>
+          <a:lstStyle/>
+          <a:p>
+            <a:pPr algn="ctr"/>
+            <a:r>
+              <a:rPr sz="1300" b="0">
+                <a:solidFill>
+                  <a:srgbClr val="5A6370"/>
+                </a:solidFill>
+              </a:rPr>
+              <a:t>发布峰值内存</a:t>
+            </a:r>
+          </a:p>
+          <a:p>
+            <a:pPr algn="ctr"/>
+            <a:r>
+              <a:rPr sz="2200" b="1">
+                <a:solidFill>
+                  <a:srgbClr val="2B6CB0"/>
+                </a:solidFill>
+              </a:rPr>
+              <a:t>≈3× 包体 → 291 MiB</a:t>
+            </a:r>
+          </a:p>
+          <a:p>
+            <a:pPr algn="ctr"/>
+            <a:r>
+              <a:rPr sz="1300" b="0">
+                <a:solidFill>
+                  <a:srgbClr val="1A202C"/>
+                </a:solidFill>
+              </a:rPr>
+              <a:t>与包体解耦</a:t>
+            </a:r>
+          </a:p>
+        </p:txBody>
+      </p:sp>
+      <p:sp>
+        <p:nvSpPr>
+          <p:cNvPr id="8" name="TextBox 7"/>
+          <p:cNvSpPr txBox="1"/>
+          <p:nvPr/>
+        </p:nvSpPr>
+        <p:spPr>
+          <a:xfrm>
+            <a:off x="502920" y="3520440"/>
+            <a:ext cx="11155680" cy="310896"/>
+          </a:xfrm>
+          <a:prstGeom prst="rect">
+            <a:avLst/>
+          </a:prstGeom>
+          <a:noFill/>
+        </p:spPr>
+        <p:txBody>
+          <a:bodyPr wrap="square">
+            <a:spAutoFit/>
+          </a:bodyPr>
+          <a:lstStyle/>
+          <a:p>
+            <a:pPr algn="l"/>
+            <a:r>
+              <a:rPr sz="1300" b="1">
+                <a:solidFill>
+                  <a:srgbClr val="5A6370"/>
+                </a:solidFill>
+              </a:rPr>
+              <a:t>新增能力</a:t>
+            </a:r>
+          </a:p>
+        </p:txBody>
+      </p:sp>
+      <p:sp>
+        <p:nvSpPr>
+          <p:cNvPr id="9" name="Rounded Rectangle 8"/>
+          <p:cNvSpPr/>
+          <p:nvPr/>
+        </p:nvSpPr>
+        <p:spPr>
+          <a:xfrm>
+            <a:off x="502920" y="3886200"/>
+            <a:ext cx="3639312" cy="1051560"/>
+          </a:xfrm>
+          <a:prstGeom prst="roundRect">
+            <a:avLst>
+              <a:gd name="adj" fmla="val 8000"/>
+            </a:avLst>
+          </a:prstGeom>
+          <a:solidFill>
+            <a:srgbClr val="2B6CB0"/>
+          </a:solidFill>
+          <a:ln>
+            <a:noFill/>
+          </a:ln>
+          <a:effectLst/>
+        </p:spPr>
+        <p:style>
+          <a:lnRef idx="1">
+            <a:schemeClr val="accent1"/>
+          </a:lnRef>
+          <a:fillRef idx="3">
+            <a:schemeClr val="accent1"/>
+          </a:fillRef>
+          <a:effectRef idx="2">
+            <a:schemeClr val="accent1"/>
+          </a:effectRef>
+          <a:fontRef idx="minor">
+            <a:schemeClr val="lt1"/>
+          </a:fontRef>
+        </p:style>
+        <p:txBody>
+          <a:bodyPr rtlCol="0" anchor="ctr" wrap="square" lIns="109728" tIns="36576" bIns="36576"/>
+          <a:lstStyle/>
+          <a:p>
+            <a:pPr algn="l"/>
+            <a:r>
+              <a:rPr sz="1400" b="1">
+                <a:solidFill>
+                  <a:srgbClr val="FFFFFF"/>
+                </a:solidFill>
+              </a:rPr>
+              <a:t>发布计划六态 + SSE</a:t>
+            </a:r>
+          </a:p>
+          <a:p>
+            <a:pPr algn="l"/>
+            <a:r>
+              <a:rPr sz="1200" b="0">
+                <a:solidFill>
+                  <a:srgbClr val="FFFFFF"/>
+                </a:solidFill>
+              </a:rPr>
+              <a:t>实时进度 · 索引 SHA256 校验 · 手动跳过</a:t>
+            </a:r>
+          </a:p>
+        </p:txBody>
+      </p:sp>
+      <p:sp>
+        <p:nvSpPr>
+          <p:cNvPr id="10" name="Rounded Rectangle 9"/>
+          <p:cNvSpPr/>
+          <p:nvPr/>
+        </p:nvSpPr>
+        <p:spPr>
+          <a:xfrm>
+            <a:off x="4288536" y="3886200"/>
+            <a:ext cx="3639312" cy="1051560"/>
+          </a:xfrm>
+          <a:prstGeom prst="roundRect">
+            <a:avLst>
+              <a:gd name="adj" fmla="val 8000"/>
+            </a:avLst>
+          </a:prstGeom>
+          <a:solidFill>
+            <a:srgbClr val="2B6CB0"/>
+          </a:solidFill>
+          <a:ln>
+            <a:noFill/>
+          </a:ln>
+          <a:effectLst/>
+        </p:spPr>
+        <p:style>
+          <a:lnRef idx="1">
+            <a:schemeClr val="accent1"/>
+          </a:lnRef>
+          <a:fillRef idx="3">
+            <a:schemeClr val="accent1"/>
+          </a:fillRef>
+          <a:effectRef idx="2">
+            <a:schemeClr val="accent1"/>
+          </a:effectRef>
+          <a:fontRef idx="minor">
+            <a:schemeClr val="lt1"/>
+          </a:fontRef>
+        </p:style>
+        <p:txBody>
+          <a:bodyPr rtlCol="0" anchor="ctr" wrap="square" lIns="109728" tIns="36576" bIns="36576"/>
+          <a:lstStyle/>
+          <a:p>
+            <a:pPr algn="l"/>
+            <a:r>
+              <a:rPr sz="1400" b="1">
+                <a:solidFill>
+                  <a:srgbClr val="FFFFFF"/>
+                </a:solidFill>
+              </a:rPr>
+              <a:t>团队 owner 自助</a:t>
+            </a:r>
+          </a:p>
+          <a:p>
+            <a:pPr algn="l"/>
+            <a:r>
+              <a:rPr sz="1200" b="0">
+                <a:solidFill>
+                  <a:srgbClr val="FFFFFF"/>
+                </a:solidFill>
+              </a:rPr>
+              <a:t>成员 / 转移 owner / 团队关联，门户弹窗</a:t>
+            </a:r>
+          </a:p>
+        </p:txBody>
+      </p:sp>
+      <p:sp>
+        <p:nvSpPr>
+          <p:cNvPr id="11" name="Rounded Rectangle 10"/>
+          <p:cNvSpPr/>
+          <p:nvPr/>
+        </p:nvSpPr>
+        <p:spPr>
+          <a:xfrm>
+            <a:off x="8074152" y="3886200"/>
+            <a:ext cx="3639312" cy="1051560"/>
+          </a:xfrm>
+          <a:prstGeom prst="roundRect">
+            <a:avLst>
+              <a:gd name="adj" fmla="val 8000"/>
+            </a:avLst>
+          </a:prstGeom>
+          <a:solidFill>
+            <a:srgbClr val="2B6CB0"/>
+          </a:solidFill>
+          <a:ln>
+            <a:noFill/>
+          </a:ln>
+          <a:effectLst/>
+        </p:spPr>
+        <p:style>
+          <a:lnRef idx="1">
+            <a:schemeClr val="accent1"/>
+          </a:lnRef>
+          <a:fillRef idx="3">
+            <a:schemeClr val="accent1"/>
+          </a:fillRef>
+          <a:effectRef idx="2">
+            <a:schemeClr val="accent1"/>
+          </a:effectRef>
+          <a:fontRef idx="minor">
+            <a:schemeClr val="lt1"/>
+          </a:fontRef>
+        </p:style>
+        <p:txBody>
+          <a:bodyPr rtlCol="0" anchor="ctr" wrap="square" lIns="109728" tIns="36576" bIns="36576"/>
+          <a:lstStyle/>
+          <a:p>
+            <a:pPr algn="l"/>
+            <a:r>
+              <a:rPr sz="1400" b="1">
+                <a:solidFill>
+                  <a:srgbClr val="FFFFFF"/>
+                </a:solidFill>
+              </a:rPr>
+              <a:t>自包含构建镜像</a:t>
+            </a:r>
+          </a:p>
+          <a:p>
+            <a:pPr algn="l"/>
+            <a:r>
+              <a:rPr sz="1200" b="0">
+                <a:solidFill>
+                  <a:srgbClr val="FFFFFF"/>
+                </a:solidFill>
+              </a:rPr>
+              <a:t>Dockerfile.build 多阶段，评审无需本地工具链</a:t>
+            </a:r>
+          </a:p>
+        </p:txBody>
+      </p:sp>
+      <p:sp>
+        <p:nvSpPr>
+          <p:cNvPr id="12" name="Rounded Rectangle 11"/>
+          <p:cNvSpPr/>
+          <p:nvPr/>
+        </p:nvSpPr>
+        <p:spPr>
+          <a:xfrm>
+            <a:off x="502920" y="5166360"/>
+            <a:ext cx="11155680" cy="868680"/>
+          </a:xfrm>
+          <a:prstGeom prst="roundRect">
+            <a:avLst>
+              <a:gd name="adj" fmla="val 8000"/>
+            </a:avLst>
+          </a:prstGeom>
+          <a:solidFill>
+            <a:srgbClr val="F2F5F9"/>
+          </a:solidFill>
+          <a:ln w="9525">
+            <a:solidFill>
+              <a:srgbClr val="D5DEE8"/>
+            </a:solidFill>
+          </a:ln>
+          <a:effectLst/>
+        </p:spPr>
+        <p:style>
+          <a:lnRef idx="1">
+            <a:schemeClr val="accent1"/>
+          </a:lnRef>
+          <a:fillRef idx="3">
+            <a:schemeClr val="accent1"/>
+          </a:fillRef>
+          <a:effectRef idx="2">
+            <a:schemeClr val="accent1"/>
+          </a:effectRef>
+          <a:fontRef idx="minor">
+            <a:schemeClr val="lt1"/>
+          </a:fontRef>
+        </p:style>
+        <p:txBody>
+          <a:bodyPr rtlCol="0" anchor="ctr" wrap="square" lIns="109728" tIns="36576" bIns="36576"/>
+          <a:lstStyle/>
+          <a:p>
+            <a:pPr algn="l"/>
+            <a:r>
+              <a:rPr sz="1300" b="1">
+                <a:solidFill>
+                  <a:srgbClr val="2B6CB0"/>
+                </a:solidFill>
+              </a:rPr>
+              <a:t>工程结构同期改造</a:t>
+            </a:r>
+          </a:p>
+          <a:p>
+            <a:pPr algn="l"/>
+            <a:r>
+              <a:rPr sz="1200" b="0">
+                <a:solidFill>
+                  <a:srgbClr val="1A202C"/>
+                </a:solidFill>
+              </a:rPr>
+              <a:t>admin_handler 1358 → 122 行；ui 按站点面分子包、一页一文件；响应体统一 DTO 序列化；+80 个提交</a:t>
+            </a:r>
+          </a:p>
+        </p:txBody>
+      </p:sp>
     </p:spTree>
   </p:cSld>
   <p:clrMapOvr>

--- a/docs/finals-roadshow-v0.3.0.pptx
+++ b/docs/finals-roadshow-v0.3.0.pptx
@@ -4558,21 +4558,343 @@
                   <a:srgbClr val="FFFFFF"/>
                 </a:solidFill>
               </a:rPr>
-              <a:t>实用价值与落地</a:t>
-            </a:r>
-          </a:p>
-        </p:txBody>
-      </p:sp>
-      <p:sp>
-        <p:nvSpPr>
-          <p:cNvPr id="4" name="TextBox 3"/>
+              <a:t>实用价值与落地：四类真实用法</a:t>
+            </a:r>
+          </a:p>
+        </p:txBody>
+      </p:sp>
+      <p:sp>
+        <p:nvSpPr>
+          <p:cNvPr id="4" name="Rounded Rectangle 3"/>
+          <p:cNvSpPr/>
+          <p:nvPr/>
+        </p:nvSpPr>
+        <p:spPr>
+          <a:xfrm>
+            <a:off x="502920" y="1463040"/>
+            <a:ext cx="5440680" cy="1645920"/>
+          </a:xfrm>
+          <a:prstGeom prst="roundRect">
+            <a:avLst>
+              <a:gd name="adj" fmla="val 8000"/>
+            </a:avLst>
+          </a:prstGeom>
+          <a:solidFill>
+            <a:srgbClr val="F2F5F9"/>
+          </a:solidFill>
+          <a:ln w="9525">
+            <a:solidFill>
+              <a:srgbClr val="D5DEE8"/>
+            </a:solidFill>
+          </a:ln>
+          <a:effectLst/>
+        </p:spPr>
+        <p:style>
+          <a:lnRef idx="1">
+            <a:schemeClr val="accent1"/>
+          </a:lnRef>
+          <a:fillRef idx="3">
+            <a:schemeClr val="accent1"/>
+          </a:fillRef>
+          <a:effectRef idx="2">
+            <a:schemeClr val="accent1"/>
+          </a:effectRef>
+          <a:fontRef idx="minor">
+            <a:schemeClr val="lt1"/>
+          </a:fontRef>
+        </p:style>
+        <p:txBody>
+          <a:bodyPr rtlCol="0" anchor="ctr" wrap="square" lIns="109728" tIns="36576" bIns="36576"/>
+          <a:lstStyle/>
+          <a:p>
+            <a:pPr algn="l"/>
+            <a:r>
+              <a:rPr sz="1600" b="1">
+                <a:solidFill>
+                  <a:srgbClr val="2B6CB0"/>
+                </a:solidFill>
+              </a:rPr>
+              <a:t>内网常驻私有仓</a:t>
+            </a:r>
+          </a:p>
+          <a:p>
+            <a:pPr algn="l"/>
+            <a:r>
+              <a:rPr sz="1300" b="0">
+                <a:solidFill>
+                  <a:srgbClr val="1A202C"/>
+                </a:solidFill>
+              </a:rPr>
+              <a:t>流水线与机器在内网：发布、拉依赖、门户取 Token 全在本地完成</a:t>
+            </a:r>
+          </a:p>
+        </p:txBody>
+      </p:sp>
+      <p:sp>
+        <p:nvSpPr>
+          <p:cNvPr id="5" name="Rounded Rectangle 4"/>
+          <p:cNvSpPr/>
+          <p:nvPr/>
+        </p:nvSpPr>
+        <p:spPr>
+          <a:xfrm>
+            <a:off x="6172200" y="1463040"/>
+            <a:ext cx="5440680" cy="1645920"/>
+          </a:xfrm>
+          <a:prstGeom prst="roundRect">
+            <a:avLst>
+              <a:gd name="adj" fmla="val 8000"/>
+            </a:avLst>
+          </a:prstGeom>
+          <a:solidFill>
+            <a:srgbClr val="F2F5F9"/>
+          </a:solidFill>
+          <a:ln w="9525">
+            <a:solidFill>
+              <a:srgbClr val="D5DEE8"/>
+            </a:solidFill>
+          </a:ln>
+          <a:effectLst/>
+        </p:spPr>
+        <p:style>
+          <a:lnRef idx="1">
+            <a:schemeClr val="accent1"/>
+          </a:lnRef>
+          <a:fillRef idx="3">
+            <a:schemeClr val="accent1"/>
+          </a:fillRef>
+          <a:effectRef idx="2">
+            <a:schemeClr val="accent1"/>
+          </a:effectRef>
+          <a:fontRef idx="minor">
+            <a:schemeClr val="lt1"/>
+          </a:fontRef>
+        </p:style>
+        <p:txBody>
+          <a:bodyPr rtlCol="0" anchor="ctr" wrap="square" lIns="109728" tIns="36576" bIns="36576"/>
+          <a:lstStyle/>
+          <a:p>
+            <a:pPr algn="l"/>
+            <a:r>
+              <a:rPr sz="1600" b="1">
+                <a:solidFill>
+                  <a:srgbClr val="2B6CB0"/>
+                </a:solidFill>
+              </a:rPr>
+              <a:t>预演仓</a:t>
+            </a:r>
+          </a:p>
+          <a:p>
+            <a:pPr algn="l"/>
+            <a:r>
+              <a:rPr sz="1300" b="0">
+                <a:solidFill>
+                  <a:srgbClr val="1A202C"/>
+                </a:solidFill>
+              </a:rPr>
+              <a:t>发布不可逆，先在私有仓预演；管理员直通 overwrite，同版本可反复发</a:t>
+            </a:r>
+          </a:p>
+        </p:txBody>
+      </p:sp>
+      <p:sp>
+        <p:nvSpPr>
+          <p:cNvPr id="6" name="Rounded Rectangle 5"/>
+          <p:cNvSpPr/>
+          <p:nvPr/>
+        </p:nvSpPr>
+        <p:spPr>
+          <a:xfrm>
+            <a:off x="502920" y="3291840"/>
+            <a:ext cx="5440680" cy="1645920"/>
+          </a:xfrm>
+          <a:prstGeom prst="roundRect">
+            <a:avLst>
+              <a:gd name="adj" fmla="val 8000"/>
+            </a:avLst>
+          </a:prstGeom>
+          <a:solidFill>
+            <a:srgbClr val="F2F5F9"/>
+          </a:solidFill>
+          <a:ln w="9525">
+            <a:solidFill>
+              <a:srgbClr val="D5DEE8"/>
+            </a:solidFill>
+          </a:ln>
+          <a:effectLst/>
+        </p:spPr>
+        <p:style>
+          <a:lnRef idx="1">
+            <a:schemeClr val="accent1"/>
+          </a:lnRef>
+          <a:fillRef idx="3">
+            <a:schemeClr val="accent1"/>
+          </a:fillRef>
+          <a:effectRef idx="2">
+            <a:schemeClr val="accent1"/>
+          </a:effectRef>
+          <a:fontRef idx="minor">
+            <a:schemeClr val="lt1"/>
+          </a:fontRef>
+        </p:style>
+        <p:txBody>
+          <a:bodyPr rtlCol="0" anchor="ctr" wrap="square" lIns="109728" tIns="36576" bIns="36576"/>
+          <a:lstStyle/>
+          <a:p>
+            <a:pPr algn="l"/>
+            <a:r>
+              <a:rPr sz="1600" b="1">
+                <a:solidFill>
+                  <a:srgbClr val="2B6CB0"/>
+                </a:solidFill>
+              </a:rPr>
+              <a:t>多仓体系</a:t>
+            </a:r>
+          </a:p>
+          <a:p>
+            <a:pPr algn="l"/>
+            <a:r>
+              <a:rPr sz="1300" b="0">
+                <a:solidFill>
+                  <a:srgbClr val="1A202C"/>
+                </a:solidFill>
+              </a:rPr>
+              <a:t>官方 / 私有 / 演示站并存；解析诊断直接回答「这个包该发到哪」</a:t>
+            </a:r>
+          </a:p>
+        </p:txBody>
+      </p:sp>
+      <p:sp>
+        <p:nvSpPr>
+          <p:cNvPr id="7" name="Rounded Rectangle 6"/>
+          <p:cNvSpPr/>
+          <p:nvPr/>
+        </p:nvSpPr>
+        <p:spPr>
+          <a:xfrm>
+            <a:off x="6172200" y="3291840"/>
+            <a:ext cx="5440680" cy="1645920"/>
+          </a:xfrm>
+          <a:prstGeom prst="roundRect">
+            <a:avLst>
+              <a:gd name="adj" fmla="val 8000"/>
+            </a:avLst>
+          </a:prstGeom>
+          <a:solidFill>
+            <a:srgbClr val="F2F5F9"/>
+          </a:solidFill>
+          <a:ln w="9525">
+            <a:solidFill>
+              <a:srgbClr val="D5DEE8"/>
+            </a:solidFill>
+          </a:ln>
+          <a:effectLst/>
+        </p:spPr>
+        <p:style>
+          <a:lnRef idx="1">
+            <a:schemeClr val="accent1"/>
+          </a:lnRef>
+          <a:fillRef idx="3">
+            <a:schemeClr val="accent1"/>
+          </a:fillRef>
+          <a:effectRef idx="2">
+            <a:schemeClr val="accent1"/>
+          </a:effectRef>
+          <a:fontRef idx="minor">
+            <a:schemeClr val="lt1"/>
+          </a:fontRef>
+        </p:style>
+        <p:txBody>
+          <a:bodyPr rtlCol="0" anchor="ctr" wrap="square" lIns="109728" tIns="36576" bIns="36576"/>
+          <a:lstStyle/>
+          <a:p>
+            <a:pPr algn="l"/>
+            <a:r>
+              <a:rPr sz="1600" b="1">
+                <a:solidFill>
+                  <a:srgbClr val="2B6CB0"/>
+                </a:solidFill>
+              </a:rPr>
+              <a:t>CI 与工具链集成</a:t>
+            </a:r>
+          </a:p>
+          <a:p>
+            <a:pPr algn="l"/>
+            <a:r>
+              <a:rPr sz="1300" b="0">
+                <a:solidFill>
+                  <a:srgbClr val="1A202C"/>
+                </a:solidFill>
+              </a:rPr>
+              <a:t>公开只读 API 取包索引与统计；cjpm 客户端无需改造；镜像一条命令起</a:t>
+            </a:r>
+          </a:p>
+        </p:txBody>
+      </p:sp>
+      <p:sp>
+        <p:nvSpPr>
+          <p:cNvPr id="8" name="Rounded Rectangle 7"/>
+          <p:cNvSpPr/>
+          <p:nvPr/>
+        </p:nvSpPr>
+        <p:spPr>
+          <a:xfrm>
+            <a:off x="502920" y="5074920"/>
+            <a:ext cx="11155680" cy="868680"/>
+          </a:xfrm>
+          <a:prstGeom prst="roundRect">
+            <a:avLst>
+              <a:gd name="adj" fmla="val 8000"/>
+            </a:avLst>
+          </a:prstGeom>
+          <a:solidFill>
+            <a:srgbClr val="2B6CB0"/>
+          </a:solidFill>
+          <a:ln>
+            <a:noFill/>
+          </a:ln>
+          <a:effectLst/>
+        </p:spPr>
+        <p:style>
+          <a:lnRef idx="1">
+            <a:schemeClr val="accent1"/>
+          </a:lnRef>
+          <a:fillRef idx="3">
+            <a:schemeClr val="accent1"/>
+          </a:fillRef>
+          <a:effectRef idx="2">
+            <a:schemeClr val="accent1"/>
+          </a:effectRef>
+          <a:fontRef idx="minor">
+            <a:schemeClr val="lt1"/>
+          </a:fontRef>
+        </p:style>
+        <p:txBody>
+          <a:bodyPr rtlCol="0" anchor="ctr" wrap="square" lIns="109728" tIns="36576" bIns="36576"/>
+          <a:lstStyle/>
+          <a:p>
+            <a:pPr algn="l"/>
+            <a:r>
+              <a:rPr sz="1800" b="1">
+                <a:solidFill>
+                  <a:srgbClr val="FFFFFF"/>
+                </a:solidFill>
+              </a:rPr>
+              <a:t>把中心仓缺的那一半补上：内网可用 · 预演安全 · 多仓可查</a:t>
+            </a:r>
+          </a:p>
+        </p:txBody>
+      </p:sp>
+      <p:sp>
+        <p:nvSpPr>
+          <p:cNvPr id="9" name="TextBox 8"/>
           <p:cNvSpPr txBox="1"/>
           <p:nvPr/>
         </p:nvSpPr>
         <p:spPr>
           <a:xfrm>
-            <a:off x="731520" y="1554480"/>
-            <a:ext cx="10972800" cy="4206240"/>
+            <a:off x="548640" y="6126480"/>
+            <a:ext cx="11064240" cy="411480"/>
           </a:xfrm>
           <a:prstGeom prst="rect">
             <a:avLst/>
@@ -4585,78 +4907,14 @@
           </a:bodyPr>
           <a:lstStyle/>
           <a:p>
-            <a:pPr>
-              <a:spcAft>
-                <a:spcPts val="1400"/>
-              </a:spcAft>
-            </a:pPr>
-            <a:r>
-              <a:rPr sz="1900">
-                <a:solidFill>
-                  <a:srgbClr val="1A202C"/>
-                </a:solidFill>
-              </a:rPr>
-              <a:t>内网常驻私有仓：团队日常发布、门户取 Token、管理后台维护团队与上游</a:t>
-            </a:r>
-          </a:p>
-          <a:p>
-            <a:pPr>
-              <a:spcAft>
-                <a:spcPts val="1400"/>
-              </a:spcAft>
-            </a:pPr>
-            <a:r>
-              <a:rPr sz="1900">
-                <a:solidFill>
-                  <a:srgbClr val="1A202C"/>
-                </a:solidFill>
-              </a:rPr>
-              <a:t>预演仓：发布不可逆 → 先在私有仓预演，同一版本在管理员直通下可反复发</a:t>
-            </a:r>
-          </a:p>
-          <a:p>
-            <a:pPr>
-              <a:spcAft>
-                <a:spcPts val="1400"/>
-              </a:spcAft>
-            </a:pPr>
-            <a:r>
-              <a:rPr sz="1900">
-                <a:solidFill>
-                  <a:srgbClr val="1A202C"/>
-                </a:solidFill>
-              </a:rPr>
-              <a:t>多仓体系：官方 / 私有 / 演示空站并存，解析诊断直接回答「该发哪个仓」</a:t>
-            </a:r>
-          </a:p>
-          <a:p>
-            <a:pPr>
-              <a:spcAft>
-                <a:spcPts val="1400"/>
-              </a:spcAft>
-            </a:pPr>
-            <a:r>
-              <a:rPr sz="1900">
-                <a:solidFill>
-                  <a:srgbClr val="1A202C"/>
-                </a:solidFill>
-              </a:rPr>
-              <a:t>CI 集成：公开只读 API（/api/stats、/api/packages...）与 cjpm 客户端兼容</a:t>
-            </a:r>
-          </a:p>
-          <a:p>
-            <a:pPr>
-              <a:spcAft>
-                <a:spcPts val="1400"/>
-              </a:spcAft>
-            </a:pPr>
-            <a:r>
-              <a:rPr sz="1900">
-                <a:solidFill>
-                  <a:srgbClr val="1A202C"/>
-                </a:solidFill>
-              </a:rPr>
-              <a:t>一键部署：docker compose + 数据卷 + 优雅关闭；镜像 ghcr.io/ystyle/cjreg:v0.3.0</a:t>
+            <a:pPr algn="l"/>
+            <a:r>
+              <a:rPr sz="1300" b="0">
+                <a:solidFill>
+                  <a:srgbClr val="5A6370"/>
+                </a:solidFill>
+              </a:rPr>
+              <a:t>生产实例已常驻内网（团队真实在用）｜镜像 ghcr.io/ystyle/cjreg:v0.3.0｜tag v0.3.0</a:t>
             </a:r>
           </a:p>
         </p:txBody>
@@ -9011,8 +9269,8 @@
         </p:nvSpPr>
         <p:spPr>
           <a:xfrm>
-            <a:off x="640080" y="1554480"/>
-            <a:ext cx="10972800" cy="2926080"/>
+            <a:off x="502920" y="1261872"/>
+            <a:ext cx="5486400" cy="292608"/>
           </a:xfrm>
           <a:prstGeom prst="rect">
             <a:avLst/>
@@ -9025,77 +9283,82 @@
           </a:bodyPr>
           <a:lstStyle/>
           <a:p>
-            <a:pPr>
-              <a:spcAft>
-                <a:spcPts val="1200"/>
-              </a:spcAft>
-            </a:pPr>
-            <a:r>
-              <a:rPr sz="1800">
-                <a:solidFill>
-                  <a:srgbClr val="1A202C"/>
-                </a:solidFill>
-              </a:rPr>
-              <a:t>六态：pending → running → waiting_index（等索引）→ completed / failed；另有 skipped（手动跳过）</a:t>
-            </a:r>
-          </a:p>
-          <a:p>
-            <a:pPr>
-              <a:spcAft>
-                <a:spcPts val="1200"/>
-              </a:spcAft>
-            </a:pPr>
-            <a:r>
-              <a:rPr sz="1800">
-                <a:solidFill>
-                  <a:srgbClr val="1A202C"/>
-                </a:solidFill>
-              </a:rPr>
-              <a:t>「等索引」判据：版本出现、且 sha256 一致，避免索引先到、制品后到造成假完成</a:t>
-            </a:r>
-          </a:p>
-          <a:p>
-            <a:pPr>
-              <a:spcAft>
-                <a:spcPts val="1200"/>
-              </a:spcAft>
-            </a:pPr>
-            <a:r>
-              <a:rPr sz="1800">
-                <a:solidFill>
-                  <a:srgbClr val="1A202C"/>
-                </a:solidFill>
-              </a:rPr>
-              <a:t>SSE：GET /api/admin/publish-plans/:id/events（event: progress / done），轮询接口保留兜底</a:t>
-            </a:r>
-          </a:p>
-          <a:p>
-            <a:pPr>
-              <a:spcAft>
-                <a:spcPts val="1200"/>
-              </a:spcAft>
-            </a:pPr>
-            <a:r>
-              <a:rPr sz="1800">
-                <a:solidFill>
-                  <a:srgbClr val="1A202C"/>
-                </a:solidFill>
-              </a:rPr>
-              <a:t>页面实时滚动；可手动跳过某项；中断后计划状态可恢复（保持 pending 而不是假 running）</a:t>
-            </a:r>
-          </a:p>
-        </p:txBody>
-      </p:sp>
-      <p:sp>
-        <p:nvSpPr>
-          <p:cNvPr id="5" name="TextBox 4"/>
+            <a:pPr algn="l"/>
+            <a:r>
+              <a:rPr sz="1300" b="1">
+                <a:solidFill>
+                  <a:srgbClr val="5A6370"/>
+                </a:solidFill>
+              </a:rPr>
+              <a:t>计划项状态机</a:t>
+            </a:r>
+          </a:p>
+        </p:txBody>
+      </p:sp>
+      <p:sp>
+        <p:nvSpPr>
+          <p:cNvPr id="5" name="Rounded Rectangle 4"/>
+          <p:cNvSpPr/>
+          <p:nvPr/>
+        </p:nvSpPr>
+        <p:spPr>
+          <a:xfrm>
+            <a:off x="502920" y="1600200"/>
+            <a:ext cx="2331720" cy="731520"/>
+          </a:xfrm>
+          <a:prstGeom prst="roundRect">
+            <a:avLst>
+              <a:gd name="adj" fmla="val 8000"/>
+            </a:avLst>
+          </a:prstGeom>
+          <a:solidFill>
+            <a:srgbClr val="8A94A3"/>
+          </a:solidFill>
+          <a:ln>
+            <a:noFill/>
+          </a:ln>
+          <a:effectLst/>
+        </p:spPr>
+        <p:style>
+          <a:lnRef idx="1">
+            <a:schemeClr val="accent1"/>
+          </a:lnRef>
+          <a:fillRef idx="3">
+            <a:schemeClr val="accent1"/>
+          </a:fillRef>
+          <a:effectRef idx="2">
+            <a:schemeClr val="accent1"/>
+          </a:effectRef>
+          <a:fontRef idx="minor">
+            <a:schemeClr val="lt1"/>
+          </a:fontRef>
+        </p:style>
+        <p:txBody>
+          <a:bodyPr rtlCol="0" anchor="ctr" wrap="square" lIns="109728" tIns="36576" bIns="36576"/>
+          <a:lstStyle/>
+          <a:p>
+            <a:pPr algn="ctr"/>
+            <a:r>
+              <a:rPr sz="1500" b="1">
+                <a:solidFill>
+                  <a:srgbClr val="FFFFFF"/>
+                </a:solidFill>
+              </a:rPr>
+              <a:t>pending</a:t>
+            </a:r>
+          </a:p>
+        </p:txBody>
+      </p:sp>
+      <p:sp>
+        <p:nvSpPr>
+          <p:cNvPr id="6" name="TextBox 5"/>
           <p:cNvSpPr txBox="1"/>
           <p:nvPr/>
         </p:nvSpPr>
         <p:spPr>
           <a:xfrm>
-            <a:off x="640080" y="4846320"/>
-            <a:ext cx="10972800" cy="1371600"/>
+            <a:off x="502920" y="2377440"/>
+            <a:ext cx="2331720" cy="274320"/>
           </a:xfrm>
           <a:prstGeom prst="rect">
             <a:avLst/>
@@ -9108,14 +9371,829 @@
           </a:bodyPr>
           <a:lstStyle/>
           <a:p>
+            <a:pPr algn="ctr"/>
+            <a:r>
+              <a:rPr sz="1100" b="0">
+                <a:solidFill>
+                  <a:srgbClr val="5A6370"/>
+                </a:solidFill>
+              </a:rPr>
+              <a:t>待执行</a:t>
+            </a:r>
+          </a:p>
+        </p:txBody>
+      </p:sp>
+      <p:sp>
+        <p:nvSpPr>
+          <p:cNvPr id="7" name="TextBox 6"/>
+          <p:cNvSpPr txBox="1"/>
+          <p:nvPr/>
+        </p:nvSpPr>
+        <p:spPr>
+          <a:xfrm>
+            <a:off x="2834639" y="1709928"/>
+            <a:ext cx="384048" cy="457200"/>
+          </a:xfrm>
+          <a:prstGeom prst="rect">
+            <a:avLst/>
+          </a:prstGeom>
+          <a:noFill/>
+        </p:spPr>
+        <p:txBody>
+          <a:bodyPr wrap="square">
+            <a:spAutoFit/>
+          </a:bodyPr>
+          <a:lstStyle/>
+          <a:p>
+            <a:pPr algn="ctr"/>
+            <a:r>
+              <a:rPr sz="1800" b="1">
+                <a:solidFill>
+                  <a:srgbClr val="2B6CB0"/>
+                </a:solidFill>
+              </a:rPr>
+              <a:t>→</a:t>
+            </a:r>
+          </a:p>
+        </p:txBody>
+      </p:sp>
+      <p:sp>
+        <p:nvSpPr>
+          <p:cNvPr id="8" name="Rounded Rectangle 7"/>
+          <p:cNvSpPr/>
+          <p:nvPr/>
+        </p:nvSpPr>
+        <p:spPr>
+          <a:xfrm>
+            <a:off x="3218687" y="1600200"/>
+            <a:ext cx="2331720" cy="731520"/>
+          </a:xfrm>
+          <a:prstGeom prst="roundRect">
+            <a:avLst>
+              <a:gd name="adj" fmla="val 8000"/>
+            </a:avLst>
+          </a:prstGeom>
+          <a:solidFill>
+            <a:srgbClr val="2B6CB0"/>
+          </a:solidFill>
+          <a:ln>
+            <a:noFill/>
+          </a:ln>
+          <a:effectLst/>
+        </p:spPr>
+        <p:style>
+          <a:lnRef idx="1">
+            <a:schemeClr val="accent1"/>
+          </a:lnRef>
+          <a:fillRef idx="3">
+            <a:schemeClr val="accent1"/>
+          </a:fillRef>
+          <a:effectRef idx="2">
+            <a:schemeClr val="accent1"/>
+          </a:effectRef>
+          <a:fontRef idx="minor">
+            <a:schemeClr val="lt1"/>
+          </a:fontRef>
+        </p:style>
+        <p:txBody>
+          <a:bodyPr rtlCol="0" anchor="ctr" wrap="square" lIns="109728" tIns="36576" bIns="36576"/>
+          <a:lstStyle/>
+          <a:p>
+            <a:pPr algn="ctr"/>
+            <a:r>
+              <a:rPr sz="1500" b="1">
+                <a:solidFill>
+                  <a:srgbClr val="FFFFFF"/>
+                </a:solidFill>
+              </a:rPr>
+              <a:t>running</a:t>
+            </a:r>
+          </a:p>
+        </p:txBody>
+      </p:sp>
+      <p:sp>
+        <p:nvSpPr>
+          <p:cNvPr id="9" name="TextBox 8"/>
+          <p:cNvSpPr txBox="1"/>
+          <p:nvPr/>
+        </p:nvSpPr>
+        <p:spPr>
+          <a:xfrm>
+            <a:off x="3218687" y="2377440"/>
+            <a:ext cx="2331720" cy="274320"/>
+          </a:xfrm>
+          <a:prstGeom prst="rect">
+            <a:avLst/>
+          </a:prstGeom>
+          <a:noFill/>
+        </p:spPr>
+        <p:txBody>
+          <a:bodyPr wrap="square">
+            <a:spAutoFit/>
+          </a:bodyPr>
+          <a:lstStyle/>
+          <a:p>
+            <a:pPr algn="ctr"/>
+            <a:r>
+              <a:rPr sz="1100" b="0">
+                <a:solidFill>
+                  <a:srgbClr val="5A6370"/>
+                </a:solidFill>
+              </a:rPr>
+              <a:t>执行中</a:t>
+            </a:r>
+          </a:p>
+        </p:txBody>
+      </p:sp>
+      <p:sp>
+        <p:nvSpPr>
+          <p:cNvPr id="10" name="TextBox 9"/>
+          <p:cNvSpPr txBox="1"/>
+          <p:nvPr/>
+        </p:nvSpPr>
+        <p:spPr>
+          <a:xfrm>
+            <a:off x="5550407" y="1709928"/>
+            <a:ext cx="384048" cy="457200"/>
+          </a:xfrm>
+          <a:prstGeom prst="rect">
+            <a:avLst/>
+          </a:prstGeom>
+          <a:noFill/>
+        </p:spPr>
+        <p:txBody>
+          <a:bodyPr wrap="square">
+            <a:spAutoFit/>
+          </a:bodyPr>
+          <a:lstStyle/>
+          <a:p>
+            <a:pPr algn="ctr"/>
+            <a:r>
+              <a:rPr sz="1800" b="1">
+                <a:solidFill>
+                  <a:srgbClr val="2B6CB0"/>
+                </a:solidFill>
+              </a:rPr>
+              <a:t>→</a:t>
+            </a:r>
+          </a:p>
+        </p:txBody>
+      </p:sp>
+      <p:sp>
+        <p:nvSpPr>
+          <p:cNvPr id="11" name="Rounded Rectangle 10"/>
+          <p:cNvSpPr/>
+          <p:nvPr/>
+        </p:nvSpPr>
+        <p:spPr>
+          <a:xfrm>
+            <a:off x="5934455" y="1600200"/>
+            <a:ext cx="2331720" cy="731520"/>
+          </a:xfrm>
+          <a:prstGeom prst="roundRect">
+            <a:avLst>
+              <a:gd name="adj" fmla="val 8000"/>
+            </a:avLst>
+          </a:prstGeom>
+          <a:solidFill>
+            <a:srgbClr val="B47A1F"/>
+          </a:solidFill>
+          <a:ln>
+            <a:noFill/>
+          </a:ln>
+          <a:effectLst/>
+        </p:spPr>
+        <p:style>
+          <a:lnRef idx="1">
+            <a:schemeClr val="accent1"/>
+          </a:lnRef>
+          <a:fillRef idx="3">
+            <a:schemeClr val="accent1"/>
+          </a:fillRef>
+          <a:effectRef idx="2">
+            <a:schemeClr val="accent1"/>
+          </a:effectRef>
+          <a:fontRef idx="minor">
+            <a:schemeClr val="lt1"/>
+          </a:fontRef>
+        </p:style>
+        <p:txBody>
+          <a:bodyPr rtlCol="0" anchor="ctr" wrap="square" lIns="109728" tIns="36576" bIns="36576"/>
+          <a:lstStyle/>
+          <a:p>
+            <a:pPr algn="ctr"/>
+            <a:r>
+              <a:rPr sz="1500" b="1">
+                <a:solidFill>
+                  <a:srgbClr val="FFFFFF"/>
+                </a:solidFill>
+              </a:rPr>
+              <a:t>waiting_index</a:t>
+            </a:r>
+          </a:p>
+        </p:txBody>
+      </p:sp>
+      <p:sp>
+        <p:nvSpPr>
+          <p:cNvPr id="12" name="TextBox 11"/>
+          <p:cNvSpPr txBox="1"/>
+          <p:nvPr/>
+        </p:nvSpPr>
+        <p:spPr>
+          <a:xfrm>
+            <a:off x="5934455" y="2377440"/>
+            <a:ext cx="2331720" cy="274320"/>
+          </a:xfrm>
+          <a:prstGeom prst="rect">
+            <a:avLst/>
+          </a:prstGeom>
+          <a:noFill/>
+        </p:spPr>
+        <p:txBody>
+          <a:bodyPr wrap="square">
+            <a:spAutoFit/>
+          </a:bodyPr>
+          <a:lstStyle/>
+          <a:p>
+            <a:pPr algn="ctr"/>
+            <a:r>
+              <a:rPr sz="1100" b="0">
+                <a:solidFill>
+                  <a:srgbClr val="5A6370"/>
+                </a:solidFill>
+              </a:rPr>
+              <a:t>等索引（可见）</a:t>
+            </a:r>
+          </a:p>
+        </p:txBody>
+      </p:sp>
+      <p:sp>
+        <p:nvSpPr>
+          <p:cNvPr id="13" name="TextBox 12"/>
+          <p:cNvSpPr txBox="1"/>
+          <p:nvPr/>
+        </p:nvSpPr>
+        <p:spPr>
+          <a:xfrm>
+            <a:off x="8266175" y="1709928"/>
+            <a:ext cx="384048" cy="457200"/>
+          </a:xfrm>
+          <a:prstGeom prst="rect">
+            <a:avLst/>
+          </a:prstGeom>
+          <a:noFill/>
+        </p:spPr>
+        <p:txBody>
+          <a:bodyPr wrap="square">
+            <a:spAutoFit/>
+          </a:bodyPr>
+          <a:lstStyle/>
+          <a:p>
+            <a:pPr algn="ctr"/>
+            <a:r>
+              <a:rPr sz="1800" b="1">
+                <a:solidFill>
+                  <a:srgbClr val="2B6CB0"/>
+                </a:solidFill>
+              </a:rPr>
+              <a:t>→</a:t>
+            </a:r>
+          </a:p>
+        </p:txBody>
+      </p:sp>
+      <p:sp>
+        <p:nvSpPr>
+          <p:cNvPr id="14" name="Rounded Rectangle 13"/>
+          <p:cNvSpPr/>
+          <p:nvPr/>
+        </p:nvSpPr>
+        <p:spPr>
+          <a:xfrm>
+            <a:off x="8650224" y="1600200"/>
+            <a:ext cx="2331720" cy="731520"/>
+          </a:xfrm>
+          <a:prstGeom prst="roundRect">
+            <a:avLst>
+              <a:gd name="adj" fmla="val 8000"/>
+            </a:avLst>
+          </a:prstGeom>
+          <a:solidFill>
+            <a:srgbClr val="2F865A"/>
+          </a:solidFill>
+          <a:ln>
+            <a:noFill/>
+          </a:ln>
+          <a:effectLst/>
+        </p:spPr>
+        <p:style>
+          <a:lnRef idx="1">
+            <a:schemeClr val="accent1"/>
+          </a:lnRef>
+          <a:fillRef idx="3">
+            <a:schemeClr val="accent1"/>
+          </a:fillRef>
+          <a:effectRef idx="2">
+            <a:schemeClr val="accent1"/>
+          </a:effectRef>
+          <a:fontRef idx="minor">
+            <a:schemeClr val="lt1"/>
+          </a:fontRef>
+        </p:style>
+        <p:txBody>
+          <a:bodyPr rtlCol="0" anchor="ctr" wrap="square" lIns="109728" tIns="36576" bIns="36576"/>
+          <a:lstStyle/>
+          <a:p>
+            <a:pPr algn="ctr"/>
+            <a:r>
+              <a:rPr sz="1500" b="1">
+                <a:solidFill>
+                  <a:srgbClr val="FFFFFF"/>
+                </a:solidFill>
+              </a:rPr>
+              <a:t>completed</a:t>
+            </a:r>
+          </a:p>
+        </p:txBody>
+      </p:sp>
+      <p:sp>
+        <p:nvSpPr>
+          <p:cNvPr id="15" name="TextBox 14"/>
+          <p:cNvSpPr txBox="1"/>
+          <p:nvPr/>
+        </p:nvSpPr>
+        <p:spPr>
+          <a:xfrm>
+            <a:off x="8650224" y="2377440"/>
+            <a:ext cx="2331720" cy="274320"/>
+          </a:xfrm>
+          <a:prstGeom prst="rect">
+            <a:avLst/>
+          </a:prstGeom>
+          <a:noFill/>
+        </p:spPr>
+        <p:txBody>
+          <a:bodyPr wrap="square">
+            <a:spAutoFit/>
+          </a:bodyPr>
+          <a:lstStyle/>
+          <a:p>
+            <a:pPr algn="ctr"/>
+            <a:r>
+              <a:rPr sz="1100" b="0">
+                <a:solidFill>
+                  <a:srgbClr val="5A6370"/>
+                </a:solidFill>
+              </a:rPr>
+              <a:t>完成</a:t>
+            </a:r>
+          </a:p>
+        </p:txBody>
+      </p:sp>
+      <p:sp>
+        <p:nvSpPr>
+          <p:cNvPr id="16" name="TextBox 15"/>
+          <p:cNvSpPr txBox="1"/>
+          <p:nvPr/>
+        </p:nvSpPr>
+        <p:spPr>
+          <a:xfrm>
+            <a:off x="502920" y="2761488"/>
+            <a:ext cx="1828800" cy="274320"/>
+          </a:xfrm>
+          <a:prstGeom prst="rect">
+            <a:avLst/>
+          </a:prstGeom>
+          <a:noFill/>
+        </p:spPr>
+        <p:txBody>
+          <a:bodyPr wrap="square">
+            <a:spAutoFit/>
+          </a:bodyPr>
+          <a:lstStyle/>
+          <a:p>
             <a:pPr algn="l"/>
             <a:r>
-              <a:rPr sz="1500" b="0">
+              <a:rPr sz="1200" b="1">
                 <a:solidFill>
                   <a:srgbClr val="5A6370"/>
                 </a:solidFill>
               </a:rPr>
-              <a:t>为什么需要它：发布不可逆 → 推送目标仓时「发没发成功」必须可见、可核验、可跳过，否则一次网络抖动就让人不敢继续</a:t>
+              <a:t>分支</a:t>
+            </a:r>
+          </a:p>
+        </p:txBody>
+      </p:sp>
+      <p:sp>
+        <p:nvSpPr>
+          <p:cNvPr id="17" name="Rounded Rectangle 16"/>
+          <p:cNvSpPr/>
+          <p:nvPr/>
+        </p:nvSpPr>
+        <p:spPr>
+          <a:xfrm>
+            <a:off x="502920" y="3035808"/>
+            <a:ext cx="1417320" cy="548640"/>
+          </a:xfrm>
+          <a:prstGeom prst="roundRect">
+            <a:avLst>
+              <a:gd name="adj" fmla="val 8000"/>
+            </a:avLst>
+          </a:prstGeom>
+          <a:solidFill>
+            <a:srgbClr val="F2F5F9"/>
+          </a:solidFill>
+          <a:ln w="9525">
+            <a:solidFill>
+              <a:srgbClr val="D5DEE8"/>
+            </a:solidFill>
+          </a:ln>
+          <a:effectLst/>
+        </p:spPr>
+        <p:style>
+          <a:lnRef idx="1">
+            <a:schemeClr val="accent1"/>
+          </a:lnRef>
+          <a:fillRef idx="3">
+            <a:schemeClr val="accent1"/>
+          </a:fillRef>
+          <a:effectRef idx="2">
+            <a:schemeClr val="accent1"/>
+          </a:effectRef>
+          <a:fontRef idx="minor">
+            <a:schemeClr val="lt1"/>
+          </a:fontRef>
+        </p:style>
+        <p:txBody>
+          <a:bodyPr rtlCol="0" anchor="ctr" wrap="square" lIns="109728" tIns="36576" bIns="36576"/>
+          <a:lstStyle/>
+          <a:p>
+            <a:pPr algn="ctr"/>
+            <a:r>
+              <a:rPr sz="1400" b="1">
+                <a:solidFill>
+                  <a:srgbClr val="1A202C"/>
+                </a:solidFill>
+              </a:rPr>
+              <a:t>failed</a:t>
+            </a:r>
+          </a:p>
+        </p:txBody>
+      </p:sp>
+      <p:sp>
+        <p:nvSpPr>
+          <p:cNvPr id="18" name="TextBox 17"/>
+          <p:cNvSpPr txBox="1"/>
+          <p:nvPr/>
+        </p:nvSpPr>
+        <p:spPr>
+          <a:xfrm>
+            <a:off x="2011680" y="3108960"/>
+            <a:ext cx="1737360" cy="365760"/>
+          </a:xfrm>
+          <a:prstGeom prst="rect">
+            <a:avLst/>
+          </a:prstGeom>
+          <a:noFill/>
+        </p:spPr>
+        <p:txBody>
+          <a:bodyPr wrap="square">
+            <a:spAutoFit/>
+          </a:bodyPr>
+          <a:lstStyle/>
+          <a:p>
+            <a:pPr algn="l"/>
+            <a:r>
+              <a:rPr sz="1100" b="0">
+                <a:solidFill>
+                  <a:srgbClr val="5A6370"/>
+                </a:solidFill>
+              </a:rPr>
+              <a:t>任一步失败（带原因）</a:t>
+            </a:r>
+          </a:p>
+        </p:txBody>
+      </p:sp>
+      <p:sp>
+        <p:nvSpPr>
+          <p:cNvPr id="19" name="Rounded Rectangle 18"/>
+          <p:cNvSpPr/>
+          <p:nvPr/>
+        </p:nvSpPr>
+        <p:spPr>
+          <a:xfrm>
+            <a:off x="4023360" y="3035808"/>
+            <a:ext cx="1417320" cy="548640"/>
+          </a:xfrm>
+          <a:prstGeom prst="roundRect">
+            <a:avLst>
+              <a:gd name="adj" fmla="val 8000"/>
+            </a:avLst>
+          </a:prstGeom>
+          <a:solidFill>
+            <a:srgbClr val="F2F5F9"/>
+          </a:solidFill>
+          <a:ln w="9525">
+            <a:solidFill>
+              <a:srgbClr val="D5DEE8"/>
+            </a:solidFill>
+          </a:ln>
+          <a:effectLst/>
+        </p:spPr>
+        <p:style>
+          <a:lnRef idx="1">
+            <a:schemeClr val="accent1"/>
+          </a:lnRef>
+          <a:fillRef idx="3">
+            <a:schemeClr val="accent1"/>
+          </a:fillRef>
+          <a:effectRef idx="2">
+            <a:schemeClr val="accent1"/>
+          </a:effectRef>
+          <a:fontRef idx="minor">
+            <a:schemeClr val="lt1"/>
+          </a:fontRef>
+        </p:style>
+        <p:txBody>
+          <a:bodyPr rtlCol="0" anchor="ctr" wrap="square" lIns="109728" tIns="36576" bIns="36576"/>
+          <a:lstStyle/>
+          <a:p>
+            <a:pPr algn="ctr"/>
+            <a:r>
+              <a:rPr sz="1400" b="1">
+                <a:solidFill>
+                  <a:srgbClr val="1A202C"/>
+                </a:solidFill>
+              </a:rPr>
+              <a:t>skipped</a:t>
+            </a:r>
+          </a:p>
+        </p:txBody>
+      </p:sp>
+      <p:sp>
+        <p:nvSpPr>
+          <p:cNvPr id="20" name="TextBox 19"/>
+          <p:cNvSpPr txBox="1"/>
+          <p:nvPr/>
+        </p:nvSpPr>
+        <p:spPr>
+          <a:xfrm>
+            <a:off x="5532120" y="3108960"/>
+            <a:ext cx="1737360" cy="365760"/>
+          </a:xfrm>
+          <a:prstGeom prst="rect">
+            <a:avLst/>
+          </a:prstGeom>
+          <a:noFill/>
+        </p:spPr>
+        <p:txBody>
+          <a:bodyPr wrap="square">
+            <a:spAutoFit/>
+          </a:bodyPr>
+          <a:lstStyle/>
+          <a:p>
+            <a:pPr algn="l"/>
+            <a:r>
+              <a:rPr sz="1100" b="0">
+                <a:solidFill>
+                  <a:srgbClr val="5A6370"/>
+                </a:solidFill>
+              </a:rPr>
+              <a:t>人工跳过该包</a:t>
+            </a:r>
+          </a:p>
+        </p:txBody>
+      </p:sp>
+      <p:sp>
+        <p:nvSpPr>
+          <p:cNvPr id="21" name="Rounded Rectangle 20"/>
+          <p:cNvSpPr/>
+          <p:nvPr/>
+        </p:nvSpPr>
+        <p:spPr>
+          <a:xfrm>
+            <a:off x="502920" y="3977639"/>
+            <a:ext cx="3639312" cy="1188720"/>
+          </a:xfrm>
+          <a:prstGeom prst="roundRect">
+            <a:avLst>
+              <a:gd name="adj" fmla="val 8000"/>
+            </a:avLst>
+          </a:prstGeom>
+          <a:solidFill>
+            <a:srgbClr val="F2F5F9"/>
+          </a:solidFill>
+          <a:ln w="9525">
+            <a:solidFill>
+              <a:srgbClr val="D5DEE8"/>
+            </a:solidFill>
+          </a:ln>
+          <a:effectLst/>
+        </p:spPr>
+        <p:style>
+          <a:lnRef idx="1">
+            <a:schemeClr val="accent1"/>
+          </a:lnRef>
+          <a:fillRef idx="3">
+            <a:schemeClr val="accent1"/>
+          </a:fillRef>
+          <a:effectRef idx="2">
+            <a:schemeClr val="accent1"/>
+          </a:effectRef>
+          <a:fontRef idx="minor">
+            <a:schemeClr val="lt1"/>
+          </a:fontRef>
+        </p:style>
+        <p:txBody>
+          <a:bodyPr rtlCol="0" anchor="ctr" wrap="square" lIns="109728" tIns="36576" bIns="36576"/>
+          <a:lstStyle/>
+          <a:p>
+            <a:pPr algn="l"/>
+            <a:r>
+              <a:rPr sz="1300" b="1">
+                <a:solidFill>
+                  <a:srgbClr val="2B6CB0"/>
+                </a:solidFill>
+              </a:rPr>
+              <a:t>索引判据</a:t>
+            </a:r>
+          </a:p>
+          <a:p>
+            <a:pPr algn="l"/>
+            <a:r>
+              <a:rPr sz="1200" b="0">
+                <a:solidFill>
+                  <a:srgbClr val="1A202C"/>
+                </a:solidFill>
+              </a:rPr>
+              <a:t>版本出现且 sha256 一致才算完成，索引先到的假完成被挡掉</a:t>
+            </a:r>
+          </a:p>
+        </p:txBody>
+      </p:sp>
+      <p:sp>
+        <p:nvSpPr>
+          <p:cNvPr id="22" name="Rounded Rectangle 21"/>
+          <p:cNvSpPr/>
+          <p:nvPr/>
+        </p:nvSpPr>
+        <p:spPr>
+          <a:xfrm>
+            <a:off x="4288536" y="3977639"/>
+            <a:ext cx="3639312" cy="1188720"/>
+          </a:xfrm>
+          <a:prstGeom prst="roundRect">
+            <a:avLst>
+              <a:gd name="adj" fmla="val 8000"/>
+            </a:avLst>
+          </a:prstGeom>
+          <a:solidFill>
+            <a:srgbClr val="F2F5F9"/>
+          </a:solidFill>
+          <a:ln w="9525">
+            <a:solidFill>
+              <a:srgbClr val="D5DEE8"/>
+            </a:solidFill>
+          </a:ln>
+          <a:effectLst/>
+        </p:spPr>
+        <p:style>
+          <a:lnRef idx="1">
+            <a:schemeClr val="accent1"/>
+          </a:lnRef>
+          <a:fillRef idx="3">
+            <a:schemeClr val="accent1"/>
+          </a:fillRef>
+          <a:effectRef idx="2">
+            <a:schemeClr val="accent1"/>
+          </a:effectRef>
+          <a:fontRef idx="minor">
+            <a:schemeClr val="lt1"/>
+          </a:fontRef>
+        </p:style>
+        <p:txBody>
+          <a:bodyPr rtlCol="0" anchor="ctr" wrap="square" lIns="109728" tIns="36576" bIns="36576"/>
+          <a:lstStyle/>
+          <a:p>
+            <a:pPr algn="l"/>
+            <a:r>
+              <a:rPr sz="1300" b="1">
+                <a:solidFill>
+                  <a:srgbClr val="2B6CB0"/>
+                </a:solidFill>
+              </a:rPr>
+              <a:t>SSE 事件</a:t>
+            </a:r>
+          </a:p>
+          <a:p>
+            <a:pPr algn="l"/>
+            <a:r>
+              <a:rPr sz="1200" b="0">
+                <a:solidFill>
+                  <a:srgbClr val="1A202C"/>
+                </a:solidFill>
+              </a:rPr>
+              <a:t>GET /api/admin/publish-plans/:id/events，event: progress / done</a:t>
+            </a:r>
+          </a:p>
+        </p:txBody>
+      </p:sp>
+      <p:sp>
+        <p:nvSpPr>
+          <p:cNvPr id="23" name="Rounded Rectangle 22"/>
+          <p:cNvSpPr/>
+          <p:nvPr/>
+        </p:nvSpPr>
+        <p:spPr>
+          <a:xfrm>
+            <a:off x="8074152" y="3977639"/>
+            <a:ext cx="3639312" cy="1188720"/>
+          </a:xfrm>
+          <a:prstGeom prst="roundRect">
+            <a:avLst>
+              <a:gd name="adj" fmla="val 8000"/>
+            </a:avLst>
+          </a:prstGeom>
+          <a:solidFill>
+            <a:srgbClr val="F2F5F9"/>
+          </a:solidFill>
+          <a:ln w="9525">
+            <a:solidFill>
+              <a:srgbClr val="D5DEE8"/>
+            </a:solidFill>
+          </a:ln>
+          <a:effectLst/>
+        </p:spPr>
+        <p:style>
+          <a:lnRef idx="1">
+            <a:schemeClr val="accent1"/>
+          </a:lnRef>
+          <a:fillRef idx="3">
+            <a:schemeClr val="accent1"/>
+          </a:fillRef>
+          <a:effectRef idx="2">
+            <a:schemeClr val="accent1"/>
+          </a:effectRef>
+          <a:fontRef idx="minor">
+            <a:schemeClr val="lt1"/>
+          </a:fontRef>
+        </p:style>
+        <p:txBody>
+          <a:bodyPr rtlCol="0" anchor="ctr" wrap="square" lIns="109728" tIns="36576" bIns="36576"/>
+          <a:lstStyle/>
+          <a:p>
+            <a:pPr algn="l"/>
+            <a:r>
+              <a:rPr sz="1300" b="1">
+                <a:solidFill>
+                  <a:srgbClr val="2B6CB0"/>
+                </a:solidFill>
+              </a:rPr>
+              <a:t>可恢复</a:t>
+            </a:r>
+          </a:p>
+          <a:p>
+            <a:pPr algn="l"/>
+            <a:r>
+              <a:rPr sz="1200" b="0">
+                <a:solidFill>
+                  <a:srgbClr val="1A202C"/>
+                </a:solidFill>
+              </a:rPr>
+              <a:t>中断后计划保持 pending，不会假装 running</a:t>
+            </a:r>
+          </a:p>
+        </p:txBody>
+      </p:sp>
+      <p:sp>
+        <p:nvSpPr>
+          <p:cNvPr id="24" name="TextBox 23"/>
+          <p:cNvSpPr txBox="1"/>
+          <p:nvPr/>
+        </p:nvSpPr>
+        <p:spPr>
+          <a:xfrm>
+            <a:off x="548640" y="5440680"/>
+            <a:ext cx="11064240" cy="822960"/>
+          </a:xfrm>
+          <a:prstGeom prst="rect">
+            <a:avLst/>
+          </a:prstGeom>
+          <a:noFill/>
+        </p:spPr>
+        <p:txBody>
+          <a:bodyPr wrap="square">
+            <a:spAutoFit/>
+          </a:bodyPr>
+          <a:lstStyle/>
+          <a:p>
+            <a:pPr algn="l"/>
+            <a:r>
+              <a:rPr sz="1400" b="0">
+                <a:solidFill>
+                  <a:srgbClr val="5A6370"/>
+                </a:solidFill>
+              </a:rPr>
+              <a:t>为什么需要：发布不可逆 —— 推送目标仓时「发没发成功」必须可见、可核验、可跳过，否则一次网络抖动就让人不敢继续</a:t>
             </a:r>
           </a:p>
         </p:txBody>
@@ -9920,14 +10998,62 @@
       </p:sp>
       <p:sp>
         <p:nvSpPr>
-          <p:cNvPr id="4" name="TextBox 3"/>
+          <p:cNvPr id="4" name="Rounded Rectangle 3"/>
+          <p:cNvSpPr/>
+          <p:nvPr/>
+        </p:nvSpPr>
+        <p:spPr>
+          <a:xfrm>
+            <a:off x="502920" y="1371600"/>
+            <a:ext cx="5486400" cy="4023360"/>
+          </a:xfrm>
+          <a:prstGeom prst="roundRect">
+            <a:avLst>
+              <a:gd name="adj" fmla="val 8000"/>
+            </a:avLst>
+          </a:prstGeom>
+          <a:solidFill>
+            <a:srgbClr val="F2F5F9"/>
+          </a:solidFill>
+          <a:ln w="9525">
+            <a:solidFill>
+              <a:srgbClr val="D5DEE8"/>
+            </a:solidFill>
+          </a:ln>
+          <a:effectLst/>
+        </p:spPr>
+        <p:style>
+          <a:lnRef idx="1">
+            <a:schemeClr val="accent1"/>
+          </a:lnRef>
+          <a:fillRef idx="3">
+            <a:schemeClr val="accent1"/>
+          </a:fillRef>
+          <a:effectRef idx="2">
+            <a:schemeClr val="accent1"/>
+          </a:effectRef>
+          <a:fontRef idx="minor">
+            <a:schemeClr val="lt1"/>
+          </a:fontRef>
+        </p:style>
+        <p:txBody>
+          <a:bodyPr rtlCol="0" anchor="ctr"/>
+          <a:lstStyle/>
+          <a:p>
+            <a:pPr algn="ctr"/>
+          </a:p>
+        </p:txBody>
+      </p:sp>
+      <p:sp>
+        <p:nvSpPr>
+          <p:cNvPr id="5" name="TextBox 4"/>
           <p:cNvSpPr txBox="1"/>
           <p:nvPr/>
         </p:nvSpPr>
         <p:spPr>
           <a:xfrm>
-            <a:off x="640080" y="1508760"/>
-            <a:ext cx="5577840" cy="4389120"/>
+            <a:off x="731520" y="1536192"/>
+            <a:ext cx="5029200" cy="292608"/>
           </a:xfrm>
           <a:prstGeom prst="rect">
             <a:avLst/>
@@ -9940,77 +11066,28 @@
           </a:bodyPr>
           <a:lstStyle/>
           <a:p>
-            <a:pPr>
-              <a:spcAft>
-                <a:spcPts val="1000"/>
-              </a:spcAft>
-            </a:pPr>
-            <a:r>
-              <a:rPr sz="1600">
-                <a:solidFill>
-                  <a:srgbClr val="1A202C"/>
-                </a:solidFill>
-              </a:rPr>
-              <a:t>1002 个用例：逻辑单测 + 进程内 HTTP 夹具 + 页面渲染</a:t>
-            </a:r>
-          </a:p>
-          <a:p>
-            <a:pPr>
-              <a:spcAft>
-                <a:spcPts val="1000"/>
-              </a:spcAft>
-            </a:pPr>
-            <a:r>
-              <a:rPr sz="1600">
-                <a:solidFill>
-                  <a:srgbClr val="1A202C"/>
-                </a:solidFill>
-              </a:rPr>
-              <a:t>91.3% 行覆盖（cjcov，HTML 报告进 CI artifact）</a:t>
-            </a:r>
-          </a:p>
-          <a:p>
-            <a:pPr>
-              <a:spcAft>
-                <a:spcPts val="1000"/>
-              </a:spcAft>
-            </a:pPr>
-            <a:r>
-              <a:rPr sz="1600">
-                <a:solidFill>
-                  <a:srgbClr val="1A202C"/>
-                </a:solidFill>
-              </a:rPr>
-              <a:t>双仓 e2e 9 步：发布 6 包 → 拓扑推送 → 公开 API → 上游连通 → 三级删除 → 组织 CRUD</a:t>
-            </a:r>
-          </a:p>
-          <a:p>
-            <a:pPr>
-              <a:spcAft>
-                <a:spcPts val="1000"/>
-              </a:spcAft>
-            </a:pPr>
-            <a:r>
-              <a:rPr sz="1600">
-                <a:solidFill>
-                  <a:srgbClr val="1A202C"/>
-                </a:solidFill>
-              </a:rPr>
-              <a:t>CI：构建 + 单测 + 覆盖率 + e2e + 文档站 + 容器冒烟</a:t>
-            </a:r>
-          </a:p>
-        </p:txBody>
-      </p:sp>
-      <p:sp>
-        <p:nvSpPr>
-          <p:cNvPr id="5" name="TextBox 4"/>
+            <a:pPr algn="l"/>
+            <a:r>
+              <a:rPr sz="1300" b="1">
+                <a:solidFill>
+                  <a:srgbClr val="2B6CB0"/>
+                </a:solidFill>
+              </a:rPr>
+              <a:t>测试与验证</a:t>
+            </a:r>
+          </a:p>
+        </p:txBody>
+      </p:sp>
+      <p:sp>
+        <p:nvSpPr>
+          <p:cNvPr id="6" name="TextBox 5"/>
           <p:cNvSpPr txBox="1"/>
           <p:nvPr/>
         </p:nvSpPr>
         <p:spPr>
           <a:xfrm>
-            <a:off x="6400800" y="1508760"/>
-            <a:ext cx="5120640" cy="4389120"/>
+            <a:off x="713232" y="1828800"/>
+            <a:ext cx="5120640" cy="566928"/>
           </a:xfrm>
           <a:prstGeom prst="rect">
             <a:avLst/>
@@ -10023,63 +11100,485 @@
           </a:bodyPr>
           <a:lstStyle/>
           <a:p>
+            <a:pPr algn="l"/>
+            <a:r>
+              <a:rPr sz="2400" b="1">
+                <a:solidFill>
+                  <a:srgbClr val="1A202C"/>
+                </a:solidFill>
+              </a:rPr>
+              <a:t>1002 用例 · 91.3% 行覆盖</a:t>
+            </a:r>
+          </a:p>
+        </p:txBody>
+      </p:sp>
+      <p:sp>
+        <p:nvSpPr>
+          <p:cNvPr id="7" name="TextBox 6"/>
+          <p:cNvSpPr txBox="1"/>
+          <p:nvPr/>
+        </p:nvSpPr>
+        <p:spPr>
+          <a:xfrm>
+            <a:off x="731520" y="2514600"/>
+            <a:ext cx="5074920" cy="2651760"/>
+          </a:xfrm>
+          <a:prstGeom prst="rect">
+            <a:avLst/>
+          </a:prstGeom>
+          <a:noFill/>
+        </p:spPr>
+        <p:txBody>
+          <a:bodyPr wrap="square">
+            <a:spAutoFit/>
+          </a:bodyPr>
+          <a:lstStyle/>
+          <a:p>
             <a:pPr>
               <a:spcAft>
-                <a:spcPts val="1000"/>
+                <a:spcPts val="800"/>
               </a:spcAft>
             </a:pPr>
             <a:r>
-              <a:rPr sz="1600">
+              <a:rPr sz="1200">
                 <a:solidFill>
                   <a:srgbClr val="1A202C"/>
                 </a:solidFill>
               </a:rPr>
-              <a:t>索引缓存命中：16.16 ms → 2.74 ms（5.9×，桩计数证明零回源）</a:t>
+              <a:t>1002 例 = 逻辑单测 + 进程内 HTTP 夹具（真实服务 + 真实 client）+ 页面渲染断言</a:t>
             </a:r>
           </a:p>
           <a:p>
             <a:pPr>
               <a:spcAft>
-                <a:spcPts val="1000"/>
+                <a:spcPts val="800"/>
               </a:spcAft>
             </a:pPr>
             <a:r>
-              <a:rPr sz="1600">
+              <a:rPr sz="1200">
                 <a:solidFill>
                   <a:srgbClr val="1A202C"/>
                 </a:solidFill>
               </a:rPr>
-              <a:t>发布吞吐：74 / 278 / 324 MiB/s（2 / 32 / 200 MiB）</a:t>
+              <a:t>覆盖率：cjcov HTML 报告（CI artifact），逻辑层 85%–95%</a:t>
             </a:r>
           </a:p>
           <a:p>
             <a:pPr>
               <a:spcAft>
-                <a:spcPts val="1000"/>
+                <a:spcPts val="800"/>
               </a:spcAft>
             </a:pPr>
             <a:r>
-              <a:rPr sz="1600">
+              <a:rPr sz="1200">
                 <a:solidFill>
                   <a:srgbClr val="1A202C"/>
                 </a:solidFill>
               </a:rPr>
-              <a:t>并发：1/4/16/64 VU → 88 / 294 / 414 / 356 req/s（拐点 16 VU）</a:t>
+              <a:t>双仓 e2e 9 步：发布 6 包 → 拓扑推送 → 公开 API → 上游连通 → 三级删除 → 组织 CRUD</a:t>
             </a:r>
           </a:p>
           <a:p>
             <a:pPr>
               <a:spcAft>
-                <a:spcPts val="1000"/>
+                <a:spcPts val="800"/>
               </a:spcAft>
             </a:pPr>
             <a:r>
-              <a:rPr sz="1600">
+              <a:rPr sz="1200">
                 <a:solidFill>
                   <a:srgbClr val="1A202C"/>
                 </a:solidFill>
               </a:rPr>
-              <a:t>脚本：scripts/bench.sh + bench-stub-upstream.py + k6</a:t>
+              <a:t>CI 六步：构建 / 单测 / 覆盖率 / e2e / 文档站 / 容器冒烟</a:t>
+            </a:r>
+          </a:p>
+        </p:txBody>
+      </p:sp>
+      <p:sp>
+        <p:nvSpPr>
+          <p:cNvPr id="8" name="Rounded Rectangle 7"/>
+          <p:cNvSpPr/>
+          <p:nvPr/>
+        </p:nvSpPr>
+        <p:spPr>
+          <a:xfrm>
+            <a:off x="6199632" y="1371600"/>
+            <a:ext cx="5486400" cy="4023360"/>
+          </a:xfrm>
+          <a:prstGeom prst="roundRect">
+            <a:avLst>
+              <a:gd name="adj" fmla="val 8000"/>
+            </a:avLst>
+          </a:prstGeom>
+          <a:solidFill>
+            <a:srgbClr val="F2F5F9"/>
+          </a:solidFill>
+          <a:ln w="9525">
+            <a:solidFill>
+              <a:srgbClr val="D5DEE8"/>
+            </a:solidFill>
+          </a:ln>
+          <a:effectLst/>
+        </p:spPr>
+        <p:style>
+          <a:lnRef idx="1">
+            <a:schemeClr val="accent1"/>
+          </a:lnRef>
+          <a:fillRef idx="3">
+            <a:schemeClr val="accent1"/>
+          </a:fillRef>
+          <a:effectRef idx="2">
+            <a:schemeClr val="accent1"/>
+          </a:effectRef>
+          <a:fontRef idx="minor">
+            <a:schemeClr val="lt1"/>
+          </a:fontRef>
+        </p:style>
+        <p:txBody>
+          <a:bodyPr rtlCol="0" anchor="ctr"/>
+          <a:lstStyle/>
+          <a:p>
+            <a:pPr algn="ctr"/>
+          </a:p>
+        </p:txBody>
+      </p:sp>
+      <p:sp>
+        <p:nvSpPr>
+          <p:cNvPr id="9" name="TextBox 8"/>
+          <p:cNvSpPr txBox="1"/>
+          <p:nvPr/>
+        </p:nvSpPr>
+        <p:spPr>
+          <a:xfrm>
+            <a:off x="6428232" y="1536192"/>
+            <a:ext cx="5029200" cy="292608"/>
+          </a:xfrm>
+          <a:prstGeom prst="rect">
+            <a:avLst/>
+          </a:prstGeom>
+          <a:noFill/>
+        </p:spPr>
+        <p:txBody>
+          <a:bodyPr wrap="square">
+            <a:spAutoFit/>
+          </a:bodyPr>
+          <a:lstStyle/>
+          <a:p>
+            <a:pPr algn="l"/>
+            <a:r>
+              <a:rPr sz="1300" b="1">
+                <a:solidFill>
+                  <a:srgbClr val="2B6CB0"/>
+                </a:solidFill>
+              </a:rPr>
+              <a:t>性能（同一脚本可复现）</a:t>
+            </a:r>
+          </a:p>
+        </p:txBody>
+      </p:sp>
+      <p:sp>
+        <p:nvSpPr>
+          <p:cNvPr id="10" name="TextBox 9"/>
+          <p:cNvSpPr txBox="1"/>
+          <p:nvPr/>
+        </p:nvSpPr>
+        <p:spPr>
+          <a:xfrm>
+            <a:off x="6428232" y="1965960"/>
+            <a:ext cx="5029200" cy="329184"/>
+          </a:xfrm>
+          <a:prstGeom prst="rect">
+            <a:avLst/>
+          </a:prstGeom>
+          <a:noFill/>
+        </p:spPr>
+        <p:txBody>
+          <a:bodyPr wrap="square">
+            <a:spAutoFit/>
+          </a:bodyPr>
+          <a:lstStyle/>
+          <a:p>
+            <a:pPr algn="l"/>
+            <a:r>
+              <a:rPr sz="1600" b="1">
+                <a:solidFill>
+                  <a:srgbClr val="1A202C"/>
+                </a:solidFill>
+              </a:rPr>
+              <a:t>索引命中 2.74 ms</a:t>
+            </a:r>
+          </a:p>
+        </p:txBody>
+      </p:sp>
+      <p:sp>
+        <p:nvSpPr>
+          <p:cNvPr id="11" name="TextBox 10"/>
+          <p:cNvSpPr txBox="1"/>
+          <p:nvPr/>
+        </p:nvSpPr>
+        <p:spPr>
+          <a:xfrm>
+            <a:off x="6428232" y="2276856"/>
+            <a:ext cx="5029200" cy="365760"/>
+          </a:xfrm>
+          <a:prstGeom prst="rect">
+            <a:avLst/>
+          </a:prstGeom>
+          <a:noFill/>
+        </p:spPr>
+        <p:txBody>
+          <a:bodyPr wrap="square">
+            <a:spAutoFit/>
+          </a:bodyPr>
+          <a:lstStyle/>
+          <a:p>
+            <a:pPr algn="l"/>
+            <a:r>
+              <a:rPr sz="1100" b="0">
+                <a:solidFill>
+                  <a:srgbClr val="5A6370"/>
+                </a:solidFill>
+              </a:rPr>
+              <a:t>回源 16.16 ms → 5.9×（桩计数证明重查轮零回源）</a:t>
+            </a:r>
+          </a:p>
+        </p:txBody>
+      </p:sp>
+      <p:sp>
+        <p:nvSpPr>
+          <p:cNvPr id="12" name="TextBox 11"/>
+          <p:cNvSpPr txBox="1"/>
+          <p:nvPr/>
+        </p:nvSpPr>
+        <p:spPr>
+          <a:xfrm>
+            <a:off x="6428232" y="2807208"/>
+            <a:ext cx="5029200" cy="329184"/>
+          </a:xfrm>
+          <a:prstGeom prst="rect">
+            <a:avLst/>
+          </a:prstGeom>
+          <a:noFill/>
+        </p:spPr>
+        <p:txBody>
+          <a:bodyPr wrap="square">
+            <a:spAutoFit/>
+          </a:bodyPr>
+          <a:lstStyle/>
+          <a:p>
+            <a:pPr algn="l"/>
+            <a:r>
+              <a:rPr sz="1600" b="1">
+                <a:solidFill>
+                  <a:srgbClr val="1A202C"/>
+                </a:solidFill>
+              </a:rPr>
+              <a:t>发布吞吐 324 MiB/s</a:t>
+            </a:r>
+          </a:p>
+        </p:txBody>
+      </p:sp>
+      <p:sp>
+        <p:nvSpPr>
+          <p:cNvPr id="13" name="TextBox 12"/>
+          <p:cNvSpPr txBox="1"/>
+          <p:nvPr/>
+        </p:nvSpPr>
+        <p:spPr>
+          <a:xfrm>
+            <a:off x="6428232" y="3118103"/>
+            <a:ext cx="5029200" cy="365760"/>
+          </a:xfrm>
+          <a:prstGeom prst="rect">
+            <a:avLst/>
+          </a:prstGeom>
+          <a:noFill/>
+        </p:spPr>
+        <p:txBody>
+          <a:bodyPr wrap="square">
+            <a:spAutoFit/>
+          </a:bodyPr>
+          <a:lstStyle/>
+          <a:p>
+            <a:pPr algn="l"/>
+            <a:r>
+              <a:rPr sz="1100" b="0">
+                <a:solidFill>
+                  <a:srgbClr val="5A6370"/>
+                </a:solidFill>
+              </a:rPr>
+              <a:t>2 / 32 / 200 MiB = 74 / 278 / 324 MiB/s</a:t>
+            </a:r>
+          </a:p>
+        </p:txBody>
+      </p:sp>
+      <p:sp>
+        <p:nvSpPr>
+          <p:cNvPr id="14" name="TextBox 13"/>
+          <p:cNvSpPr txBox="1"/>
+          <p:nvPr/>
+        </p:nvSpPr>
+        <p:spPr>
+          <a:xfrm>
+            <a:off x="6428232" y="3648456"/>
+            <a:ext cx="5029200" cy="329184"/>
+          </a:xfrm>
+          <a:prstGeom prst="rect">
+            <a:avLst/>
+          </a:prstGeom>
+          <a:noFill/>
+        </p:spPr>
+        <p:txBody>
+          <a:bodyPr wrap="square">
+            <a:spAutoFit/>
+          </a:bodyPr>
+          <a:lstStyle/>
+          <a:p>
+            <a:pPr algn="l"/>
+            <a:r>
+              <a:rPr sz="1600" b="1">
+                <a:solidFill>
+                  <a:srgbClr val="1A202C"/>
+                </a:solidFill>
+              </a:rPr>
+              <a:t>并发 414 req/s</a:t>
+            </a:r>
+          </a:p>
+        </p:txBody>
+      </p:sp>
+      <p:sp>
+        <p:nvSpPr>
+          <p:cNvPr id="15" name="TextBox 14"/>
+          <p:cNvSpPr txBox="1"/>
+          <p:nvPr/>
+        </p:nvSpPr>
+        <p:spPr>
+          <a:xfrm>
+            <a:off x="6428232" y="3959352"/>
+            <a:ext cx="5029200" cy="365760"/>
+          </a:xfrm>
+          <a:prstGeom prst="rect">
+            <a:avLst/>
+          </a:prstGeom>
+          <a:noFill/>
+        </p:spPr>
+        <p:txBody>
+          <a:bodyPr wrap="square">
+            <a:spAutoFit/>
+          </a:bodyPr>
+          <a:lstStyle/>
+          <a:p>
+            <a:pPr algn="l"/>
+            <a:r>
+              <a:rPr sz="1100" b="0">
+                <a:solidFill>
+                  <a:srgbClr val="5A6370"/>
+                </a:solidFill>
+              </a:rPr>
+              <a:t>1/4/16/64 VU → 88 / 294 / 414 / 356（拐点 16 VU）</a:t>
+            </a:r>
+          </a:p>
+        </p:txBody>
+      </p:sp>
+      <p:sp>
+        <p:nvSpPr>
+          <p:cNvPr id="16" name="TextBox 15"/>
+          <p:cNvSpPr txBox="1"/>
+          <p:nvPr/>
+        </p:nvSpPr>
+        <p:spPr>
+          <a:xfrm>
+            <a:off x="6428232" y="4489704"/>
+            <a:ext cx="5029200" cy="329184"/>
+          </a:xfrm>
+          <a:prstGeom prst="rect">
+            <a:avLst/>
+          </a:prstGeom>
+          <a:noFill/>
+        </p:spPr>
+        <p:txBody>
+          <a:bodyPr wrap="square">
+            <a:spAutoFit/>
+          </a:bodyPr>
+          <a:lstStyle/>
+          <a:p>
+            <a:pPr algn="l"/>
+            <a:r>
+              <a:rPr sz="1600" b="1">
+                <a:solidFill>
+                  <a:srgbClr val="1A202C"/>
+                </a:solidFill>
+              </a:rPr>
+              <a:t>内存 291 MiB 恒定</a:t>
+            </a:r>
+          </a:p>
+        </p:txBody>
+      </p:sp>
+      <p:sp>
+        <p:nvSpPr>
+          <p:cNvPr id="17" name="TextBox 16"/>
+          <p:cNvSpPr txBox="1"/>
+          <p:nvPr/>
+        </p:nvSpPr>
+        <p:spPr>
+          <a:xfrm>
+            <a:off x="6428232" y="4800600"/>
+            <a:ext cx="5029200" cy="365760"/>
+          </a:xfrm>
+          <a:prstGeom prst="rect">
+            <a:avLst/>
+          </a:prstGeom>
+          <a:noFill/>
+        </p:spPr>
+        <p:txBody>
+          <a:bodyPr wrap="square">
+            <a:spAutoFit/>
+          </a:bodyPr>
+          <a:lstStyle/>
+          <a:p>
+            <a:pPr algn="l"/>
+            <a:r>
+              <a:rPr sz="1100" b="0">
+                <a:solidFill>
+                  <a:srgbClr val="5A6370"/>
+                </a:solidFill>
+              </a:rPr>
+              <a:t>2 / 32 / 200 MiB 发布与 200 MiB 下载均平稳</a:t>
+            </a:r>
+          </a:p>
+        </p:txBody>
+      </p:sp>
+      <p:sp>
+        <p:nvSpPr>
+          <p:cNvPr id="18" name="TextBox 17"/>
+          <p:cNvSpPr txBox="1"/>
+          <p:nvPr/>
+        </p:nvSpPr>
+        <p:spPr>
+          <a:xfrm>
+            <a:off x="548640" y="5623560"/>
+            <a:ext cx="11064240" cy="457200"/>
+          </a:xfrm>
+          <a:prstGeom prst="rect">
+            <a:avLst/>
+          </a:prstGeom>
+          <a:noFill/>
+        </p:spPr>
+        <p:txBody>
+          <a:bodyPr wrap="square">
+            <a:spAutoFit/>
+          </a:bodyPr>
+          <a:lstStyle/>
+          <a:p>
+            <a:pPr algn="l"/>
+            <a:r>
+              <a:rPr sz="1200" b="0">
+                <a:solidFill>
+                  <a:srgbClr val="5A6370"/>
+                </a:solidFill>
+              </a:rPr>
+              <a:t>复现：bash scripts/bench.sh（桩上游 + k6）｜ cjpm test --coverage &amp;&amp; cjcov … -e "*_test.cj"</a:t>
             </a:r>
           </a:p>
         </p:txBody>

--- a/docs/finals-roadshow-v0.3.0.pptx
+++ b/docs/finals-roadshow-v0.3.0.pptx
@@ -4748,7 +4748,7 @@
                   <a:srgbClr val="2B6CB0"/>
                 </a:solidFill>
               </a:rPr>
-              <a:t>多仓体系</a:t>
+              <a:t>多仓体系：一个实例对接多个仓</a:t>
             </a:r>
           </a:p>
           <a:p>
@@ -4759,7 +4759,7 @@
                   <a:srgbClr val="1A202C"/>
                 </a:solidFill>
               </a:rPr>
-              <a:t>官方 / 私有 / 演示站并存；解析诊断直接回答「这个包该发到哪」</a:t>
+              <a:t>读路径（回源/镜像）与写路径（推送目标）两个独立开关；版本对照告诉你目标仓有没有、要不要发</a:t>
             </a:r>
           </a:p>
         </p:txBody>

--- a/docs/finals-roadshow-v0.3.0.pptx
+++ b/docs/finals-roadshow-v0.3.0.pptx
@@ -16,7 +16,6 @@
     <p:sldId id="264" r:id="rId15"/>
     <p:sldId id="265" r:id="rId16"/>
     <p:sldId id="266" r:id="rId17"/>
-    <p:sldId id="267" r:id="rId18"/>
   </p:sldIdLst>
   <p:sldSz cx="12191695" cy="6858000" type="screen4x3"/>
   <p:notesSz cx="6858000" cy="9144000"/>
@@ -653,77 +652,7 @@
           <a:lstStyle/>
           <a:p>
             <a:r>
-              <a:t>【第11页 · 约 40 秒】主动说没做的三件（arm64、瘦身、预热），再给取舍原则——先主链路正确性，再交付形态。主动交代比被问出来得分高。</a:t>
-            </a:r>
-          </a:p>
-        </p:txBody>
-      </p:sp>
-      <p:sp>
-        <p:nvSpPr>
-          <p:cNvPr id="4" name="Slide Number Placeholder 3"/>
-          <p:cNvSpPr>
-            <a:spLocks noGrp="1"/>
-          </p:cNvSpPr>
-          <p:nvPr>
-            <p:ph type="sldNum" idx="5" sz="quarter"/>
-          </p:nvPr>
-        </p:nvSpPr>
-        <p:spPr/>
-      </p:sp>
-    </p:spTree>
-  </p:cSld>
-  <p:clrMapOvr>
-    <a:masterClrMapping/>
-  </p:clrMapOvr>
-</p:notes>
-</file>
-
-<file path=ppt/notesSlides/notesSlide12.xml><?xml version="1.0" encoding="utf-8"?>
-<p:notes xmlns:a="http://schemas.openxmlformats.org/drawingml/2006/main" xmlns:p="http://schemas.openxmlformats.org/presentationml/2006/main" xmlns:r="http://schemas.openxmlformats.org/officeDocument/2006/relationships">
-  <p:cSld>
-    <p:spTree>
-      <p:nvGrpSpPr>
-        <p:cNvPr id="1" name=""/>
-        <p:cNvGrpSpPr/>
-        <p:nvPr/>
-      </p:nvGrpSpPr>
-      <p:grpSpPr>
-        <a:xfrm>
-          <a:off x="0" y="0"/>
-          <a:ext cx="0" cy="0"/>
-          <a:chOff x="0" y="0"/>
-          <a:chExt cx="0" cy="0"/>
-        </a:xfrm>
-      </p:grpSpPr>
-      <p:sp>
-        <p:nvSpPr>
-          <p:cNvPr id="2" name="Slide Image Placeholder 1"/>
-          <p:cNvSpPr>
-            <a:spLocks noGrp="1"/>
-          </p:cNvSpPr>
-          <p:nvPr>
-            <p:ph type="sldImg" idx="2"/>
-          </p:nvPr>
-        </p:nvSpPr>
-        <p:spPr/>
-      </p:sp>
-      <p:sp>
-        <p:nvSpPr>
-          <p:cNvPr id="3" name="Notes Placeholder 2"/>
-          <p:cNvSpPr>
-            <a:spLocks noGrp="1"/>
-          </p:cNvSpPr>
-          <p:nvPr>
-            <p:ph type="body" idx="3" sz="quarter"/>
-          </p:nvPr>
-        </p:nvSpPr>
-        <p:spPr/>
-        <p:txBody>
-          <a:bodyPr/>
-          <a:lstStyle/>
-          <a:p>
-            <a:r>
-              <a:t>【第12页 · 约 50 秒】谢谢 + 给链接（仓库 tag v0.3.0 / 镜像 / 文档站）。留一句钩子：『发布链路的流式改造和测试体系是这次迭代最重的两块，评委老师想先听哪块？』</a:t>
+              <a:t>【第11页 · 约 50 秒】谢谢 + 给链接（仓库 tag v0.3.0 / 镜像 / 文档站）。未实现项（arm64/瘦身/预热）不做单独页，评委问到再答，口径见答辩手册 Q8。留一句钩子：『发布链路的流式改造和测试体系是这次迭代最重的两块，评委老师想先听哪块？』</a:t>
             </a:r>
           </a:p>
         </p:txBody>
@@ -4946,7 +4875,7 @@
         <p:spPr>
           <a:xfrm>
             <a:off x="0" y="0"/>
-            <a:ext cx="12191695" cy="960120"/>
+            <a:ext cx="12191695" cy="6858000"/>
           </a:xfrm>
           <a:prstGeom prst="rect">
             <a:avLst/>
@@ -4988,8 +4917,8 @@
         </p:nvSpPr>
         <p:spPr>
           <a:xfrm>
-            <a:off x="502920" y="201168"/>
-            <a:ext cx="10515600" cy="548640"/>
+            <a:off x="822960" y="2011680"/>
+            <a:ext cx="10515600" cy="822960"/>
           </a:xfrm>
           <a:prstGeom prst="rect">
             <a:avLst/>
@@ -5004,368 +4933,52 @@
           <a:p>
             <a:pPr algn="l"/>
             <a:r>
-              <a:rPr sz="2600" b="1">
+              <a:rPr sz="4000" b="1">
                 <a:solidFill>
                   <a:srgbClr val="FFFFFF"/>
                 </a:solidFill>
               </a:rPr>
-              <a:t>如实说明：未做的与后续路线</a:t>
-            </a:r>
-          </a:p>
-        </p:txBody>
-      </p:sp>
-      <p:graphicFrame>
-        <p:nvGraphicFramePr>
-          <p:cNvPr id="4" name="Table 3"/>
-          <p:cNvGraphicFramePr>
-            <a:graphicFrameLocks noGrp="1"/>
-          </p:cNvGraphicFramePr>
+              <a:t>谢谢 · Q &amp; A</a:t>
+            </a:r>
+          </a:p>
+        </p:txBody>
+      </p:sp>
+      <p:sp>
+        <p:nvSpPr>
+          <p:cNvPr id="4" name="TextBox 3"/>
+          <p:cNvSpPr txBox="1"/>
           <p:nvPr/>
-        </p:nvGraphicFramePr>
-        <p:xfrm>
-          <a:off x="502920" y="1371600"/>
-          <a:ext cx="11155680" cy="1920240"/>
-        </p:xfrm>
-        <a:graphic>
-          <a:graphicData uri="http://schemas.openxmlformats.org/drawingml/2006/table">
-            <a:tbl>
-              <a:tblPr firstRow="1" bandRow="1">
-                <a:tableStyleId>{5C22544A-7EE6-4342-B048-85BDC9FD1C3A}</a:tableStyleId>
-              </a:tblPr>
-              <a:tblGrid>
-                <a:gridCol w="3291840"/>
-                <a:gridCol w="4023360"/>
-                <a:gridCol w="3840480"/>
-              </a:tblGrid>
-              <a:tr h="384048">
-                <a:tc>
-                  <a:txBody>
-                    <a:bodyPr/>
-                    <a:lstStyle/>
-                    <a:p>
-                      <a:r>
-                        <a:rPr sz="1400" b="1">
-                          <a:solidFill>
-                            <a:srgbClr val="FFFFFF"/>
-                          </a:solidFill>
-                        </a:rPr>
-                        <a:t>项</a:t>
-                      </a:r>
-                    </a:p>
-                  </a:txBody>
-                  <a:tcPr>
-                    <a:solidFill>
-                      <a:srgbClr val="2B6CB0"/>
-                    </a:solidFill>
-                  </a:tcPr>
-                </a:tc>
-                <a:tc>
-                  <a:txBody>
-                    <a:bodyPr/>
-                    <a:lstStyle/>
-                    <a:p>
-                      <a:r>
-                        <a:rPr sz="1400" b="1">
-                          <a:solidFill>
-                            <a:srgbClr val="FFFFFF"/>
-                          </a:solidFill>
-                        </a:rPr>
-                        <a:t>现状</a:t>
-                      </a:r>
-                    </a:p>
-                  </a:txBody>
-                  <a:tcPr>
-                    <a:solidFill>
-                      <a:srgbClr val="2B6CB0"/>
-                    </a:solidFill>
-                  </a:tcPr>
-                </a:tc>
-                <a:tc>
-                  <a:txBody>
-                    <a:bodyPr/>
-                    <a:lstStyle/>
-                    <a:p>
-                      <a:r>
-                        <a:rPr sz="1400" b="1">
-                          <a:solidFill>
-                            <a:srgbClr val="FFFFFF"/>
-                          </a:solidFill>
-                        </a:rPr>
-                        <a:t>计划</a:t>
-                      </a:r>
-                    </a:p>
-                  </a:txBody>
-                  <a:tcPr>
-                    <a:solidFill>
-                      <a:srgbClr val="2B6CB0"/>
-                    </a:solidFill>
-                  </a:tcPr>
-                </a:tc>
-              </a:tr>
-              <a:tr h="384048">
-                <a:tc>
-                  <a:txBody>
-                    <a:bodyPr/>
-                    <a:lstStyle/>
-                    <a:p>
-                      <a:r>
-                        <a:rPr sz="1400">
-                          <a:solidFill>
-                            <a:srgbClr val="1A202C"/>
-                          </a:solidFill>
-                        </a:rPr>
-                        <a:t>多架构镜像</a:t>
-                      </a:r>
-                    </a:p>
-                  </a:txBody>
-                  <a:tcPr>
-                    <a:solidFill>
-                      <a:srgbClr val="F2F5F9"/>
-                    </a:solidFill>
-                  </a:tcPr>
-                </a:tc>
-                <a:tc>
-                  <a:txBody>
-                    <a:bodyPr/>
-                    <a:lstStyle/>
-                    <a:p>
-                      <a:r>
-                        <a:rPr sz="1400">
-                          <a:solidFill>
-                            <a:srgbClr val="1A202C"/>
-                          </a:solidFill>
-                        </a:rPr>
-                        <a:t>仅 linux/amd64</a:t>
-                      </a:r>
-                    </a:p>
-                  </a:txBody>
-                  <a:tcPr>
-                    <a:solidFill>
-                      <a:srgbClr val="F2F5F9"/>
-                    </a:solidFill>
-                  </a:tcPr>
-                </a:tc>
-                <a:tc>
-                  <a:txBody>
-                    <a:bodyPr/>
-                    <a:lstStyle/>
-                    <a:p>
-                      <a:r>
-                        <a:rPr sz="1400">
-                          <a:solidFill>
-                            <a:srgbClr val="1A202C"/>
-                          </a:solidFill>
-                        </a:rPr>
-                        <a:t>arm64（buildx + QEMU）</a:t>
-                      </a:r>
-                    </a:p>
-                  </a:txBody>
-                  <a:tcPr>
-                    <a:solidFill>
-                      <a:srgbClr val="F2F5F9"/>
-                    </a:solidFill>
-                  </a:tcPr>
-                </a:tc>
-              </a:tr>
-              <a:tr h="384048">
-                <a:tc>
-                  <a:txBody>
-                    <a:bodyPr/>
-                    <a:lstStyle/>
-                    <a:p>
-                      <a:r>
-                        <a:rPr sz="1400">
-                          <a:solidFill>
-                            <a:srgbClr val="1A202C"/>
-                          </a:solidFill>
-                        </a:rPr>
-                        <a:t>镜像体积</a:t>
-                      </a:r>
-                    </a:p>
-                  </a:txBody>
-                  <a:tcPr>
-                    <a:solidFill>
-                      <a:srgbClr val="FFFFFF"/>
-                    </a:solidFill>
-                  </a:tcPr>
-                </a:tc>
-                <a:tc>
-                  <a:txBody>
-                    <a:bodyPr/>
-                    <a:lstStyle/>
-                    <a:p>
-                      <a:r>
-                        <a:rPr sz="1400">
-                          <a:solidFill>
-                            <a:srgbClr val="1A202C"/>
-                          </a:solidFill>
-                        </a:rPr>
-                        <a:t>507 MB（archlinux + 运行时）</a:t>
-                      </a:r>
-                    </a:p>
-                  </a:txBody>
-                  <a:tcPr>
-                    <a:solidFill>
-                      <a:srgbClr val="FFFFFF"/>
-                    </a:solidFill>
-                  </a:tcPr>
-                </a:tc>
-                <a:tc>
-                  <a:txBody>
-                    <a:bodyPr/>
-                    <a:lstStyle/>
-                    <a:p>
-                      <a:r>
-                        <a:rPr sz="1400">
-                          <a:solidFill>
-                            <a:srgbClr val="1A202C"/>
-                          </a:solidFill>
-                        </a:rPr>
-                        <a:t>换底座/瘦身，保持两阶段 glibc 一致</a:t>
-                      </a:r>
-                    </a:p>
-                  </a:txBody>
-                  <a:tcPr>
-                    <a:solidFill>
-                      <a:srgbClr val="FFFFFF"/>
-                    </a:solidFill>
-                  </a:tcPr>
-                </a:tc>
-              </a:tr>
-              <a:tr h="384048">
-                <a:tc>
-                  <a:txBody>
-                    <a:bodyPr/>
-                    <a:lstStyle/>
-                    <a:p>
-                      <a:r>
-                        <a:rPr sz="1400">
-                          <a:solidFill>
-                            <a:srgbClr val="1A202C"/>
-                          </a:solidFill>
-                        </a:rPr>
-                        <a:t>镜像预热 / 周期同步</a:t>
-                      </a:r>
-                    </a:p>
-                  </a:txBody>
-                  <a:tcPr>
-                    <a:solidFill>
-                      <a:srgbClr val="F2F5F9"/>
-                    </a:solidFill>
-                  </a:tcPr>
-                </a:tc>
-                <a:tc>
-                  <a:txBody>
-                    <a:bodyPr/>
-                    <a:lstStyle/>
-                    <a:p>
-                      <a:r>
-                        <a:rPr sz="1400">
-                          <a:solidFill>
-                            <a:srgbClr val="1A202C"/>
-                          </a:solidFill>
-                        </a:rPr>
-                        <a:t>未做（首次回源有冷启动）</a:t>
-                      </a:r>
-                    </a:p>
-                  </a:txBody>
-                  <a:tcPr>
-                    <a:solidFill>
-                      <a:srgbClr val="F2F5F9"/>
-                    </a:solidFill>
-                  </a:tcPr>
-                </a:tc>
-                <a:tc>
-                  <a:txBody>
-                    <a:bodyPr/>
-                    <a:lstStyle/>
-                    <a:p>
-                      <a:r>
-                        <a:rPr sz="1400">
-                          <a:solidFill>
-                            <a:srgbClr val="1A202C"/>
-                          </a:solidFill>
-                        </a:rPr>
-                        <a:t>serve --sync-interval</a:t>
-                      </a:r>
-                    </a:p>
-                  </a:txBody>
-                  <a:tcPr>
-                    <a:solidFill>
-                      <a:srgbClr val="F2F5F9"/>
-                    </a:solidFill>
-                  </a:tcPr>
-                </a:tc>
-              </a:tr>
-              <a:tr h="384048">
-                <a:tc>
-                  <a:txBody>
-                    <a:bodyPr/>
-                    <a:lstStyle/>
-                    <a:p>
-                      <a:r>
-                        <a:rPr sz="1400">
-                          <a:solidFill>
-                            <a:srgbClr val="1A202C"/>
-                          </a:solidFill>
-                        </a:rPr>
-                        <a:t>K8s 清单</a:t>
-                      </a:r>
-                    </a:p>
-                  </a:txBody>
-                  <a:tcPr>
-                    <a:solidFill>
-                      <a:srgbClr val="FFFFFF"/>
-                    </a:solidFill>
-                  </a:tcPr>
-                </a:tc>
-                <a:tc>
-                  <a:txBody>
-                    <a:bodyPr/>
-                    <a:lstStyle/>
-                    <a:p>
-                      <a:r>
-                        <a:rPr sz="1400">
-                          <a:solidFill>
-                            <a:srgbClr val="1A202C"/>
-                          </a:solidFill>
-                        </a:rPr>
-                        <a:t>未做（提供 docker compose）</a:t>
-                      </a:r>
-                    </a:p>
-                  </a:txBody>
-                  <a:tcPr>
-                    <a:solidFill>
-                      <a:srgbClr val="FFFFFF"/>
-                    </a:solidFill>
-                  </a:tcPr>
-                </a:tc>
-                <a:tc>
-                  <a:txBody>
-                    <a:bodyPr/>
-                    <a:lstStyle/>
-                    <a:p>
-                      <a:r>
-                        <a:rPr sz="1400">
-                          <a:solidFill>
-                            <a:srgbClr val="1A202C"/>
-                          </a:solidFill>
-                        </a:rPr>
-                        <a:t>可选补充</a:t>
-                      </a:r>
-                    </a:p>
-                  </a:txBody>
-                  <a:tcPr>
-                    <a:solidFill>
-                      <a:srgbClr val="FFFFFF"/>
-                    </a:solidFill>
-                  </a:tcPr>
-                </a:tc>
-              </a:tr>
-            </a:tbl>
-          </a:graphicData>
-        </a:graphic>
-      </p:graphicFrame>
+        </p:nvSpPr>
+        <p:spPr>
+          <a:xfrm>
+            <a:off x="868680" y="3200400"/>
+            <a:ext cx="10515600" cy="1645920"/>
+          </a:xfrm>
+          <a:prstGeom prst="rect">
+            <a:avLst/>
+          </a:prstGeom>
+          <a:noFill/>
+        </p:spPr>
+        <p:txBody>
+          <a:bodyPr wrap="square">
+            <a:spAutoFit/>
+          </a:bodyPr>
+          <a:lstStyle/>
+          <a:p>
+            <a:pPr algn="l"/>
+            <a:r>
+              <a:rPr sz="1600" b="0">
+                <a:solidFill>
+                  <a:srgbClr val="FFFFFF"/>
+                </a:solidFill>
+              </a:rPr>
+              <a:t>仓库  https://atomgit.com/ystyle/cjreg  （tag v0.3.0）
+镜像  ghcr.io/ystyle/cjreg:v0.3.0
+文档  https://ystyle.top/cjreg/   验证 docs/verification.md   基准 docs/benchmark.md</a:t>
+            </a:r>
+          </a:p>
+        </p:txBody>
+      </p:sp>
       <p:sp>
         <p:nvSpPr>
           <p:cNvPr id="5" name="TextBox 4"/>
@@ -5374,8 +4987,8 @@
         </p:nvSpPr>
         <p:spPr>
           <a:xfrm>
-            <a:off x="548640" y="4114800"/>
-            <a:ext cx="10972800" cy="1737360"/>
+            <a:off x="868680" y="5074920"/>
+            <a:ext cx="10515600" cy="457200"/>
           </a:xfrm>
           <a:prstGeom prst="rect">
             <a:avLst/>
@@ -5390,143 +5003,12 @@
           <a:p>
             <a:pPr algn="l"/>
             <a:r>
-              <a:rPr sz="1500" b="0">
-                <a:solidFill>
-                  <a:srgbClr val="5A6370"/>
-                </a:solidFill>
-              </a:rPr>
-              <a:t>取舍原则：先把「发布/索引/多仓/权限」主链路的正确性与可复现性做扎实，再把交付形态（多架构、体积、编排）补齐；功能缺失与限制全部写在仓库 docs 里。</a:t>
-            </a:r>
-          </a:p>
-        </p:txBody>
-      </p:sp>
-    </p:spTree>
-  </p:cSld>
-  <p:clrMapOvr>
-    <a:masterClrMapping/>
-  </p:clrMapOvr>
-</p:sld>
-</file>
-
-<file path=ppt/slides/slide12.xml><?xml version="1.0" encoding="utf-8"?>
-<p:sld xmlns:a="http://schemas.openxmlformats.org/drawingml/2006/main" xmlns:p="http://schemas.openxmlformats.org/presentationml/2006/main" xmlns:r="http://schemas.openxmlformats.org/officeDocument/2006/relationships">
-  <p:cSld>
-    <p:spTree>
-      <p:nvGrpSpPr>
-        <p:cNvPr id="1" name=""/>
-        <p:cNvGrpSpPr/>
-        <p:nvPr/>
-      </p:nvGrpSpPr>
-      <p:grpSpPr/>
-      <p:sp>
-        <p:nvSpPr>
-          <p:cNvPr id="2" name="Rectangle 1"/>
-          <p:cNvSpPr/>
-          <p:nvPr/>
-        </p:nvSpPr>
-        <p:spPr>
-          <a:xfrm>
-            <a:off x="0" y="0"/>
-            <a:ext cx="12191695" cy="6858000"/>
-          </a:xfrm>
-          <a:prstGeom prst="rect">
-            <a:avLst/>
-          </a:prstGeom>
-          <a:solidFill>
-            <a:srgbClr val="2B6CB0"/>
-          </a:solidFill>
-          <a:ln>
-            <a:noFill/>
-          </a:ln>
-        </p:spPr>
-        <p:style>
-          <a:lnRef idx="1">
-            <a:schemeClr val="accent1"/>
-          </a:lnRef>
-          <a:fillRef idx="3">
-            <a:schemeClr val="accent1"/>
-          </a:fillRef>
-          <a:effectRef idx="2">
-            <a:schemeClr val="accent1"/>
-          </a:effectRef>
-          <a:fontRef idx="minor">
-            <a:schemeClr val="lt1"/>
-          </a:fontRef>
-        </p:style>
-        <p:txBody>
-          <a:bodyPr rtlCol="0" anchor="ctr"/>
-          <a:lstStyle/>
-          <a:p>
-            <a:pPr algn="ctr"/>
-          </a:p>
-        </p:txBody>
-      </p:sp>
-      <p:sp>
-        <p:nvSpPr>
-          <p:cNvPr id="3" name="TextBox 2"/>
-          <p:cNvSpPr txBox="1"/>
-          <p:nvPr/>
-        </p:nvSpPr>
-        <p:spPr>
-          <a:xfrm>
-            <a:off x="822960" y="2011680"/>
-            <a:ext cx="10515600" cy="822960"/>
-          </a:xfrm>
-          <a:prstGeom prst="rect">
-            <a:avLst/>
-          </a:prstGeom>
-          <a:noFill/>
-        </p:spPr>
-        <p:txBody>
-          <a:bodyPr wrap="square">
-            <a:spAutoFit/>
-          </a:bodyPr>
-          <a:lstStyle/>
-          <a:p>
-            <a:pPr algn="l"/>
-            <a:r>
-              <a:rPr sz="4000" b="1">
+              <a:rPr sz="1200" b="0">
                 <a:solidFill>
                   <a:srgbClr val="FFFFFF"/>
                 </a:solidFill>
               </a:rPr>
-              <a:t>谢谢 · Q &amp; A</a:t>
-            </a:r>
-          </a:p>
-        </p:txBody>
-      </p:sp>
-      <p:sp>
-        <p:nvSpPr>
-          <p:cNvPr id="4" name="TextBox 3"/>
-          <p:cNvSpPr txBox="1"/>
-          <p:nvPr/>
-        </p:nvSpPr>
-        <p:spPr>
-          <a:xfrm>
-            <a:off x="868680" y="3200400"/>
-            <a:ext cx="10515600" cy="1645920"/>
-          </a:xfrm>
-          <a:prstGeom prst="rect">
-            <a:avLst/>
-          </a:prstGeom>
-          <a:noFill/>
-        </p:spPr>
-        <p:txBody>
-          <a:bodyPr wrap="square">
-            <a:spAutoFit/>
-          </a:bodyPr>
-          <a:lstStyle/>
-          <a:p>
-            <a:pPr algn="l"/>
-            <a:r>
-              <a:rPr sz="1600" b="0">
-                <a:solidFill>
-                  <a:srgbClr val="FFFFFF"/>
-                </a:solidFill>
-              </a:rPr>
-              <a:t>仓库  https://atomgit.com/ystyle/cjreg  （tag v0.3.0）
-镜像  ghcr.io/ystyle/cjreg:v0.3.0
-文档  https://ystyle.top/cjreg/   验证 docs/verification.md   基准 docs/benchmark.md</a:t>
+              <a:t>未实现功能与限制：仓库 docs/finals-submission.md §4.5（按赛事要求书面注明）</a:t>
             </a:r>
           </a:p>
         </p:txBody>
